--- a/Rifqa-Capstone2.pptx
+++ b/Rifqa-Capstone2.pptx
@@ -4,6 +4,9 @@
   <p:sldMasterIdLst>
     <p:sldMasterId id="2147483648" r:id="rId1"/>
   </p:sldMasterIdLst>
+  <p:notesMasterIdLst>
+    <p:notesMasterId r:id="rId15"/>
+  </p:notesMasterIdLst>
   <p:sldIdLst>
     <p:sldId id="256" r:id="rId2"/>
     <p:sldId id="257" r:id="rId3"/>
@@ -19,9 +22,6 @@
     <p:sldId id="267" r:id="rId13"/>
     <p:sldId id="268" r:id="rId14"/>
   </p:sldIdLst>
-  <p:notesMasterIdLst>
-    <p:notesMasterId r:id="rId15"/>
-  </p:notesMasterIdLst>
   <p:sldSz cx="12192000" cy="6858000"/>
   <p:notesSz cx="6858000" cy="12192000"/>
   <p:defaultTextStyle>
@@ -116,6 +116,11 @@
       </a:defRPr>
     </a:lvl9pPr>
   </p:defaultTextStyle>
+  <p:extLst>
+    <p:ext uri="{EFAFB233-063F-42B5-8137-9DF3F51BA10A}">
+      <p15:sldGuideLst xmlns:p15="http://schemas.microsoft.com/office/powerpoint/2012/main"/>
+    </p:ext>
+  </p:extLst>
 </p:presentation>
 </file>
 
@@ -141,234 +146,10 @@
           <a:chExt cx="0" cy="0"/>
         </a:xfrm>
       </p:grpSpPr>
-      <p:sp>
-        <p:nvSpPr>
-          <p:cNvPr id="2" name="Header Placeholder 1"/>
-          <p:cNvSpPr>
-            <a:spLocks noGrp="1"/>
-          </p:cNvSpPr>
-          <p:nvPr>
-            <p:ph type="hdr" sz="quarter"/>
-          </p:nvPr>
-        </p:nvSpPr>
-        <p:spPr>
-          <a:xfrm>
-            <a:off x="0" y="0"/>
-            <a:ext cx="2971800" cy="458788"/>
-          </a:xfrm>
-          <a:prstGeom prst="rect">
-            <a:avLst/>
-          </a:prstGeom>
-        </p:spPr>
-        <p:txBody>
-          <a:bodyPr vert="horz" lIns="91440" tIns="45720" rIns="91440" bIns="45720" rtlCol="0"/>
-          <a:lstStyle>
-            <a:lvl1pPr algn="l">
-              <a:defRPr sz="1200"/>
-            </a:lvl1pPr>
-          </a:lstStyle>
-          <a:p>
-            <a:endParaRPr lang="en-US"/>
-          </a:p>
-        </p:txBody>
-      </p:sp>
-      <p:sp>
-        <p:nvSpPr>
-          <p:cNvPr id="3" name="Date Placeholder 2"/>
-          <p:cNvSpPr>
-            <a:spLocks noGrp="1"/>
-          </p:cNvSpPr>
-          <p:nvPr>
-            <p:ph type="dt" idx="1"/>
-          </p:nvPr>
-        </p:nvSpPr>
-        <p:spPr>
-          <a:xfrm>
-            <a:off x="3884613" y="0"/>
-            <a:ext cx="2971800" cy="458788"/>
-          </a:xfrm>
-          <a:prstGeom prst="rect">
-            <a:avLst/>
-          </a:prstGeom>
-        </p:spPr>
-        <p:txBody>
-          <a:bodyPr vert="horz" lIns="91440" tIns="45720" rIns="91440" bIns="45720" rtlCol="0"/>
-          <a:lstStyle>
-            <a:lvl1pPr algn="r">
-              <a:defRPr sz="1200"/>
-            </a:lvl1pPr>
-          </a:lstStyle>
-          <a:p>
-            <a:fld id="{5282F153-3F37-0F45-9E97-73ACFA13230C}" type="datetimeFigureOut">
-              <a:rPr lang="en-US"/>
-              <a:t>7/23/19</a:t>
-            </a:fld>
-            <a:endParaRPr lang="en-US"/>
-          </a:p>
-        </p:txBody>
-      </p:sp>
-      <p:sp>
-        <p:nvSpPr>
-          <p:cNvPr id="4" name="Slide Image Placeholder 3"/>
-          <p:cNvSpPr>
-            <a:spLocks noGrp="1" noRot="1" noChangeAspect="1"/>
-          </p:cNvSpPr>
-          <p:nvPr>
-            <p:ph type="sldImg" idx="2"/>
-          </p:nvPr>
-        </p:nvSpPr>
-        <p:spPr>
-          <a:xfrm>
-            <a:off x="685800" y="1143000"/>
-            <a:ext cx="5486400" cy="3086100"/>
-          </a:xfrm>
-          <a:prstGeom prst="rect">
-            <a:avLst/>
-          </a:prstGeom>
-          <a:noFill/>
-          <a:ln w="12700">
-            <a:solidFill>
-              <a:prstClr val="black"/>
-            </a:solidFill>
-          </a:ln>
-        </p:spPr>
-        <p:txBody>
-          <a:bodyPr vert="horz" lIns="91440" tIns="45720" rIns="91440" bIns="45720" rtlCol="0" anchor="ctr"/>
-          <a:lstStyle/>
-          <a:p>
-            <a:endParaRPr lang="en-US"/>
-          </a:p>
-        </p:txBody>
-      </p:sp>
-      <p:sp>
-        <p:nvSpPr>
-          <p:cNvPr id="5" name="Notes Placeholder 4"/>
-          <p:cNvSpPr>
-            <a:spLocks noGrp="1"/>
-          </p:cNvSpPr>
-          <p:nvPr>
-            <p:ph type="body" sz="quarter" idx="3"/>
-          </p:nvPr>
-        </p:nvSpPr>
-        <p:spPr>
-          <a:xfrm>
-            <a:off x="685800" y="4400550"/>
-            <a:ext cx="5486400" cy="3600450"/>
-          </a:xfrm>
-          <a:prstGeom prst="rect">
-            <a:avLst/>
-          </a:prstGeom>
-        </p:spPr>
-        <p:txBody>
-          <a:bodyPr vert="horz" lIns="91440" tIns="45720" rIns="91440" bIns="45720" rtlCol="0"/>
-          <a:lstStyle/>
-          <a:p>
-            <a:pPr lvl="0"/>
-            <a:r>
-              <a:rPr lang="en-US"/>
-              <a:t>Click to edit Master text styles</a:t>
-            </a:r>
-          </a:p>
-          <a:p>
-            <a:pPr lvl="1"/>
-            <a:r>
-              <a:rPr lang="en-US"/>
-              <a:t>Second level</a:t>
-            </a:r>
-          </a:p>
-          <a:p>
-            <a:pPr lvl="2"/>
-            <a:r>
-              <a:rPr lang="en-US"/>
-              <a:t>Third level</a:t>
-            </a:r>
-          </a:p>
-          <a:p>
-            <a:pPr lvl="3"/>
-            <a:r>
-              <a:rPr lang="en-US"/>
-              <a:t>Fourth level</a:t>
-            </a:r>
-          </a:p>
-          <a:p>
-            <a:pPr lvl="4"/>
-            <a:r>
-              <a:rPr lang="en-US"/>
-              <a:t>Fifth level</a:t>
-            </a:r>
-          </a:p>
-        </p:txBody>
-      </p:sp>
-      <p:sp>
-        <p:nvSpPr>
-          <p:cNvPr id="6" name="Footer Placeholder 5"/>
-          <p:cNvSpPr>
-            <a:spLocks noGrp="1"/>
-          </p:cNvSpPr>
-          <p:nvPr>
-            <p:ph type="ftr" sz="quarter" idx="4"/>
-          </p:nvPr>
-        </p:nvSpPr>
-        <p:spPr>
-          <a:xfrm>
-            <a:off x="0" y="8685213"/>
-            <a:ext cx="2971800" cy="458787"/>
-          </a:xfrm>
-          <a:prstGeom prst="rect">
-            <a:avLst/>
-          </a:prstGeom>
-        </p:spPr>
-        <p:txBody>
-          <a:bodyPr vert="horz" lIns="91440" tIns="45720" rIns="91440" bIns="45720" rtlCol="0" anchor="b"/>
-          <a:lstStyle>
-            <a:lvl1pPr algn="l">
-              <a:defRPr sz="1200"/>
-            </a:lvl1pPr>
-          </a:lstStyle>
-          <a:p>
-            <a:endParaRPr lang="en-US"/>
-          </a:p>
-        </p:txBody>
-      </p:sp>
-      <p:sp>
-        <p:nvSpPr>
-          <p:cNvPr id="7" name="Slide Number Placeholder 6"/>
-          <p:cNvSpPr>
-            <a:spLocks noGrp="1"/>
-          </p:cNvSpPr>
-          <p:nvPr>
-            <p:ph type="sldNum" sz="quarter" idx="5"/>
-          </p:nvPr>
-        </p:nvSpPr>
-        <p:spPr>
-          <a:xfrm>
-            <a:off x="3884613" y="8685213"/>
-            <a:ext cx="2971800" cy="458787"/>
-          </a:xfrm>
-          <a:prstGeom prst="rect">
-            <a:avLst/>
-          </a:prstGeom>
-        </p:spPr>
-        <p:txBody>
-          <a:bodyPr vert="horz" lIns="91440" tIns="45720" rIns="91440" bIns="45720" rtlCol="0" anchor="b"/>
-          <a:lstStyle>
-            <a:lvl1pPr algn="r">
-              <a:defRPr sz="1200"/>
-            </a:lvl1pPr>
-          </a:lstStyle>
-          <a:p>
-            <a:fld id="{CE5E9CC1-C706-0F49-92D6-E571CC5EEA8F}" type="slidenum">
-              <a:rPr lang="en-US"/>
-              <a:t>‹#›</a:t>
-            </a:fld>
-            <a:endParaRPr lang="en-US"/>
-          </a:p>
-        </p:txBody>
-      </p:sp>
     </p:spTree>
     <p:extLst>
       <p:ext uri="{BB962C8B-B14F-4D97-AF65-F5344CB8AC3E}">
-        <p14:creationId xmlns:p14="http://schemas.microsoft.com/office/powerpoint/2010/main" val="1024086991"/>
+        <p14:creationId xmlns:p14="http://schemas.microsoft.com/office/powerpoint/2010/main" val="2583101175"/>
       </p:ext>
     </p:extLst>
   </p:cSld>
@@ -516,7 +297,6 @@
               <a:rPr lang="en-US" dirty="0"/>
               <a:t>Rifqa means companionship in Arabic. It is a Spring Boot REST API that matches roommates by lifestyle using AI, and covers everything after the match: rooms, agreements, reviews and reports.</a:t>
             </a:r>
-            <a:endParaRPr lang="en-US" dirty="0"/>
           </a:p>
         </p:txBody>
       </p:sp>
@@ -604,7 +384,6 @@
               <a:rPr lang="en-US" dirty="0"/>
               <a:t>The renter ID in the path is checked against the listing owner, so one renter can't answer requests for another renter's room.</a:t>
             </a:r>
-            <a:endParaRPr lang="en-US" dirty="0"/>
           </a:p>
         </p:txBody>
       </p:sp>
@@ -692,7 +471,6 @@
               <a:rPr lang="en-US" dirty="0"/>
               <a:t>The status flow DRAFT, ACTIVE, TERMINATED controls what can be edited and when reviews open.</a:t>
             </a:r>
-            <a:endParaRPr lang="en-US" dirty="0"/>
           </a:p>
         </p:txBody>
       </p:sp>
@@ -780,7 +558,6 @@
               <a:rPr lang="en-US" dirty="0"/>
               <a:t>Reviews can only come from real roommates, which makes the rating meaningful. Reports are handled by admins.</a:t>
             </a:r>
-            <a:endParaRPr lang="en-US" dirty="0"/>
           </a:p>
         </p:txBody>
       </p:sp>
@@ -864,10 +641,6 @@
           <a:bodyPr/>
           <a:lstStyle/>
           <a:p>
-            <a:r>
-              <a:rPr lang="en-US" dirty="0"/>
-              <a:t/>
-            </a:r>
             <a:endParaRPr lang="en-US" dirty="0"/>
           </a:p>
         </p:txBody>
@@ -956,7 +729,6 @@
               <a:rPr lang="en-US" dirty="0"/>
               <a:t>Three problems: matching is random, rules are verbal, and there is no trust layer.</a:t>
             </a:r>
-            <a:endParaRPr lang="en-US" dirty="0"/>
           </a:p>
         </p:txBody>
       </p:sp>
@@ -1044,7 +816,6 @@
               <a:rPr lang="en-US" dirty="0"/>
               <a:t>Abdullah is a hypothetical user. Each thing that goes wrong for him maps to a missing feature: matching, room search, agreements and reviews.</a:t>
             </a:r>
-            <a:endParaRPr lang="en-US" dirty="0"/>
           </a:p>
         </p:txBody>
       </p:sp>
@@ -1132,7 +903,6 @@
               <a:rPr lang="en-US" dirty="0"/>
               <a:t>Each problem from Abdullah's story has a matching feature in Rifqa.</a:t>
             </a:r>
-            <a:endParaRPr lang="en-US" dirty="0"/>
           </a:p>
         </p:txBody>
       </p:sp>
@@ -1220,7 +990,6 @@
               <a:rPr lang="en-US" dirty="0"/>
               <a:t>The two external services are the OpenAI-compatible chat API for matching and Gmail SMTP for email. The AI only receives lifestyle fields.</a:t>
             </a:r>
-            <a:endParaRPr lang="en-US" dirty="0"/>
           </a:p>
         </p:txBody>
       </p:sp>
@@ -1308,7 +1077,6 @@
               <a:rPr lang="en-US" dirty="0"/>
               <a:t>Out of 73 endpoints, these 15 carry the business logic. They follow a user from getting matched to reviewing their roommate.</a:t>
             </a:r>
-            <a:endParaRPr lang="en-US" dirty="0"/>
           </a:p>
         </p:txBody>
       </p:sp>
@@ -1396,7 +1164,6 @@
               <a:rPr lang="en-US" dirty="0"/>
               <a:t>Suggest and confirm are split on purpose: the AI proposes, the user decides.</a:t>
             </a:r>
-            <a:endParaRPr lang="en-US" dirty="0"/>
           </a:p>
         </p:txBody>
       </p:sp>
@@ -1484,7 +1251,6 @@
               <a:rPr lang="en-US" dirty="0"/>
               <a:t>The AI output is never trusted blindly: the score is clamped and the suggested ID must be one of the candidates sent.</a:t>
             </a:r>
-            <a:endParaRPr lang="en-US" dirty="0"/>
           </a:p>
         </p:txBody>
       </p:sp>
@@ -1572,7 +1338,6 @@
               <a:rPr lang="en-US" dirty="0"/>
               <a:t>Search is built around what users care about: city and budget.</a:t>
             </a:r>
-            <a:endParaRPr lang="en-US" dirty="0"/>
           </a:p>
         </p:txBody>
       </p:sp>
@@ -1645,6 +1410,11 @@
 <file path=ppt/slideMasters/slideMaster1.xml><?xml version="1.0" encoding="utf-8"?>
 <p:sldMaster xmlns:a="http://schemas.openxmlformats.org/drawingml/2006/main" xmlns:r="http://schemas.openxmlformats.org/officeDocument/2006/relationships" xmlns:p="http://schemas.openxmlformats.org/presentationml/2006/main">
   <p:cSld>
+    <p:bg>
+      <p:bgRef idx="1001">
+        <a:schemeClr val="bg1"/>
+      </p:bgRef>
+    </p:bg>
     <p:spTree>
       <p:nvGrpSpPr>
         <p:cNvPr id="1" name=""/>
@@ -1927,6 +1697,7 @@
         <a:solidFill>
           <a:srgbClr val="16302C"/>
         </a:solidFill>
+        <a:effectLst/>
       </p:bgPr>
     </p:bg>
     <p:spTree>
@@ -1967,6 +1738,13 @@
             <a:prstDash val="solid"/>
           </a:ln>
         </p:spPr>
+        <p:txBody>
+          <a:bodyPr/>
+          <a:lstStyle/>
+          <a:p>
+            <a:endParaRPr lang="ar-SA"/>
+          </a:p>
+        </p:txBody>
       </p:sp>
       <p:sp>
         <p:nvSpPr>
@@ -1989,11 +1767,11 @@
           <a:bodyPr wrap="square" lIns="0" tIns="0" rIns="0" bIns="0" rtlCol="0" anchor="ctr"/>
           <a:lstStyle/>
           <a:p>
-            <a:pPr indent="0" marL="0">
-              <a:buNone/>
-            </a:pPr>
-            <a:r>
-              <a:rPr lang="en-US" sz="1200" b="1" spc="400" kern="0" dirty="0">
+            <a:pPr marL="0" indent="0">
+              <a:buNone/>
+            </a:pPr>
+            <a:r>
+              <a:rPr lang="en-US" sz="1200" b="1" kern="0" spc="400" dirty="0">
                 <a:solidFill>
                   <a:srgbClr val="EDB897"/>
                 </a:solidFill>
@@ -2028,7 +1806,7 @@
           <a:bodyPr wrap="square" lIns="0" tIns="0" rIns="0" bIns="0" rtlCol="0" anchor="b"/>
           <a:lstStyle/>
           <a:p>
-            <a:pPr indent="0" marL="0">
+            <a:pPr marL="0" indent="0">
               <a:buNone/>
             </a:pPr>
             <a:r>
@@ -2067,7 +1845,7 @@
           <a:bodyPr wrap="square" lIns="0" tIns="0" rIns="0" bIns="0" rtlCol="0" anchor="b"/>
           <a:lstStyle/>
           <a:p>
-            <a:pPr rtl="1" algn="l" indent="0" marL="0">
+            <a:pPr marL="0" indent="0" algn="l" rtl="1">
               <a:buNone/>
             </a:pPr>
             <a:r>
@@ -2106,7 +1884,7 @@
           <a:bodyPr wrap="square" lIns="0" tIns="0" rIns="0" bIns="0" rtlCol="0" anchor="ctr"/>
           <a:lstStyle/>
           <a:p>
-            <a:pPr indent="0" marL="0">
+            <a:pPr marL="0" indent="0">
               <a:buNone/>
             </a:pPr>
             <a:r>
@@ -2145,7 +1923,7 @@
           <a:bodyPr wrap="square" lIns="0" tIns="0" rIns="0" bIns="0" rtlCol="0" anchor="ctr"/>
           <a:lstStyle/>
           <a:p>
-            <a:pPr indent="0" marL="0">
+            <a:pPr marL="0" indent="0">
               <a:buNone/>
             </a:pPr>
             <a:r>
@@ -2184,7 +1962,7 @@
           <a:bodyPr wrap="square" lIns="0" tIns="0" rIns="0" bIns="0" rtlCol="0" anchor="ctr"/>
           <a:lstStyle/>
           <a:p>
-            <a:pPr indent="0" marL="0">
+            <a:pPr marL="0" indent="0">
               <a:buNone/>
             </a:pPr>
             <a:r>
@@ -2223,7 +2001,7 @@
           <a:bodyPr wrap="square" lIns="0" tIns="0" rIns="0" bIns="0" rtlCol="0" anchor="ctr"/>
           <a:lstStyle/>
           <a:p>
-            <a:pPr indent="0" marL="0">
+            <a:pPr marL="0" indent="0">
               <a:buNone/>
             </a:pPr>
             <a:r>
@@ -2265,6 +2043,13 @@
             <a:prstDash val="solid"/>
           </a:ln>
         </p:spPr>
+        <p:txBody>
+          <a:bodyPr/>
+          <a:lstStyle/>
+          <a:p>
+            <a:endParaRPr lang="ar-SA"/>
+          </a:p>
+        </p:txBody>
       </p:sp>
       <p:sp>
         <p:nvSpPr>
@@ -2294,6 +2079,13 @@
             <a:prstDash val="solid"/>
           </a:ln>
         </p:spPr>
+        <p:txBody>
+          <a:bodyPr/>
+          <a:lstStyle/>
+          <a:p>
+            <a:endParaRPr lang="ar-SA"/>
+          </a:p>
+        </p:txBody>
       </p:sp>
       <p:sp>
         <p:nvSpPr>
@@ -2319,6 +2111,13 @@
             <a:prstDash val="solid"/>
           </a:ln>
         </p:spPr>
+        <p:txBody>
+          <a:bodyPr/>
+          <a:lstStyle/>
+          <a:p>
+            <a:endParaRPr lang="ar-SA"/>
+          </a:p>
+        </p:txBody>
       </p:sp>
       <p:sp>
         <p:nvSpPr>
@@ -2348,6 +2147,13 @@
             <a:prstDash val="solid"/>
           </a:ln>
         </p:spPr>
+        <p:txBody>
+          <a:bodyPr/>
+          <a:lstStyle/>
+          <a:p>
+            <a:endParaRPr lang="ar-SA"/>
+          </a:p>
+        </p:txBody>
       </p:sp>
       <p:sp>
         <p:nvSpPr>
@@ -2373,6 +2179,13 @@
             <a:prstDash val="solid"/>
           </a:ln>
         </p:spPr>
+        <p:txBody>
+          <a:bodyPr/>
+          <a:lstStyle/>
+          <a:p>
+            <a:endParaRPr lang="ar-SA"/>
+          </a:p>
+        </p:txBody>
       </p:sp>
       <p:sp>
         <p:nvSpPr>
@@ -2402,6 +2215,13 @@
             <a:prstDash val="solid"/>
           </a:ln>
         </p:spPr>
+        <p:txBody>
+          <a:bodyPr/>
+          <a:lstStyle/>
+          <a:p>
+            <a:endParaRPr lang="ar-SA"/>
+          </a:p>
+        </p:txBody>
       </p:sp>
       <p:sp>
         <p:nvSpPr>
@@ -2431,6 +2251,13 @@
             <a:prstDash val="solid"/>
           </a:ln>
         </p:spPr>
+        <p:txBody>
+          <a:bodyPr/>
+          <a:lstStyle/>
+          <a:p>
+            <a:endParaRPr lang="ar-SA"/>
+          </a:p>
+        </p:txBody>
       </p:sp>
       <p:sp>
         <p:nvSpPr>
@@ -2456,6 +2283,13 @@
             <a:prstDash val="solid"/>
           </a:ln>
         </p:spPr>
+        <p:txBody>
+          <a:bodyPr/>
+          <a:lstStyle/>
+          <a:p>
+            <a:endParaRPr lang="ar-SA"/>
+          </a:p>
+        </p:txBody>
       </p:sp>
       <p:sp>
         <p:nvSpPr>
@@ -2485,6 +2319,13 @@
             <a:prstDash val="solid"/>
           </a:ln>
         </p:spPr>
+        <p:txBody>
+          <a:bodyPr/>
+          <a:lstStyle/>
+          <a:p>
+            <a:endParaRPr lang="ar-SA"/>
+          </a:p>
+        </p:txBody>
       </p:sp>
       <p:sp>
         <p:nvSpPr>
@@ -2510,6 +2351,13 @@
             <a:prstDash val="solid"/>
           </a:ln>
         </p:spPr>
+        <p:txBody>
+          <a:bodyPr/>
+          <a:lstStyle/>
+          <a:p>
+            <a:endParaRPr lang="ar-SA"/>
+          </a:p>
+        </p:txBody>
       </p:sp>
       <p:sp>
         <p:nvSpPr>
@@ -2539,6 +2387,13 @@
             <a:prstDash val="solid"/>
           </a:ln>
         </p:spPr>
+        <p:txBody>
+          <a:bodyPr/>
+          <a:lstStyle/>
+          <a:p>
+            <a:endParaRPr lang="ar-SA"/>
+          </a:p>
+        </p:txBody>
       </p:sp>
       <p:sp>
         <p:nvSpPr>
@@ -2564,6 +2419,13 @@
             <a:prstDash val="solid"/>
           </a:ln>
         </p:spPr>
+        <p:txBody>
+          <a:bodyPr/>
+          <a:lstStyle/>
+          <a:p>
+            <a:endParaRPr lang="ar-SA"/>
+          </a:p>
+        </p:txBody>
       </p:sp>
       <p:sp>
         <p:nvSpPr>
@@ -2589,6 +2451,13 @@
             <a:prstDash val="solid"/>
           </a:ln>
         </p:spPr>
+        <p:txBody>
+          <a:bodyPr/>
+          <a:lstStyle/>
+          <a:p>
+            <a:endParaRPr lang="ar-SA"/>
+          </a:p>
+        </p:txBody>
       </p:sp>
       <p:sp>
         <p:nvSpPr>
@@ -2618,6 +2487,13 @@
             <a:prstDash val="solid"/>
           </a:ln>
         </p:spPr>
+        <p:txBody>
+          <a:bodyPr/>
+          <a:lstStyle/>
+          <a:p>
+            <a:endParaRPr lang="ar-SA"/>
+          </a:p>
+        </p:txBody>
       </p:sp>
       <p:sp>
         <p:nvSpPr>
@@ -2643,6 +2519,13 @@
             <a:prstDash val="solid"/>
           </a:ln>
         </p:spPr>
+        <p:txBody>
+          <a:bodyPr/>
+          <a:lstStyle/>
+          <a:p>
+            <a:endParaRPr lang="ar-SA"/>
+          </a:p>
+        </p:txBody>
       </p:sp>
       <p:sp>
         <p:nvSpPr>
@@ -2672,6 +2555,13 @@
             <a:prstDash val="solid"/>
           </a:ln>
         </p:spPr>
+        <p:txBody>
+          <a:bodyPr/>
+          <a:lstStyle/>
+          <a:p>
+            <a:endParaRPr lang="ar-SA"/>
+          </a:p>
+        </p:txBody>
       </p:sp>
       <p:sp>
         <p:nvSpPr>
@@ -2697,6 +2587,13 @@
             <a:prstDash val="solid"/>
           </a:ln>
         </p:spPr>
+        <p:txBody>
+          <a:bodyPr/>
+          <a:lstStyle/>
+          <a:p>
+            <a:endParaRPr lang="ar-SA"/>
+          </a:p>
+        </p:txBody>
       </p:sp>
       <p:sp>
         <p:nvSpPr>
@@ -2726,6 +2623,13 @@
             <a:prstDash val="solid"/>
           </a:ln>
         </p:spPr>
+        <p:txBody>
+          <a:bodyPr/>
+          <a:lstStyle/>
+          <a:p>
+            <a:endParaRPr lang="ar-SA"/>
+          </a:p>
+        </p:txBody>
       </p:sp>
       <p:sp>
         <p:nvSpPr>
@@ -2755,6 +2659,13 @@
             <a:prstDash val="solid"/>
           </a:ln>
         </p:spPr>
+        <p:txBody>
+          <a:bodyPr/>
+          <a:lstStyle/>
+          <a:p>
+            <a:endParaRPr lang="ar-SA"/>
+          </a:p>
+        </p:txBody>
       </p:sp>
       <p:sp>
         <p:nvSpPr>
@@ -2780,6 +2691,13 @@
             <a:prstDash val="solid"/>
           </a:ln>
         </p:spPr>
+        <p:txBody>
+          <a:bodyPr/>
+          <a:lstStyle/>
+          <a:p>
+            <a:endParaRPr lang="ar-SA"/>
+          </a:p>
+        </p:txBody>
       </p:sp>
       <p:sp>
         <p:nvSpPr>
@@ -2809,6 +2727,13 @@
             <a:prstDash val="solid"/>
           </a:ln>
         </p:spPr>
+        <p:txBody>
+          <a:bodyPr/>
+          <a:lstStyle/>
+          <a:p>
+            <a:endParaRPr lang="ar-SA"/>
+          </a:p>
+        </p:txBody>
       </p:sp>
       <p:sp>
         <p:nvSpPr>
@@ -2834,6 +2759,13 @@
             <a:prstDash val="solid"/>
           </a:ln>
         </p:spPr>
+        <p:txBody>
+          <a:bodyPr/>
+          <a:lstStyle/>
+          <a:p>
+            <a:endParaRPr lang="ar-SA"/>
+          </a:p>
+        </p:txBody>
       </p:sp>
       <p:sp>
         <p:nvSpPr>
@@ -2863,6 +2795,13 @@
             <a:prstDash val="solid"/>
           </a:ln>
         </p:spPr>
+        <p:txBody>
+          <a:bodyPr/>
+          <a:lstStyle/>
+          <a:p>
+            <a:endParaRPr lang="ar-SA"/>
+          </a:p>
+        </p:txBody>
       </p:sp>
       <p:sp>
         <p:nvSpPr>
@@ -2888,6 +2827,13 @@
             <a:prstDash val="solid"/>
           </a:ln>
         </p:spPr>
+        <p:txBody>
+          <a:bodyPr/>
+          <a:lstStyle/>
+          <a:p>
+            <a:endParaRPr lang="ar-SA"/>
+          </a:p>
+        </p:txBody>
       </p:sp>
       <p:sp>
         <p:nvSpPr>
@@ -2913,6 +2859,13 @@
             <a:prstDash val="solid"/>
           </a:ln>
         </p:spPr>
+        <p:txBody>
+          <a:bodyPr/>
+          <a:lstStyle/>
+          <a:p>
+            <a:endParaRPr lang="ar-SA"/>
+          </a:p>
+        </p:txBody>
       </p:sp>
       <p:sp>
         <p:nvSpPr>
@@ -2942,6 +2895,13 @@
             <a:prstDash val="solid"/>
           </a:ln>
         </p:spPr>
+        <p:txBody>
+          <a:bodyPr/>
+          <a:lstStyle/>
+          <a:p>
+            <a:endParaRPr lang="ar-SA"/>
+          </a:p>
+        </p:txBody>
       </p:sp>
       <p:sp>
         <p:nvSpPr>
@@ -2967,6 +2927,13 @@
             <a:prstDash val="solid"/>
           </a:ln>
         </p:spPr>
+        <p:txBody>
+          <a:bodyPr/>
+          <a:lstStyle/>
+          <a:p>
+            <a:endParaRPr lang="ar-SA"/>
+          </a:p>
+        </p:txBody>
       </p:sp>
       <p:sp>
         <p:nvSpPr>
@@ -2996,6 +2963,13 @@
             <a:prstDash val="solid"/>
           </a:ln>
         </p:spPr>
+        <p:txBody>
+          <a:bodyPr/>
+          <a:lstStyle/>
+          <a:p>
+            <a:endParaRPr lang="ar-SA"/>
+          </a:p>
+        </p:txBody>
       </p:sp>
       <p:sp>
         <p:nvSpPr>
@@ -3021,6 +2995,13 @@
             <a:prstDash val="solid"/>
           </a:ln>
         </p:spPr>
+        <p:txBody>
+          <a:bodyPr/>
+          <a:lstStyle/>
+          <a:p>
+            <a:endParaRPr lang="ar-SA"/>
+          </a:p>
+        </p:txBody>
       </p:sp>
       <p:sp>
         <p:nvSpPr>
@@ -3050,6 +3031,13 @@
             <a:prstDash val="solid"/>
           </a:ln>
         </p:spPr>
+        <p:txBody>
+          <a:bodyPr/>
+          <a:lstStyle/>
+          <a:p>
+            <a:endParaRPr lang="ar-SA"/>
+          </a:p>
+        </p:txBody>
       </p:sp>
       <p:sp>
         <p:nvSpPr>
@@ -3079,6 +3067,13 @@
             <a:prstDash val="solid"/>
           </a:ln>
         </p:spPr>
+        <p:txBody>
+          <a:bodyPr/>
+          <a:lstStyle/>
+          <a:p>
+            <a:endParaRPr lang="ar-SA"/>
+          </a:p>
+        </p:txBody>
       </p:sp>
       <p:sp>
         <p:nvSpPr>
@@ -3104,6 +3099,13 @@
             <a:prstDash val="solid"/>
           </a:ln>
         </p:spPr>
+        <p:txBody>
+          <a:bodyPr/>
+          <a:lstStyle/>
+          <a:p>
+            <a:endParaRPr lang="ar-SA"/>
+          </a:p>
+        </p:txBody>
       </p:sp>
       <p:sp>
         <p:nvSpPr>
@@ -3133,6 +3135,13 @@
             <a:prstDash val="solid"/>
           </a:ln>
         </p:spPr>
+        <p:txBody>
+          <a:bodyPr/>
+          <a:lstStyle/>
+          <a:p>
+            <a:endParaRPr lang="ar-SA"/>
+          </a:p>
+        </p:txBody>
       </p:sp>
       <p:sp>
         <p:nvSpPr>
@@ -3158,6 +3167,13 @@
             <a:prstDash val="solid"/>
           </a:ln>
         </p:spPr>
+        <p:txBody>
+          <a:bodyPr/>
+          <a:lstStyle/>
+          <a:p>
+            <a:endParaRPr lang="ar-SA"/>
+          </a:p>
+        </p:txBody>
       </p:sp>
       <p:sp>
         <p:nvSpPr>
@@ -3187,6 +3203,13 @@
             <a:prstDash val="solid"/>
           </a:ln>
         </p:spPr>
+        <p:txBody>
+          <a:bodyPr/>
+          <a:lstStyle/>
+          <a:p>
+            <a:endParaRPr lang="ar-SA"/>
+          </a:p>
+        </p:txBody>
       </p:sp>
       <p:sp>
         <p:nvSpPr>
@@ -3212,6 +3235,13 @@
             <a:prstDash val="solid"/>
           </a:ln>
         </p:spPr>
+        <p:txBody>
+          <a:bodyPr/>
+          <a:lstStyle/>
+          <a:p>
+            <a:endParaRPr lang="ar-SA"/>
+          </a:p>
+        </p:txBody>
       </p:sp>
       <p:sp>
         <p:nvSpPr>
@@ -3237,6 +3267,13 @@
             <a:prstDash val="solid"/>
           </a:ln>
         </p:spPr>
+        <p:txBody>
+          <a:bodyPr/>
+          <a:lstStyle/>
+          <a:p>
+            <a:endParaRPr lang="ar-SA"/>
+          </a:p>
+        </p:txBody>
       </p:sp>
       <p:sp>
         <p:nvSpPr>
@@ -3266,6 +3303,13 @@
             <a:prstDash val="solid"/>
           </a:ln>
         </p:spPr>
+        <p:txBody>
+          <a:bodyPr/>
+          <a:lstStyle/>
+          <a:p>
+            <a:endParaRPr lang="ar-SA"/>
+          </a:p>
+        </p:txBody>
       </p:sp>
       <p:sp>
         <p:nvSpPr>
@@ -3291,6 +3335,13 @@
             <a:prstDash val="solid"/>
           </a:ln>
         </p:spPr>
+        <p:txBody>
+          <a:bodyPr/>
+          <a:lstStyle/>
+          <a:p>
+            <a:endParaRPr lang="ar-SA"/>
+          </a:p>
+        </p:txBody>
       </p:sp>
       <p:sp>
         <p:nvSpPr>
@@ -3320,6 +3371,13 @@
             <a:prstDash val="solid"/>
           </a:ln>
         </p:spPr>
+        <p:txBody>
+          <a:bodyPr/>
+          <a:lstStyle/>
+          <a:p>
+            <a:endParaRPr lang="ar-SA"/>
+          </a:p>
+        </p:txBody>
       </p:sp>
       <p:sp>
         <p:nvSpPr>
@@ -3345,6 +3403,13 @@
             <a:prstDash val="solid"/>
           </a:ln>
         </p:spPr>
+        <p:txBody>
+          <a:bodyPr/>
+          <a:lstStyle/>
+          <a:p>
+            <a:endParaRPr lang="ar-SA"/>
+          </a:p>
+        </p:txBody>
       </p:sp>
       <p:sp>
         <p:nvSpPr>
@@ -3374,6 +3439,13 @@
             <a:prstDash val="solid"/>
           </a:ln>
         </p:spPr>
+        <p:txBody>
+          <a:bodyPr/>
+          <a:lstStyle/>
+          <a:p>
+            <a:endParaRPr lang="ar-SA"/>
+          </a:p>
+        </p:txBody>
       </p:sp>
       <p:sp>
         <p:nvSpPr>
@@ -3396,7 +3468,7 @@
           <a:bodyPr wrap="square" lIns="0" tIns="0" rIns="0" bIns="0" rtlCol="0" anchor="ctr"/>
           <a:lstStyle/>
           <a:p>
-            <a:pPr algn="r" indent="0" marL="0">
+            <a:pPr marL="0" indent="0" algn="r">
               <a:buNone/>
             </a:pPr>
             <a:r>
@@ -3414,6 +3486,36 @@
           </a:p>
         </p:txBody>
       </p:sp>
+      <p:pic>
+        <p:nvPicPr>
+          <p:cNvPr id="54" name="Picture 53">
+            <a:extLst>
+              <a:ext uri="{FF2B5EF4-FFF2-40B4-BE49-F238E27FC236}">
+                <a16:creationId xmlns:a16="http://schemas.microsoft.com/office/drawing/2014/main" id="{FDD70582-EF05-001E-C1E2-FA8FE33AF059}"/>
+              </a:ext>
+            </a:extLst>
+          </p:cNvPr>
+          <p:cNvPicPr>
+            <a:picLocks noChangeAspect="1"/>
+          </p:cNvPicPr>
+          <p:nvPr/>
+        </p:nvPicPr>
+        <p:blipFill>
+          <a:blip r:embed="rId3"/>
+          <a:stretch>
+            <a:fillRect/>
+          </a:stretch>
+        </p:blipFill>
+        <p:spPr>
+          <a:xfrm>
+            <a:off x="4388578" y="5029200"/>
+            <a:ext cx="3414843" cy="1474430"/>
+          </a:xfrm>
+          <a:prstGeom prst="rect">
+            <a:avLst/>
+          </a:prstGeom>
+        </p:spPr>
+      </p:pic>
     </p:spTree>
   </p:cSld>
   <p:clrMapOvr>
@@ -3430,6 +3532,7 @@
         <a:solidFill>
           <a:srgbClr val="F3ECE1"/>
         </a:solidFill>
+        <a:effectLst/>
       </p:bgPr>
     </p:bg>
     <p:spTree>
@@ -3470,6 +3573,13 @@
             <a:prstDash val="solid"/>
           </a:ln>
         </p:spPr>
+        <p:txBody>
+          <a:bodyPr/>
+          <a:lstStyle/>
+          <a:p>
+            <a:endParaRPr lang="ar-SA"/>
+          </a:p>
+        </p:txBody>
       </p:sp>
       <p:sp>
         <p:nvSpPr>
@@ -3492,11 +3602,11 @@
           <a:bodyPr wrap="square" lIns="0" tIns="0" rIns="0" bIns="0" rtlCol="0" anchor="ctr"/>
           <a:lstStyle/>
           <a:p>
-            <a:pPr indent="0" marL="0">
-              <a:buNone/>
-            </a:pPr>
-            <a:r>
-              <a:rPr lang="en-US" sz="1200" b="1" spc="400" kern="0" dirty="0">
+            <a:pPr marL="0" indent="0">
+              <a:buNone/>
+            </a:pPr>
+            <a:r>
+              <a:rPr lang="en-US" sz="1200" b="1" kern="0" spc="400" dirty="0">
                 <a:solidFill>
                   <a:srgbClr val="4A5C57"/>
                 </a:solidFill>
@@ -3531,7 +3641,7 @@
           <a:bodyPr wrap="square" lIns="0" tIns="0" rIns="0" bIns="0" rtlCol="0" anchor="ctr"/>
           <a:lstStyle/>
           <a:p>
-            <a:pPr indent="0" marL="0">
+            <a:pPr marL="0" indent="0">
               <a:buNone/>
             </a:pPr>
             <a:r>
@@ -3575,13 +3685,20 @@
             <a:prstDash val="solid"/>
           </a:ln>
           <a:effectLst>
-            <a:outerShdw sx="100000" sy="100000" kx="0" ky="0" algn="bl" rotWithShape="0" blurRad="101600" dist="25400" dir="5400000">
+            <a:outerShdw blurRad="101600" dist="25400" dir="5400000" algn="bl" rotWithShape="0">
               <a:srgbClr val="000000">
                 <a:alpha val="8000"/>
               </a:srgbClr>
             </a:outerShdw>
           </a:effectLst>
         </p:spPr>
+        <p:txBody>
+          <a:bodyPr/>
+          <a:lstStyle/>
+          <a:p>
+            <a:endParaRPr lang="ar-SA"/>
+          </a:p>
+        </p:txBody>
       </p:sp>
       <p:sp>
         <p:nvSpPr>
@@ -3604,7 +3721,7 @@
           <a:bodyPr wrap="square" lIns="0" tIns="0" rIns="0" bIns="0" rtlCol="0" anchor="ctr"/>
           <a:lstStyle/>
           <a:p>
-            <a:pPr indent="0" marL="0">
+            <a:pPr marL="0" indent="0">
               <a:buNone/>
             </a:pPr>
             <a:r>
@@ -3648,6 +3765,13 @@
             <a:prstDash val="solid"/>
           </a:ln>
         </p:spPr>
+        <p:txBody>
+          <a:bodyPr/>
+          <a:lstStyle/>
+          <a:p>
+            <a:endParaRPr lang="ar-SA"/>
+          </a:p>
+        </p:txBody>
       </p:sp>
       <p:sp>
         <p:nvSpPr>
@@ -3670,7 +3794,7 @@
           <a:bodyPr wrap="square" lIns="0" tIns="0" rIns="0" bIns="0" rtlCol="0" anchor="ctr"/>
           <a:lstStyle/>
           <a:p>
-            <a:pPr algn="ctr" indent="0" marL="0">
+            <a:pPr marL="0" indent="0" algn="ctr">
               <a:buNone/>
             </a:pPr>
             <a:r>
@@ -3709,7 +3833,7 @@
           <a:bodyPr wrap="square" lIns="0" tIns="0" rIns="0" bIns="0" rtlCol="0" anchor="ctr"/>
           <a:lstStyle/>
           <a:p>
-            <a:pPr indent="0" marL="0">
+            <a:pPr marL="0" indent="0">
               <a:buNone/>
             </a:pPr>
             <a:r>
@@ -3753,6 +3877,13 @@
             <a:prstDash val="solid"/>
           </a:ln>
         </p:spPr>
+        <p:txBody>
+          <a:bodyPr/>
+          <a:lstStyle/>
+          <a:p>
+            <a:endParaRPr lang="ar-SA"/>
+          </a:p>
+        </p:txBody>
       </p:sp>
       <p:sp>
         <p:nvSpPr>
@@ -3775,7 +3906,7 @@
           <a:bodyPr wrap="square" lIns="0" tIns="0" rIns="0" bIns="0" rtlCol="0" anchor="ctr"/>
           <a:lstStyle/>
           <a:p>
-            <a:pPr indent="0" marL="0">
+            <a:pPr marL="0" indent="0">
               <a:buNone/>
             </a:pPr>
             <a:r>
@@ -3815,6 +3946,13 @@
             <a:prstDash val="solid"/>
           </a:ln>
         </p:spPr>
+        <p:txBody>
+          <a:bodyPr/>
+          <a:lstStyle/>
+          <a:p>
+            <a:endParaRPr lang="ar-SA"/>
+          </a:p>
+        </p:txBody>
       </p:sp>
       <p:sp>
         <p:nvSpPr>
@@ -3837,7 +3975,7 @@
           <a:bodyPr wrap="square" lIns="0" tIns="0" rIns="0" bIns="0" rtlCol="0" anchor="ctr"/>
           <a:lstStyle/>
           <a:p>
-            <a:pPr indent="0" marL="0">
+            <a:pPr marL="0" indent="0">
               <a:buNone/>
             </a:pPr>
             <a:r>
@@ -3881,13 +4019,20 @@
             <a:prstDash val="solid"/>
           </a:ln>
           <a:effectLst>
-            <a:outerShdw sx="100000" sy="100000" kx="0" ky="0" algn="bl" rotWithShape="0" blurRad="101600" dist="25400" dir="5400000">
+            <a:outerShdw blurRad="101600" dist="25400" dir="5400000" algn="bl" rotWithShape="0">
               <a:srgbClr val="000000">
                 <a:alpha val="8000"/>
               </a:srgbClr>
             </a:outerShdw>
           </a:effectLst>
         </p:spPr>
+        <p:txBody>
+          <a:bodyPr/>
+          <a:lstStyle/>
+          <a:p>
+            <a:endParaRPr lang="ar-SA"/>
+          </a:p>
+        </p:txBody>
       </p:sp>
       <p:sp>
         <p:nvSpPr>
@@ -3910,7 +4055,7 @@
           <a:bodyPr wrap="square" lIns="0" tIns="0" rIns="0" bIns="0" rtlCol="0" anchor="ctr"/>
           <a:lstStyle/>
           <a:p>
-            <a:pPr indent="0" marL="0">
+            <a:pPr marL="0" indent="0">
               <a:buNone/>
             </a:pPr>
             <a:r>
@@ -3954,6 +4099,13 @@
             <a:prstDash val="solid"/>
           </a:ln>
         </p:spPr>
+        <p:txBody>
+          <a:bodyPr/>
+          <a:lstStyle/>
+          <a:p>
+            <a:endParaRPr lang="ar-SA"/>
+          </a:p>
+        </p:txBody>
       </p:sp>
       <p:sp>
         <p:nvSpPr>
@@ -3976,7 +4128,7 @@
           <a:bodyPr wrap="square" lIns="0" tIns="0" rIns="0" bIns="0" rtlCol="0" anchor="ctr"/>
           <a:lstStyle/>
           <a:p>
-            <a:pPr algn="ctr" indent="0" marL="0">
+            <a:pPr marL="0" indent="0" algn="ctr">
               <a:buNone/>
             </a:pPr>
             <a:r>
@@ -4015,7 +4167,7 @@
           <a:bodyPr wrap="square" lIns="0" tIns="0" rIns="0" bIns="0" rtlCol="0" anchor="ctr"/>
           <a:lstStyle/>
           <a:p>
-            <a:pPr indent="0" marL="0">
+            <a:pPr marL="0" indent="0">
               <a:buNone/>
             </a:pPr>
             <a:r>
@@ -4059,6 +4211,13 @@
             <a:prstDash val="solid"/>
           </a:ln>
         </p:spPr>
+        <p:txBody>
+          <a:bodyPr/>
+          <a:lstStyle/>
+          <a:p>
+            <a:endParaRPr lang="ar-SA"/>
+          </a:p>
+        </p:txBody>
       </p:sp>
       <p:sp>
         <p:nvSpPr>
@@ -4081,7 +4240,7 @@
           <a:bodyPr wrap="square" lIns="0" tIns="0" rIns="0" bIns="0" rtlCol="0" anchor="ctr"/>
           <a:lstStyle/>
           <a:p>
-            <a:pPr indent="0" marL="0">
+            <a:pPr marL="0" indent="0">
               <a:buNone/>
             </a:pPr>
             <a:r>
@@ -4121,6 +4280,13 @@
             <a:prstDash val="solid"/>
           </a:ln>
         </p:spPr>
+        <p:txBody>
+          <a:bodyPr/>
+          <a:lstStyle/>
+          <a:p>
+            <a:endParaRPr lang="ar-SA"/>
+          </a:p>
+        </p:txBody>
       </p:sp>
       <p:sp>
         <p:nvSpPr>
@@ -4143,7 +4309,7 @@
           <a:bodyPr wrap="square" lIns="0" tIns="0" rIns="0" bIns="0" rtlCol="0" anchor="ctr"/>
           <a:lstStyle/>
           <a:p>
-            <a:pPr indent="0" marL="0">
+            <a:pPr marL="0" indent="0">
               <a:buNone/>
             </a:pPr>
             <a:r>
@@ -4187,13 +4353,20 @@
             <a:prstDash val="solid"/>
           </a:ln>
           <a:effectLst>
-            <a:outerShdw sx="100000" sy="100000" kx="0" ky="0" algn="bl" rotWithShape="0" blurRad="101600" dist="25400" dir="5400000">
+            <a:outerShdw blurRad="101600" dist="25400" dir="5400000" algn="bl" rotWithShape="0">
               <a:srgbClr val="000000">
                 <a:alpha val="8000"/>
               </a:srgbClr>
             </a:outerShdw>
           </a:effectLst>
         </p:spPr>
+        <p:txBody>
+          <a:bodyPr/>
+          <a:lstStyle/>
+          <a:p>
+            <a:endParaRPr lang="ar-SA"/>
+          </a:p>
+        </p:txBody>
       </p:sp>
       <p:sp>
         <p:nvSpPr>
@@ -4216,7 +4389,7 @@
           <a:bodyPr wrap="square" lIns="0" tIns="0" rIns="0" bIns="0" rtlCol="0" anchor="ctr"/>
           <a:lstStyle/>
           <a:p>
-            <a:pPr indent="0" marL="0">
+            <a:pPr marL="0" indent="0">
               <a:buNone/>
             </a:pPr>
             <a:r>
@@ -4260,6 +4433,13 @@
             <a:prstDash val="solid"/>
           </a:ln>
         </p:spPr>
+        <p:txBody>
+          <a:bodyPr/>
+          <a:lstStyle/>
+          <a:p>
+            <a:endParaRPr lang="ar-SA"/>
+          </a:p>
+        </p:txBody>
       </p:sp>
       <p:sp>
         <p:nvSpPr>
@@ -4282,7 +4462,7 @@
           <a:bodyPr wrap="square" lIns="0" tIns="0" rIns="0" bIns="0" rtlCol="0" anchor="ctr"/>
           <a:lstStyle/>
           <a:p>
-            <a:pPr algn="ctr" indent="0" marL="0">
+            <a:pPr marL="0" indent="0" algn="ctr">
               <a:buNone/>
             </a:pPr>
             <a:r>
@@ -4321,7 +4501,7 @@
           <a:bodyPr wrap="square" lIns="0" tIns="0" rIns="0" bIns="0" rtlCol="0" anchor="ctr"/>
           <a:lstStyle/>
           <a:p>
-            <a:pPr indent="0" marL="0">
+            <a:pPr marL="0" indent="0">
               <a:buNone/>
             </a:pPr>
             <a:r>
@@ -4365,6 +4545,13 @@
             <a:prstDash val="solid"/>
           </a:ln>
         </p:spPr>
+        <p:txBody>
+          <a:bodyPr/>
+          <a:lstStyle/>
+          <a:p>
+            <a:endParaRPr lang="ar-SA"/>
+          </a:p>
+        </p:txBody>
       </p:sp>
       <p:sp>
         <p:nvSpPr>
@@ -4387,7 +4574,7 @@
           <a:bodyPr wrap="square" lIns="0" tIns="0" rIns="0" bIns="0" rtlCol="0" anchor="ctr"/>
           <a:lstStyle/>
           <a:p>
-            <a:pPr indent="0" marL="0">
+            <a:pPr marL="0" indent="0">
               <a:buNone/>
             </a:pPr>
             <a:r>
@@ -4427,6 +4614,13 @@
             <a:prstDash val="solid"/>
           </a:ln>
         </p:spPr>
+        <p:txBody>
+          <a:bodyPr/>
+          <a:lstStyle/>
+          <a:p>
+            <a:endParaRPr lang="ar-SA"/>
+          </a:p>
+        </p:txBody>
       </p:sp>
       <p:sp>
         <p:nvSpPr>
@@ -4449,7 +4643,7 @@
           <a:bodyPr wrap="square" lIns="0" tIns="0" rIns="0" bIns="0" rtlCol="0" anchor="ctr"/>
           <a:lstStyle/>
           <a:p>
-            <a:pPr indent="0" marL="0">
+            <a:pPr marL="0" indent="0">
               <a:buNone/>
             </a:pPr>
             <a:r>
@@ -4488,7 +4682,7 @@
           <a:bodyPr wrap="square" lIns="0" tIns="0" rIns="0" bIns="0" rtlCol="0" anchor="ctr"/>
           <a:lstStyle/>
           <a:p>
-            <a:pPr indent="0" marL="0">
+            <a:pPr marL="0" indent="0">
               <a:buNone/>
             </a:pPr>
             <a:r>
@@ -4527,7 +4721,7 @@
           <a:bodyPr wrap="square" lIns="0" tIns="0" rIns="0" bIns="0" rtlCol="0" anchor="ctr"/>
           <a:lstStyle/>
           <a:p>
-            <a:pPr algn="r" indent="0" marL="0">
+            <a:pPr marL="0" indent="0" algn="r">
               <a:buNone/>
             </a:pPr>
             <a:r>
@@ -4545,6 +4739,36 @@
           </a:p>
         </p:txBody>
       </p:sp>
+      <p:pic>
+        <p:nvPicPr>
+          <p:cNvPr id="35" name="Picture 34">
+            <a:extLst>
+              <a:ext uri="{FF2B5EF4-FFF2-40B4-BE49-F238E27FC236}">
+                <a16:creationId xmlns:a16="http://schemas.microsoft.com/office/drawing/2014/main" id="{0F5885DF-E2F3-E574-7C52-AF5D1245E30A}"/>
+              </a:ext>
+            </a:extLst>
+          </p:cNvPr>
+          <p:cNvPicPr>
+            <a:picLocks noChangeAspect="1"/>
+          </p:cNvPicPr>
+          <p:nvPr/>
+        </p:nvPicPr>
+        <p:blipFill>
+          <a:blip r:embed="rId3"/>
+          <a:stretch>
+            <a:fillRect/>
+          </a:stretch>
+        </p:blipFill>
+        <p:spPr>
+          <a:xfrm>
+            <a:off x="8827008" y="-128064"/>
+            <a:ext cx="3361944" cy="1451589"/>
+          </a:xfrm>
+          <a:prstGeom prst="rect">
+            <a:avLst/>
+          </a:prstGeom>
+        </p:spPr>
+      </p:pic>
     </p:spTree>
   </p:cSld>
   <p:clrMapOvr>
@@ -4561,6 +4785,7 @@
         <a:solidFill>
           <a:srgbClr val="F3ECE1"/>
         </a:solidFill>
+        <a:effectLst/>
       </p:bgPr>
     </p:bg>
     <p:spTree>
@@ -4601,6 +4826,13 @@
             <a:prstDash val="solid"/>
           </a:ln>
         </p:spPr>
+        <p:txBody>
+          <a:bodyPr/>
+          <a:lstStyle/>
+          <a:p>
+            <a:endParaRPr lang="ar-SA"/>
+          </a:p>
+        </p:txBody>
       </p:sp>
       <p:sp>
         <p:nvSpPr>
@@ -4623,11 +4855,11 @@
           <a:bodyPr wrap="square" lIns="0" tIns="0" rIns="0" bIns="0" rtlCol="0" anchor="ctr"/>
           <a:lstStyle/>
           <a:p>
-            <a:pPr indent="0" marL="0">
-              <a:buNone/>
-            </a:pPr>
-            <a:r>
-              <a:rPr lang="en-US" sz="1200" b="1" spc="400" kern="0" dirty="0">
+            <a:pPr marL="0" indent="0">
+              <a:buNone/>
+            </a:pPr>
+            <a:r>
+              <a:rPr lang="en-US" sz="1200" b="1" kern="0" spc="400" dirty="0">
                 <a:solidFill>
                   <a:srgbClr val="4A5C57"/>
                 </a:solidFill>
@@ -4662,7 +4894,7 @@
           <a:bodyPr wrap="square" lIns="0" tIns="0" rIns="0" bIns="0" rtlCol="0" anchor="ctr"/>
           <a:lstStyle/>
           <a:p>
-            <a:pPr indent="0" marL="0">
+            <a:pPr marL="0" indent="0">
               <a:buNone/>
             </a:pPr>
             <a:r>
@@ -4706,13 +4938,20 @@
             <a:prstDash val="solid"/>
           </a:ln>
           <a:effectLst>
-            <a:outerShdw sx="100000" sy="100000" kx="0" ky="0" algn="bl" rotWithShape="0" blurRad="101600" dist="25400" dir="5400000">
+            <a:outerShdw blurRad="101600" dist="25400" dir="5400000" algn="bl" rotWithShape="0">
               <a:srgbClr val="000000">
                 <a:alpha val="8000"/>
               </a:srgbClr>
             </a:outerShdw>
           </a:effectLst>
         </p:spPr>
+        <p:txBody>
+          <a:bodyPr/>
+          <a:lstStyle/>
+          <a:p>
+            <a:endParaRPr lang="ar-SA"/>
+          </a:p>
+        </p:txBody>
       </p:sp>
       <p:sp>
         <p:nvSpPr>
@@ -4735,7 +4974,7 @@
           <a:bodyPr wrap="square" lIns="0" tIns="0" rIns="0" bIns="0" rtlCol="0" anchor="ctr"/>
           <a:lstStyle/>
           <a:p>
-            <a:pPr indent="0" marL="0">
+            <a:pPr marL="0" indent="0">
               <a:buNone/>
             </a:pPr>
             <a:r>
@@ -4779,6 +5018,13 @@
             <a:prstDash val="solid"/>
           </a:ln>
         </p:spPr>
+        <p:txBody>
+          <a:bodyPr/>
+          <a:lstStyle/>
+          <a:p>
+            <a:endParaRPr lang="ar-SA"/>
+          </a:p>
+        </p:txBody>
       </p:sp>
       <p:sp>
         <p:nvSpPr>
@@ -4801,7 +5047,7 @@
           <a:bodyPr wrap="square" lIns="0" tIns="0" rIns="0" bIns="0" rtlCol="0" anchor="ctr"/>
           <a:lstStyle/>
           <a:p>
-            <a:pPr algn="ctr" indent="0" marL="0">
+            <a:pPr marL="0" indent="0" algn="ctr">
               <a:buNone/>
             </a:pPr>
             <a:r>
@@ -4840,7 +5086,7 @@
           <a:bodyPr wrap="square" lIns="0" tIns="0" rIns="0" bIns="0" rtlCol="0" anchor="ctr"/>
           <a:lstStyle/>
           <a:p>
-            <a:pPr indent="0" marL="0">
+            <a:pPr marL="0" indent="0">
               <a:buNone/>
             </a:pPr>
             <a:r>
@@ -4884,6 +5130,13 @@
             <a:prstDash val="solid"/>
           </a:ln>
         </p:spPr>
+        <p:txBody>
+          <a:bodyPr/>
+          <a:lstStyle/>
+          <a:p>
+            <a:endParaRPr lang="ar-SA"/>
+          </a:p>
+        </p:txBody>
       </p:sp>
       <p:sp>
         <p:nvSpPr>
@@ -4906,7 +5159,7 @@
           <a:bodyPr wrap="square" lIns="0" tIns="0" rIns="0" bIns="0" rtlCol="0" anchor="ctr"/>
           <a:lstStyle/>
           <a:p>
-            <a:pPr indent="0" marL="0">
+            <a:pPr marL="0" indent="0">
               <a:buNone/>
             </a:pPr>
             <a:r>
@@ -5014,13 +5267,20 @@
             <a:prstDash val="solid"/>
           </a:ln>
           <a:effectLst>
-            <a:outerShdw sx="100000" sy="100000" kx="0" ky="0" algn="bl" rotWithShape="0" blurRad="101600" dist="25400" dir="5400000">
+            <a:outerShdw blurRad="101600" dist="25400" dir="5400000" algn="bl" rotWithShape="0">
               <a:srgbClr val="000000">
                 <a:alpha val="8000"/>
               </a:srgbClr>
             </a:outerShdw>
           </a:effectLst>
         </p:spPr>
+        <p:txBody>
+          <a:bodyPr/>
+          <a:lstStyle/>
+          <a:p>
+            <a:endParaRPr lang="ar-SA"/>
+          </a:p>
+        </p:txBody>
       </p:sp>
       <p:sp>
         <p:nvSpPr>
@@ -5043,7 +5303,7 @@
           <a:bodyPr wrap="square" lIns="0" tIns="0" rIns="0" bIns="0" rtlCol="0" anchor="ctr"/>
           <a:lstStyle/>
           <a:p>
-            <a:pPr indent="0" marL="0">
+            <a:pPr marL="0" indent="0">
               <a:buNone/>
             </a:pPr>
             <a:r>
@@ -5087,6 +5347,13 @@
             <a:prstDash val="solid"/>
           </a:ln>
         </p:spPr>
+        <p:txBody>
+          <a:bodyPr/>
+          <a:lstStyle/>
+          <a:p>
+            <a:endParaRPr lang="ar-SA"/>
+          </a:p>
+        </p:txBody>
       </p:sp>
       <p:sp>
         <p:nvSpPr>
@@ -5109,7 +5376,7 @@
           <a:bodyPr wrap="square" lIns="0" tIns="0" rIns="0" bIns="0" rtlCol="0" anchor="ctr"/>
           <a:lstStyle/>
           <a:p>
-            <a:pPr algn="ctr" indent="0" marL="0">
+            <a:pPr marL="0" indent="0" algn="ctr">
               <a:buNone/>
             </a:pPr>
             <a:r>
@@ -5148,7 +5415,7 @@
           <a:bodyPr wrap="square" lIns="0" tIns="0" rIns="0" bIns="0" rtlCol="0" anchor="ctr"/>
           <a:lstStyle/>
           <a:p>
-            <a:pPr indent="0" marL="0">
+            <a:pPr marL="0" indent="0">
               <a:buNone/>
             </a:pPr>
             <a:r>
@@ -5192,6 +5459,13 @@
             <a:prstDash val="solid"/>
           </a:ln>
         </p:spPr>
+        <p:txBody>
+          <a:bodyPr/>
+          <a:lstStyle/>
+          <a:p>
+            <a:endParaRPr lang="ar-SA"/>
+          </a:p>
+        </p:txBody>
       </p:sp>
       <p:sp>
         <p:nvSpPr>
@@ -5214,7 +5488,7 @@
           <a:bodyPr wrap="square" lIns="0" tIns="0" rIns="0" bIns="0" rtlCol="0" anchor="ctr"/>
           <a:lstStyle/>
           <a:p>
-            <a:pPr indent="0" marL="0">
+            <a:pPr marL="0" indent="0">
               <a:buNone/>
             </a:pPr>
             <a:r>
@@ -5322,13 +5596,20 @@
             <a:prstDash val="solid"/>
           </a:ln>
           <a:effectLst>
-            <a:outerShdw sx="100000" sy="100000" kx="0" ky="0" algn="bl" rotWithShape="0" blurRad="101600" dist="25400" dir="5400000">
+            <a:outerShdw blurRad="101600" dist="25400" dir="5400000" algn="bl" rotWithShape="0">
               <a:srgbClr val="000000">
                 <a:alpha val="8000"/>
               </a:srgbClr>
             </a:outerShdw>
           </a:effectLst>
         </p:spPr>
+        <p:txBody>
+          <a:bodyPr/>
+          <a:lstStyle/>
+          <a:p>
+            <a:endParaRPr lang="ar-SA"/>
+          </a:p>
+        </p:txBody>
       </p:sp>
       <p:sp>
         <p:nvSpPr>
@@ -5351,7 +5632,7 @@
           <a:bodyPr wrap="square" lIns="0" tIns="0" rIns="0" bIns="0" rtlCol="0" anchor="ctr"/>
           <a:lstStyle/>
           <a:p>
-            <a:pPr indent="0" marL="0">
+            <a:pPr marL="0" indent="0">
               <a:buNone/>
             </a:pPr>
             <a:r>
@@ -5395,6 +5676,13 @@
             <a:prstDash val="solid"/>
           </a:ln>
         </p:spPr>
+        <p:txBody>
+          <a:bodyPr/>
+          <a:lstStyle/>
+          <a:p>
+            <a:endParaRPr lang="ar-SA"/>
+          </a:p>
+        </p:txBody>
       </p:sp>
       <p:sp>
         <p:nvSpPr>
@@ -5417,7 +5705,7 @@
           <a:bodyPr wrap="square" lIns="0" tIns="0" rIns="0" bIns="0" rtlCol="0" anchor="ctr"/>
           <a:lstStyle/>
           <a:p>
-            <a:pPr algn="ctr" indent="0" marL="0">
+            <a:pPr marL="0" indent="0" algn="ctr">
               <a:buNone/>
             </a:pPr>
             <a:r>
@@ -5456,7 +5744,7 @@
           <a:bodyPr wrap="square" lIns="0" tIns="0" rIns="0" bIns="0" rtlCol="0" anchor="ctr"/>
           <a:lstStyle/>
           <a:p>
-            <a:pPr indent="0" marL="0">
+            <a:pPr marL="0" indent="0">
               <a:buNone/>
             </a:pPr>
             <a:r>
@@ -5500,6 +5788,13 @@
             <a:prstDash val="solid"/>
           </a:ln>
         </p:spPr>
+        <p:txBody>
+          <a:bodyPr/>
+          <a:lstStyle/>
+          <a:p>
+            <a:endParaRPr lang="ar-SA"/>
+          </a:p>
+        </p:txBody>
       </p:sp>
       <p:sp>
         <p:nvSpPr>
@@ -5522,7 +5817,7 @@
           <a:bodyPr wrap="square" lIns="0" tIns="0" rIns="0" bIns="0" rtlCol="0" anchor="ctr"/>
           <a:lstStyle/>
           <a:p>
-            <a:pPr indent="0" marL="0">
+            <a:pPr marL="0" indent="0">
               <a:buNone/>
             </a:pPr>
             <a:r>
@@ -5625,7 +5920,7 @@
           <a:bodyPr wrap="square" lIns="0" tIns="0" rIns="0" bIns="0" rtlCol="0" anchor="ctr"/>
           <a:lstStyle/>
           <a:p>
-            <a:pPr indent="0" marL="0">
+            <a:pPr marL="0" indent="0">
               <a:buNone/>
             </a:pPr>
             <a:r>
@@ -5664,7 +5959,7 @@
           <a:bodyPr wrap="square" lIns="0" tIns="0" rIns="0" bIns="0" rtlCol="0" anchor="ctr"/>
           <a:lstStyle/>
           <a:p>
-            <a:pPr algn="r" indent="0" marL="0">
+            <a:pPr marL="0" indent="0" algn="r">
               <a:buNone/>
             </a:pPr>
             <a:r>
@@ -5682,6 +5977,36 @@
           </a:p>
         </p:txBody>
       </p:sp>
+      <p:pic>
+        <p:nvPicPr>
+          <p:cNvPr id="32" name="Picture 31">
+            <a:extLst>
+              <a:ext uri="{FF2B5EF4-FFF2-40B4-BE49-F238E27FC236}">
+                <a16:creationId xmlns:a16="http://schemas.microsoft.com/office/drawing/2014/main" id="{E0EDBF97-EFD4-9D51-BAAE-876B3D121C67}"/>
+              </a:ext>
+            </a:extLst>
+          </p:cNvPr>
+          <p:cNvPicPr>
+            <a:picLocks noChangeAspect="1"/>
+          </p:cNvPicPr>
+          <p:nvPr/>
+        </p:nvPicPr>
+        <p:blipFill>
+          <a:blip r:embed="rId3"/>
+          <a:stretch>
+            <a:fillRect/>
+          </a:stretch>
+        </p:blipFill>
+        <p:spPr>
+          <a:xfrm>
+            <a:off x="8827008" y="-128064"/>
+            <a:ext cx="3361944" cy="1451589"/>
+          </a:xfrm>
+          <a:prstGeom prst="rect">
+            <a:avLst/>
+          </a:prstGeom>
+        </p:spPr>
+      </p:pic>
     </p:spTree>
   </p:cSld>
   <p:clrMapOvr>
@@ -5698,6 +6023,7 @@
         <a:solidFill>
           <a:srgbClr val="F3ECE1"/>
         </a:solidFill>
+        <a:effectLst/>
       </p:bgPr>
     </p:bg>
     <p:spTree>
@@ -5738,6 +6064,13 @@
             <a:prstDash val="solid"/>
           </a:ln>
         </p:spPr>
+        <p:txBody>
+          <a:bodyPr/>
+          <a:lstStyle/>
+          <a:p>
+            <a:endParaRPr lang="ar-SA"/>
+          </a:p>
+        </p:txBody>
       </p:sp>
       <p:sp>
         <p:nvSpPr>
@@ -5760,11 +6093,11 @@
           <a:bodyPr wrap="square" lIns="0" tIns="0" rIns="0" bIns="0" rtlCol="0" anchor="ctr"/>
           <a:lstStyle/>
           <a:p>
-            <a:pPr indent="0" marL="0">
-              <a:buNone/>
-            </a:pPr>
-            <a:r>
-              <a:rPr lang="en-US" sz="1200" b="1" spc="400" kern="0" dirty="0">
+            <a:pPr marL="0" indent="0">
+              <a:buNone/>
+            </a:pPr>
+            <a:r>
+              <a:rPr lang="en-US" sz="1200" b="1" kern="0" spc="400" dirty="0">
                 <a:solidFill>
                   <a:srgbClr val="4A5C57"/>
                 </a:solidFill>
@@ -5799,7 +6132,7 @@
           <a:bodyPr wrap="square" lIns="0" tIns="0" rIns="0" bIns="0" rtlCol="0" anchor="ctr"/>
           <a:lstStyle/>
           <a:p>
-            <a:pPr indent="0" marL="0">
+            <a:pPr marL="0" indent="0">
               <a:buNone/>
             </a:pPr>
             <a:r>
@@ -5843,13 +6176,20 @@
             <a:prstDash val="solid"/>
           </a:ln>
           <a:effectLst>
-            <a:outerShdw sx="100000" sy="100000" kx="0" ky="0" algn="bl" rotWithShape="0" blurRad="101600" dist="25400" dir="5400000">
+            <a:outerShdw blurRad="101600" dist="25400" dir="5400000" algn="bl" rotWithShape="0">
               <a:srgbClr val="000000">
                 <a:alpha val="8000"/>
               </a:srgbClr>
             </a:outerShdw>
           </a:effectLst>
         </p:spPr>
+        <p:txBody>
+          <a:bodyPr/>
+          <a:lstStyle/>
+          <a:p>
+            <a:endParaRPr lang="ar-SA"/>
+          </a:p>
+        </p:txBody>
       </p:sp>
       <p:sp>
         <p:nvSpPr>
@@ -5872,7 +6212,7 @@
           <a:bodyPr wrap="square" lIns="0" tIns="0" rIns="0" bIns="0" rtlCol="0" anchor="ctr"/>
           <a:lstStyle/>
           <a:p>
-            <a:pPr indent="0" marL="0">
+            <a:pPr marL="0" indent="0">
               <a:buNone/>
             </a:pPr>
             <a:r>
@@ -5916,6 +6256,13 @@
             <a:prstDash val="solid"/>
           </a:ln>
         </p:spPr>
+        <p:txBody>
+          <a:bodyPr/>
+          <a:lstStyle/>
+          <a:p>
+            <a:endParaRPr lang="ar-SA"/>
+          </a:p>
+        </p:txBody>
       </p:sp>
       <p:sp>
         <p:nvSpPr>
@@ -5938,7 +6285,7 @@
           <a:bodyPr wrap="square" lIns="0" tIns="0" rIns="0" bIns="0" rtlCol="0" anchor="ctr"/>
           <a:lstStyle/>
           <a:p>
-            <a:pPr algn="ctr" indent="0" marL="0">
+            <a:pPr marL="0" indent="0" algn="ctr">
               <a:buNone/>
             </a:pPr>
             <a:r>
@@ -5977,7 +6324,7 @@
           <a:bodyPr wrap="square" lIns="0" tIns="0" rIns="0" bIns="0" rtlCol="0" anchor="ctr"/>
           <a:lstStyle/>
           <a:p>
-            <a:pPr indent="0" marL="0">
+            <a:pPr marL="0" indent="0">
               <a:buNone/>
             </a:pPr>
             <a:r>
@@ -6021,6 +6368,13 @@
             <a:prstDash val="solid"/>
           </a:ln>
         </p:spPr>
+        <p:txBody>
+          <a:bodyPr/>
+          <a:lstStyle/>
+          <a:p>
+            <a:endParaRPr lang="ar-SA"/>
+          </a:p>
+        </p:txBody>
       </p:sp>
       <p:sp>
         <p:nvSpPr>
@@ -6043,7 +6397,7 @@
           <a:bodyPr wrap="square" lIns="0" tIns="0" rIns="0" bIns="0" rtlCol="0" anchor="ctr"/>
           <a:lstStyle/>
           <a:p>
-            <a:pPr indent="0" marL="0">
+            <a:pPr marL="0" indent="0">
               <a:buNone/>
             </a:pPr>
             <a:r>
@@ -6083,6 +6437,13 @@
             <a:prstDash val="solid"/>
           </a:ln>
         </p:spPr>
+        <p:txBody>
+          <a:bodyPr/>
+          <a:lstStyle/>
+          <a:p>
+            <a:endParaRPr lang="ar-SA"/>
+          </a:p>
+        </p:txBody>
       </p:sp>
       <p:sp>
         <p:nvSpPr>
@@ -6105,7 +6466,7 @@
           <a:bodyPr wrap="square" lIns="0" tIns="0" rIns="0" bIns="0" rtlCol="0" anchor="ctr"/>
           <a:lstStyle/>
           <a:p>
-            <a:pPr indent="0" marL="0">
+            <a:pPr marL="0" indent="0">
               <a:buNone/>
             </a:pPr>
             <a:r>
@@ -6149,13 +6510,20 @@
             <a:prstDash val="solid"/>
           </a:ln>
           <a:effectLst>
-            <a:outerShdw sx="100000" sy="100000" kx="0" ky="0" algn="bl" rotWithShape="0" blurRad="101600" dist="25400" dir="5400000">
+            <a:outerShdw blurRad="101600" dist="25400" dir="5400000" algn="bl" rotWithShape="0">
               <a:srgbClr val="000000">
                 <a:alpha val="8000"/>
               </a:srgbClr>
             </a:outerShdw>
           </a:effectLst>
         </p:spPr>
+        <p:txBody>
+          <a:bodyPr/>
+          <a:lstStyle/>
+          <a:p>
+            <a:endParaRPr lang="ar-SA"/>
+          </a:p>
+        </p:txBody>
       </p:sp>
       <p:sp>
         <p:nvSpPr>
@@ -6178,7 +6546,7 @@
           <a:bodyPr wrap="square" lIns="0" tIns="0" rIns="0" bIns="0" rtlCol="0" anchor="ctr"/>
           <a:lstStyle/>
           <a:p>
-            <a:pPr indent="0" marL="0">
+            <a:pPr marL="0" indent="0">
               <a:buNone/>
             </a:pPr>
             <a:r>
@@ -6222,6 +6590,13 @@
             <a:prstDash val="solid"/>
           </a:ln>
         </p:spPr>
+        <p:txBody>
+          <a:bodyPr/>
+          <a:lstStyle/>
+          <a:p>
+            <a:endParaRPr lang="ar-SA"/>
+          </a:p>
+        </p:txBody>
       </p:sp>
       <p:sp>
         <p:nvSpPr>
@@ -6244,7 +6619,7 @@
           <a:bodyPr wrap="square" lIns="0" tIns="0" rIns="0" bIns="0" rtlCol="0" anchor="ctr"/>
           <a:lstStyle/>
           <a:p>
-            <a:pPr algn="ctr" indent="0" marL="0">
+            <a:pPr marL="0" indent="0" algn="ctr">
               <a:buNone/>
             </a:pPr>
             <a:r>
@@ -6283,7 +6658,7 @@
           <a:bodyPr wrap="square" lIns="0" tIns="0" rIns="0" bIns="0" rtlCol="0" anchor="ctr"/>
           <a:lstStyle/>
           <a:p>
-            <a:pPr indent="0" marL="0">
+            <a:pPr marL="0" indent="0">
               <a:buNone/>
             </a:pPr>
             <a:r>
@@ -6327,6 +6702,13 @@
             <a:prstDash val="solid"/>
           </a:ln>
         </p:spPr>
+        <p:txBody>
+          <a:bodyPr/>
+          <a:lstStyle/>
+          <a:p>
+            <a:endParaRPr lang="ar-SA"/>
+          </a:p>
+        </p:txBody>
       </p:sp>
       <p:sp>
         <p:nvSpPr>
@@ -6349,7 +6731,7 @@
           <a:bodyPr wrap="square" lIns="0" tIns="0" rIns="0" bIns="0" rtlCol="0" anchor="ctr"/>
           <a:lstStyle/>
           <a:p>
-            <a:pPr indent="0" marL="0">
+            <a:pPr marL="0" indent="0">
               <a:buNone/>
             </a:pPr>
             <a:r>
@@ -6389,6 +6771,13 @@
             <a:prstDash val="solid"/>
           </a:ln>
         </p:spPr>
+        <p:txBody>
+          <a:bodyPr/>
+          <a:lstStyle/>
+          <a:p>
+            <a:endParaRPr lang="ar-SA"/>
+          </a:p>
+        </p:txBody>
       </p:sp>
       <p:sp>
         <p:nvSpPr>
@@ -6411,7 +6800,7 @@
           <a:bodyPr wrap="square" lIns="0" tIns="0" rIns="0" bIns="0" rtlCol="0" anchor="ctr"/>
           <a:lstStyle/>
           <a:p>
-            <a:pPr indent="0" marL="0">
+            <a:pPr marL="0" indent="0">
               <a:buNone/>
             </a:pPr>
             <a:r>
@@ -6455,13 +6844,20 @@
             <a:prstDash val="solid"/>
           </a:ln>
           <a:effectLst>
-            <a:outerShdw sx="100000" sy="100000" kx="0" ky="0" algn="bl" rotWithShape="0" blurRad="101600" dist="25400" dir="5400000">
+            <a:outerShdw blurRad="101600" dist="25400" dir="5400000" algn="bl" rotWithShape="0">
               <a:srgbClr val="000000">
                 <a:alpha val="8000"/>
               </a:srgbClr>
             </a:outerShdw>
           </a:effectLst>
         </p:spPr>
+        <p:txBody>
+          <a:bodyPr/>
+          <a:lstStyle/>
+          <a:p>
+            <a:endParaRPr lang="ar-SA"/>
+          </a:p>
+        </p:txBody>
       </p:sp>
       <p:sp>
         <p:nvSpPr>
@@ -6484,7 +6880,7 @@
           <a:bodyPr wrap="square" lIns="0" tIns="0" rIns="0" bIns="0" rtlCol="0" anchor="ctr"/>
           <a:lstStyle/>
           <a:p>
-            <a:pPr indent="0" marL="0">
+            <a:pPr marL="0" indent="0">
               <a:buNone/>
             </a:pPr>
             <a:r>
@@ -6528,6 +6924,13 @@
             <a:prstDash val="solid"/>
           </a:ln>
         </p:spPr>
+        <p:txBody>
+          <a:bodyPr/>
+          <a:lstStyle/>
+          <a:p>
+            <a:endParaRPr lang="ar-SA"/>
+          </a:p>
+        </p:txBody>
       </p:sp>
       <p:sp>
         <p:nvSpPr>
@@ -6550,7 +6953,7 @@
           <a:bodyPr wrap="square" lIns="0" tIns="0" rIns="0" bIns="0" rtlCol="0" anchor="ctr"/>
           <a:lstStyle/>
           <a:p>
-            <a:pPr algn="ctr" indent="0" marL="0">
+            <a:pPr marL="0" indent="0" algn="ctr">
               <a:buNone/>
             </a:pPr>
             <a:r>
@@ -6589,7 +6992,7 @@
           <a:bodyPr wrap="square" lIns="0" tIns="0" rIns="0" bIns="0" rtlCol="0" anchor="ctr"/>
           <a:lstStyle/>
           <a:p>
-            <a:pPr indent="0" marL="0">
+            <a:pPr marL="0" indent="0">
               <a:buNone/>
             </a:pPr>
             <a:r>
@@ -6633,6 +7036,13 @@
             <a:prstDash val="solid"/>
           </a:ln>
         </p:spPr>
+        <p:txBody>
+          <a:bodyPr/>
+          <a:lstStyle/>
+          <a:p>
+            <a:endParaRPr lang="ar-SA"/>
+          </a:p>
+        </p:txBody>
       </p:sp>
       <p:sp>
         <p:nvSpPr>
@@ -6655,7 +7065,7 @@
           <a:bodyPr wrap="square" lIns="0" tIns="0" rIns="0" bIns="0" rtlCol="0" anchor="ctr"/>
           <a:lstStyle/>
           <a:p>
-            <a:pPr indent="0" marL="0">
+            <a:pPr marL="0" indent="0">
               <a:buNone/>
             </a:pPr>
             <a:r>
@@ -6695,6 +7105,13 @@
             <a:prstDash val="solid"/>
           </a:ln>
         </p:spPr>
+        <p:txBody>
+          <a:bodyPr/>
+          <a:lstStyle/>
+          <a:p>
+            <a:endParaRPr lang="ar-SA"/>
+          </a:p>
+        </p:txBody>
       </p:sp>
       <p:sp>
         <p:nvSpPr>
@@ -6717,7 +7134,7 @@
           <a:bodyPr wrap="square" lIns="0" tIns="0" rIns="0" bIns="0" rtlCol="0" anchor="ctr"/>
           <a:lstStyle/>
           <a:p>
-            <a:pPr indent="0" marL="0">
+            <a:pPr marL="0" indent="0">
               <a:buNone/>
             </a:pPr>
             <a:r>
@@ -6756,7 +7173,7 @@
           <a:bodyPr wrap="square" lIns="0" tIns="0" rIns="0" bIns="0" rtlCol="0" anchor="ctr"/>
           <a:lstStyle/>
           <a:p>
-            <a:pPr indent="0" marL="0">
+            <a:pPr marL="0" indent="0">
               <a:buNone/>
             </a:pPr>
             <a:r>
@@ -6795,7 +7212,7 @@
           <a:bodyPr wrap="square" lIns="0" tIns="0" rIns="0" bIns="0" rtlCol="0" anchor="ctr"/>
           <a:lstStyle/>
           <a:p>
-            <a:pPr algn="r" indent="0" marL="0">
+            <a:pPr marL="0" indent="0" algn="r">
               <a:buNone/>
             </a:pPr>
             <a:r>
@@ -6813,6 +7230,36 @@
           </a:p>
         </p:txBody>
       </p:sp>
+      <p:pic>
+        <p:nvPicPr>
+          <p:cNvPr id="35" name="Picture 34">
+            <a:extLst>
+              <a:ext uri="{FF2B5EF4-FFF2-40B4-BE49-F238E27FC236}">
+                <a16:creationId xmlns:a16="http://schemas.microsoft.com/office/drawing/2014/main" id="{D89CD442-65BE-29FA-2B55-FD23DEC18835}"/>
+              </a:ext>
+            </a:extLst>
+          </p:cNvPr>
+          <p:cNvPicPr>
+            <a:picLocks noChangeAspect="1"/>
+          </p:cNvPicPr>
+          <p:nvPr/>
+        </p:nvPicPr>
+        <p:blipFill>
+          <a:blip r:embed="rId3"/>
+          <a:stretch>
+            <a:fillRect/>
+          </a:stretch>
+        </p:blipFill>
+        <p:spPr>
+          <a:xfrm>
+            <a:off x="8827008" y="-128064"/>
+            <a:ext cx="3361944" cy="1451589"/>
+          </a:xfrm>
+          <a:prstGeom prst="rect">
+            <a:avLst/>
+          </a:prstGeom>
+        </p:spPr>
+      </p:pic>
     </p:spTree>
   </p:cSld>
   <p:clrMapOvr>
@@ -6829,6 +7276,7 @@
         <a:solidFill>
           <a:srgbClr val="16302C"/>
         </a:solidFill>
+        <a:effectLst/>
       </p:bgPr>
     </p:bg>
     <p:spTree>
@@ -6866,7 +7314,7 @@
           <a:bodyPr wrap="square" lIns="0" tIns="0" rIns="0" bIns="0" rtlCol="0" anchor="ctr"/>
           <a:lstStyle/>
           <a:p>
-            <a:pPr indent="0" marL="0">
+            <a:pPr marL="0" indent="0">
               <a:buNone/>
             </a:pPr>
             <a:r>
@@ -6905,7 +7353,7 @@
           <a:bodyPr wrap="square" lIns="0" tIns="0" rIns="0" bIns="0" rtlCol="0" anchor="ctr"/>
           <a:lstStyle/>
           <a:p>
-            <a:pPr indent="0" marL="0">
+            <a:pPr marL="0" indent="0">
               <a:buNone/>
             </a:pPr>
             <a:r>
@@ -6944,7 +7392,7 @@
           <a:bodyPr wrap="square" lIns="0" tIns="0" rIns="0" bIns="0" rtlCol="0" anchor="ctr"/>
           <a:lstStyle/>
           <a:p>
-            <a:pPr indent="0" marL="0">
+            <a:pPr marL="0" indent="0">
               <a:buNone/>
             </a:pPr>
             <a:r>
@@ -6986,6 +7434,13 @@
             <a:prstDash val="solid"/>
           </a:ln>
         </p:spPr>
+        <p:txBody>
+          <a:bodyPr/>
+          <a:lstStyle/>
+          <a:p>
+            <a:endParaRPr lang="ar-SA"/>
+          </a:p>
+        </p:txBody>
       </p:sp>
       <p:sp>
         <p:nvSpPr>
@@ -7015,6 +7470,13 @@
             <a:prstDash val="solid"/>
           </a:ln>
         </p:spPr>
+        <p:txBody>
+          <a:bodyPr/>
+          <a:lstStyle/>
+          <a:p>
+            <a:endParaRPr lang="ar-SA"/>
+          </a:p>
+        </p:txBody>
       </p:sp>
       <p:sp>
         <p:nvSpPr>
@@ -7040,6 +7502,13 @@
             <a:prstDash val="solid"/>
           </a:ln>
         </p:spPr>
+        <p:txBody>
+          <a:bodyPr/>
+          <a:lstStyle/>
+          <a:p>
+            <a:endParaRPr lang="ar-SA"/>
+          </a:p>
+        </p:txBody>
       </p:sp>
       <p:sp>
         <p:nvSpPr>
@@ -7069,6 +7538,13 @@
             <a:prstDash val="solid"/>
           </a:ln>
         </p:spPr>
+        <p:txBody>
+          <a:bodyPr/>
+          <a:lstStyle/>
+          <a:p>
+            <a:endParaRPr lang="ar-SA"/>
+          </a:p>
+        </p:txBody>
       </p:sp>
       <p:sp>
         <p:nvSpPr>
@@ -7094,6 +7570,13 @@
             <a:prstDash val="solid"/>
           </a:ln>
         </p:spPr>
+        <p:txBody>
+          <a:bodyPr/>
+          <a:lstStyle/>
+          <a:p>
+            <a:endParaRPr lang="ar-SA"/>
+          </a:p>
+        </p:txBody>
       </p:sp>
       <p:sp>
         <p:nvSpPr>
@@ -7123,6 +7606,13 @@
             <a:prstDash val="solid"/>
           </a:ln>
         </p:spPr>
+        <p:txBody>
+          <a:bodyPr/>
+          <a:lstStyle/>
+          <a:p>
+            <a:endParaRPr lang="ar-SA"/>
+          </a:p>
+        </p:txBody>
       </p:sp>
       <p:sp>
         <p:nvSpPr>
@@ -7152,6 +7642,13 @@
             <a:prstDash val="solid"/>
           </a:ln>
         </p:spPr>
+        <p:txBody>
+          <a:bodyPr/>
+          <a:lstStyle/>
+          <a:p>
+            <a:endParaRPr lang="ar-SA"/>
+          </a:p>
+        </p:txBody>
       </p:sp>
       <p:sp>
         <p:nvSpPr>
@@ -7177,6 +7674,13 @@
             <a:prstDash val="solid"/>
           </a:ln>
         </p:spPr>
+        <p:txBody>
+          <a:bodyPr/>
+          <a:lstStyle/>
+          <a:p>
+            <a:endParaRPr lang="ar-SA"/>
+          </a:p>
+        </p:txBody>
       </p:sp>
       <p:sp>
         <p:nvSpPr>
@@ -7206,6 +7710,13 @@
             <a:prstDash val="solid"/>
           </a:ln>
         </p:spPr>
+        <p:txBody>
+          <a:bodyPr/>
+          <a:lstStyle/>
+          <a:p>
+            <a:endParaRPr lang="ar-SA"/>
+          </a:p>
+        </p:txBody>
       </p:sp>
       <p:sp>
         <p:nvSpPr>
@@ -7231,6 +7742,13 @@
             <a:prstDash val="solid"/>
           </a:ln>
         </p:spPr>
+        <p:txBody>
+          <a:bodyPr/>
+          <a:lstStyle/>
+          <a:p>
+            <a:endParaRPr lang="ar-SA"/>
+          </a:p>
+        </p:txBody>
       </p:sp>
       <p:sp>
         <p:nvSpPr>
@@ -7260,6 +7778,13 @@
             <a:prstDash val="solid"/>
           </a:ln>
         </p:spPr>
+        <p:txBody>
+          <a:bodyPr/>
+          <a:lstStyle/>
+          <a:p>
+            <a:endParaRPr lang="ar-SA"/>
+          </a:p>
+        </p:txBody>
       </p:sp>
       <p:sp>
         <p:nvSpPr>
@@ -7285,6 +7810,13 @@
             <a:prstDash val="solid"/>
           </a:ln>
         </p:spPr>
+        <p:txBody>
+          <a:bodyPr/>
+          <a:lstStyle/>
+          <a:p>
+            <a:endParaRPr lang="ar-SA"/>
+          </a:p>
+        </p:txBody>
       </p:sp>
       <p:sp>
         <p:nvSpPr>
@@ -7310,6 +7842,13 @@
             <a:prstDash val="solid"/>
           </a:ln>
         </p:spPr>
+        <p:txBody>
+          <a:bodyPr/>
+          <a:lstStyle/>
+          <a:p>
+            <a:endParaRPr lang="ar-SA"/>
+          </a:p>
+        </p:txBody>
       </p:sp>
       <p:sp>
         <p:nvSpPr>
@@ -7339,6 +7878,13 @@
             <a:prstDash val="solid"/>
           </a:ln>
         </p:spPr>
+        <p:txBody>
+          <a:bodyPr/>
+          <a:lstStyle/>
+          <a:p>
+            <a:endParaRPr lang="ar-SA"/>
+          </a:p>
+        </p:txBody>
       </p:sp>
       <p:sp>
         <p:nvSpPr>
@@ -7364,6 +7910,13 @@
             <a:prstDash val="solid"/>
           </a:ln>
         </p:spPr>
+        <p:txBody>
+          <a:bodyPr/>
+          <a:lstStyle/>
+          <a:p>
+            <a:endParaRPr lang="ar-SA"/>
+          </a:p>
+        </p:txBody>
       </p:sp>
       <p:sp>
         <p:nvSpPr>
@@ -7393,6 +7946,13 @@
             <a:prstDash val="solid"/>
           </a:ln>
         </p:spPr>
+        <p:txBody>
+          <a:bodyPr/>
+          <a:lstStyle/>
+          <a:p>
+            <a:endParaRPr lang="ar-SA"/>
+          </a:p>
+        </p:txBody>
       </p:sp>
       <p:sp>
         <p:nvSpPr>
@@ -7418,6 +7978,13 @@
             <a:prstDash val="solid"/>
           </a:ln>
         </p:spPr>
+        <p:txBody>
+          <a:bodyPr/>
+          <a:lstStyle/>
+          <a:p>
+            <a:endParaRPr lang="ar-SA"/>
+          </a:p>
+        </p:txBody>
       </p:sp>
       <p:sp>
         <p:nvSpPr>
@@ -7447,6 +8014,13 @@
             <a:prstDash val="solid"/>
           </a:ln>
         </p:spPr>
+        <p:txBody>
+          <a:bodyPr/>
+          <a:lstStyle/>
+          <a:p>
+            <a:endParaRPr lang="ar-SA"/>
+          </a:p>
+        </p:txBody>
       </p:sp>
       <p:sp>
         <p:nvSpPr>
@@ -7476,6 +8050,13 @@
             <a:prstDash val="solid"/>
           </a:ln>
         </p:spPr>
+        <p:txBody>
+          <a:bodyPr/>
+          <a:lstStyle/>
+          <a:p>
+            <a:endParaRPr lang="ar-SA"/>
+          </a:p>
+        </p:txBody>
       </p:sp>
       <p:sp>
         <p:nvSpPr>
@@ -7501,6 +8082,13 @@
             <a:prstDash val="solid"/>
           </a:ln>
         </p:spPr>
+        <p:txBody>
+          <a:bodyPr/>
+          <a:lstStyle/>
+          <a:p>
+            <a:endParaRPr lang="ar-SA"/>
+          </a:p>
+        </p:txBody>
       </p:sp>
       <p:sp>
         <p:nvSpPr>
@@ -7530,6 +8118,13 @@
             <a:prstDash val="solid"/>
           </a:ln>
         </p:spPr>
+        <p:txBody>
+          <a:bodyPr/>
+          <a:lstStyle/>
+          <a:p>
+            <a:endParaRPr lang="ar-SA"/>
+          </a:p>
+        </p:txBody>
       </p:sp>
       <p:sp>
         <p:nvSpPr>
@@ -7555,6 +8150,13 @@
             <a:prstDash val="solid"/>
           </a:ln>
         </p:spPr>
+        <p:txBody>
+          <a:bodyPr/>
+          <a:lstStyle/>
+          <a:p>
+            <a:endParaRPr lang="ar-SA"/>
+          </a:p>
+        </p:txBody>
       </p:sp>
       <p:sp>
         <p:nvSpPr>
@@ -7584,6 +8186,13 @@
             <a:prstDash val="solid"/>
           </a:ln>
         </p:spPr>
+        <p:txBody>
+          <a:bodyPr/>
+          <a:lstStyle/>
+          <a:p>
+            <a:endParaRPr lang="ar-SA"/>
+          </a:p>
+        </p:txBody>
       </p:sp>
       <p:sp>
         <p:nvSpPr>
@@ -7609,6 +8218,13 @@
             <a:prstDash val="solid"/>
           </a:ln>
         </p:spPr>
+        <p:txBody>
+          <a:bodyPr/>
+          <a:lstStyle/>
+          <a:p>
+            <a:endParaRPr lang="ar-SA"/>
+          </a:p>
+        </p:txBody>
       </p:sp>
       <p:sp>
         <p:nvSpPr>
@@ -7634,6 +8250,13 @@
             <a:prstDash val="solid"/>
           </a:ln>
         </p:spPr>
+        <p:txBody>
+          <a:bodyPr/>
+          <a:lstStyle/>
+          <a:p>
+            <a:endParaRPr lang="ar-SA"/>
+          </a:p>
+        </p:txBody>
       </p:sp>
       <p:sp>
         <p:nvSpPr>
@@ -7663,6 +8286,13 @@
             <a:prstDash val="solid"/>
           </a:ln>
         </p:spPr>
+        <p:txBody>
+          <a:bodyPr/>
+          <a:lstStyle/>
+          <a:p>
+            <a:endParaRPr lang="ar-SA"/>
+          </a:p>
+        </p:txBody>
       </p:sp>
       <p:sp>
         <p:nvSpPr>
@@ -7688,6 +8318,13 @@
             <a:prstDash val="solid"/>
           </a:ln>
         </p:spPr>
+        <p:txBody>
+          <a:bodyPr/>
+          <a:lstStyle/>
+          <a:p>
+            <a:endParaRPr lang="ar-SA"/>
+          </a:p>
+        </p:txBody>
       </p:sp>
       <p:sp>
         <p:nvSpPr>
@@ -7717,6 +8354,13 @@
             <a:prstDash val="solid"/>
           </a:ln>
         </p:spPr>
+        <p:txBody>
+          <a:bodyPr/>
+          <a:lstStyle/>
+          <a:p>
+            <a:endParaRPr lang="ar-SA"/>
+          </a:p>
+        </p:txBody>
       </p:sp>
       <p:sp>
         <p:nvSpPr>
@@ -7742,6 +8386,13 @@
             <a:prstDash val="solid"/>
           </a:ln>
         </p:spPr>
+        <p:txBody>
+          <a:bodyPr/>
+          <a:lstStyle/>
+          <a:p>
+            <a:endParaRPr lang="ar-SA"/>
+          </a:p>
+        </p:txBody>
       </p:sp>
       <p:sp>
         <p:nvSpPr>
@@ -7771,6 +8422,13 @@
             <a:prstDash val="solid"/>
           </a:ln>
         </p:spPr>
+        <p:txBody>
+          <a:bodyPr/>
+          <a:lstStyle/>
+          <a:p>
+            <a:endParaRPr lang="ar-SA"/>
+          </a:p>
+        </p:txBody>
       </p:sp>
       <p:sp>
         <p:nvSpPr>
@@ -7800,6 +8458,13 @@
             <a:prstDash val="solid"/>
           </a:ln>
         </p:spPr>
+        <p:txBody>
+          <a:bodyPr/>
+          <a:lstStyle/>
+          <a:p>
+            <a:endParaRPr lang="ar-SA"/>
+          </a:p>
+        </p:txBody>
       </p:sp>
       <p:sp>
         <p:nvSpPr>
@@ -7825,6 +8490,13 @@
             <a:prstDash val="solid"/>
           </a:ln>
         </p:spPr>
+        <p:txBody>
+          <a:bodyPr/>
+          <a:lstStyle/>
+          <a:p>
+            <a:endParaRPr lang="ar-SA"/>
+          </a:p>
+        </p:txBody>
       </p:sp>
       <p:sp>
         <p:nvSpPr>
@@ -7854,6 +8526,13 @@
             <a:prstDash val="solid"/>
           </a:ln>
         </p:spPr>
+        <p:txBody>
+          <a:bodyPr/>
+          <a:lstStyle/>
+          <a:p>
+            <a:endParaRPr lang="ar-SA"/>
+          </a:p>
+        </p:txBody>
       </p:sp>
       <p:sp>
         <p:nvSpPr>
@@ -7879,6 +8558,13 @@
             <a:prstDash val="solid"/>
           </a:ln>
         </p:spPr>
+        <p:txBody>
+          <a:bodyPr/>
+          <a:lstStyle/>
+          <a:p>
+            <a:endParaRPr lang="ar-SA"/>
+          </a:p>
+        </p:txBody>
       </p:sp>
       <p:sp>
         <p:nvSpPr>
@@ -7908,6 +8594,13 @@
             <a:prstDash val="solid"/>
           </a:ln>
         </p:spPr>
+        <p:txBody>
+          <a:bodyPr/>
+          <a:lstStyle/>
+          <a:p>
+            <a:endParaRPr lang="ar-SA"/>
+          </a:p>
+        </p:txBody>
       </p:sp>
       <p:sp>
         <p:nvSpPr>
@@ -7933,6 +8626,13 @@
             <a:prstDash val="solid"/>
           </a:ln>
         </p:spPr>
+        <p:txBody>
+          <a:bodyPr/>
+          <a:lstStyle/>
+          <a:p>
+            <a:endParaRPr lang="ar-SA"/>
+          </a:p>
+        </p:txBody>
       </p:sp>
       <p:sp>
         <p:nvSpPr>
@@ -7958,6 +8658,13 @@
             <a:prstDash val="solid"/>
           </a:ln>
         </p:spPr>
+        <p:txBody>
+          <a:bodyPr/>
+          <a:lstStyle/>
+          <a:p>
+            <a:endParaRPr lang="ar-SA"/>
+          </a:p>
+        </p:txBody>
       </p:sp>
       <p:sp>
         <p:nvSpPr>
@@ -7987,6 +8694,13 @@
             <a:prstDash val="solid"/>
           </a:ln>
         </p:spPr>
+        <p:txBody>
+          <a:bodyPr/>
+          <a:lstStyle/>
+          <a:p>
+            <a:endParaRPr lang="ar-SA"/>
+          </a:p>
+        </p:txBody>
       </p:sp>
       <p:sp>
         <p:nvSpPr>
@@ -8012,6 +8726,13 @@
             <a:prstDash val="solid"/>
           </a:ln>
         </p:spPr>
+        <p:txBody>
+          <a:bodyPr/>
+          <a:lstStyle/>
+          <a:p>
+            <a:endParaRPr lang="ar-SA"/>
+          </a:p>
+        </p:txBody>
       </p:sp>
       <p:sp>
         <p:nvSpPr>
@@ -8041,6 +8762,13 @@
             <a:prstDash val="solid"/>
           </a:ln>
         </p:spPr>
+        <p:txBody>
+          <a:bodyPr/>
+          <a:lstStyle/>
+          <a:p>
+            <a:endParaRPr lang="ar-SA"/>
+          </a:p>
+        </p:txBody>
       </p:sp>
       <p:sp>
         <p:nvSpPr>
@@ -8066,6 +8794,13 @@
             <a:prstDash val="solid"/>
           </a:ln>
         </p:spPr>
+        <p:txBody>
+          <a:bodyPr/>
+          <a:lstStyle/>
+          <a:p>
+            <a:endParaRPr lang="ar-SA"/>
+          </a:p>
+        </p:txBody>
       </p:sp>
       <p:sp>
         <p:nvSpPr>
@@ -8095,6 +8830,13 @@
             <a:prstDash val="solid"/>
           </a:ln>
         </p:spPr>
+        <p:txBody>
+          <a:bodyPr/>
+          <a:lstStyle/>
+          <a:p>
+            <a:endParaRPr lang="ar-SA"/>
+          </a:p>
+        </p:txBody>
       </p:sp>
       <p:sp>
         <p:nvSpPr>
@@ -8117,7 +8859,7 @@
           <a:bodyPr wrap="square" lIns="0" tIns="0" rIns="0" bIns="0" rtlCol="0" anchor="ctr"/>
           <a:lstStyle/>
           <a:p>
-            <a:pPr indent="0" marL="0">
+            <a:pPr marL="0" indent="0">
               <a:buNone/>
             </a:pPr>
             <a:r>
@@ -8156,7 +8898,7 @@
           <a:bodyPr wrap="square" lIns="0" tIns="0" rIns="0" bIns="0" rtlCol="0" anchor="ctr"/>
           <a:lstStyle/>
           <a:p>
-            <a:pPr algn="r" indent="0" marL="0">
+            <a:pPr marL="0" indent="0" algn="r">
               <a:buNone/>
             </a:pPr>
             <a:r>
@@ -8174,6 +8916,36 @@
           </a:p>
         </p:txBody>
       </p:sp>
+      <p:pic>
+        <p:nvPicPr>
+          <p:cNvPr id="50" name="Picture 49">
+            <a:extLst>
+              <a:ext uri="{FF2B5EF4-FFF2-40B4-BE49-F238E27FC236}">
+                <a16:creationId xmlns:a16="http://schemas.microsoft.com/office/drawing/2014/main" id="{59AE03D9-762D-560E-9EC6-8D0751E724E1}"/>
+              </a:ext>
+            </a:extLst>
+          </p:cNvPr>
+          <p:cNvPicPr>
+            <a:picLocks noChangeAspect="1"/>
+          </p:cNvPicPr>
+          <p:nvPr/>
+        </p:nvPicPr>
+        <p:blipFill>
+          <a:blip r:embed="rId3"/>
+          <a:stretch>
+            <a:fillRect/>
+          </a:stretch>
+        </p:blipFill>
+        <p:spPr>
+          <a:xfrm>
+            <a:off x="4388578" y="5029200"/>
+            <a:ext cx="3414843" cy="1474430"/>
+          </a:xfrm>
+          <a:prstGeom prst="rect">
+            <a:avLst/>
+          </a:prstGeom>
+        </p:spPr>
+      </p:pic>
     </p:spTree>
   </p:cSld>
   <p:clrMapOvr>
@@ -8190,6 +8962,7 @@
         <a:solidFill>
           <a:srgbClr val="F3ECE1"/>
         </a:solidFill>
+        <a:effectLst/>
       </p:bgPr>
     </p:bg>
     <p:spTree>
@@ -8230,6 +9003,13 @@
             <a:prstDash val="solid"/>
           </a:ln>
         </p:spPr>
+        <p:txBody>
+          <a:bodyPr/>
+          <a:lstStyle/>
+          <a:p>
+            <a:endParaRPr lang="ar-SA"/>
+          </a:p>
+        </p:txBody>
       </p:sp>
       <p:sp>
         <p:nvSpPr>
@@ -8252,11 +9032,11 @@
           <a:bodyPr wrap="square" lIns="0" tIns="0" rIns="0" bIns="0" rtlCol="0" anchor="ctr"/>
           <a:lstStyle/>
           <a:p>
-            <a:pPr indent="0" marL="0">
-              <a:buNone/>
-            </a:pPr>
-            <a:r>
-              <a:rPr lang="en-US" sz="1200" b="1" spc="400" kern="0" dirty="0">
+            <a:pPr marL="0" indent="0">
+              <a:buNone/>
+            </a:pPr>
+            <a:r>
+              <a:rPr lang="en-US" sz="1200" b="1" kern="0" spc="400" dirty="0">
                 <a:solidFill>
                   <a:srgbClr val="4A5C57"/>
                 </a:solidFill>
@@ -8291,7 +9071,7 @@
           <a:bodyPr wrap="square" lIns="0" tIns="0" rIns="0" bIns="0" rtlCol="0" anchor="ctr"/>
           <a:lstStyle/>
           <a:p>
-            <a:pPr indent="0" marL="0">
+            <a:pPr marL="0" indent="0">
               <a:buNone/>
             </a:pPr>
             <a:r>
@@ -8330,7 +9110,7 @@
           <a:bodyPr wrap="square" lIns="0" tIns="0" rIns="0" bIns="0" rtlCol="0" anchor="ctr"/>
           <a:lstStyle/>
           <a:p>
-            <a:pPr indent="0" marL="0">
+            <a:pPr marL="0" indent="0">
               <a:buNone/>
             </a:pPr>
             <a:r>
@@ -8374,13 +9154,20 @@
             <a:prstDash val="solid"/>
           </a:ln>
           <a:effectLst>
-            <a:outerShdw sx="100000" sy="100000" kx="0" ky="0" algn="bl" rotWithShape="0" blurRad="101600" dist="25400" dir="5400000">
+            <a:outerShdw blurRad="101600" dist="25400" dir="5400000" algn="bl" rotWithShape="0">
               <a:srgbClr val="000000">
                 <a:alpha val="8000"/>
               </a:srgbClr>
             </a:outerShdw>
           </a:effectLst>
         </p:spPr>
+        <p:txBody>
+          <a:bodyPr/>
+          <a:lstStyle/>
+          <a:p>
+            <a:endParaRPr lang="ar-SA"/>
+          </a:p>
+        </p:txBody>
       </p:sp>
       <p:sp>
         <p:nvSpPr>
@@ -8406,17 +9193,24 @@
             <a:prstDash val="solid"/>
           </a:ln>
         </p:spPr>
+        <p:txBody>
+          <a:bodyPr/>
+          <a:lstStyle/>
+          <a:p>
+            <a:endParaRPr lang="ar-SA"/>
+          </a:p>
+        </p:txBody>
       </p:sp>
       <p:pic>
         <p:nvPicPr>
-          <p:cNvPr id="8" name="Image 0" descr="preencoded.png">    </p:cNvPr>
+          <p:cNvPr id="8" name="Image 0" descr="preencoded.png"/>
           <p:cNvPicPr>
             <a:picLocks noChangeAspect="1"/>
           </p:cNvPicPr>
           <p:nvPr/>
         </p:nvPicPr>
         <p:blipFill>
-          <a:blip r:embed="rId1"/>
+          <a:blip r:embed="rId3"/>
           <a:stretch>
             <a:fillRect/>
           </a:stretch>
@@ -8452,7 +9246,7 @@
           <a:bodyPr wrap="square" lIns="0" tIns="0" rIns="0" bIns="0" rtlCol="0" anchor="t"/>
           <a:lstStyle/>
           <a:p>
-            <a:pPr indent="0" marL="0">
+            <a:pPr marL="0" indent="0">
               <a:buNone/>
             </a:pPr>
             <a:r>
@@ -8491,7 +9285,7 @@
           <a:bodyPr wrap="square" lIns="0" tIns="0" rIns="0" bIns="0" rtlCol="0" anchor="t"/>
           <a:lstStyle/>
           <a:p>
-            <a:pPr indent="0" marL="0">
+            <a:pPr marL="0" indent="0">
               <a:buNone/>
             </a:pPr>
             <a:r>
@@ -8535,13 +9329,20 @@
             <a:prstDash val="solid"/>
           </a:ln>
           <a:effectLst>
-            <a:outerShdw sx="100000" sy="100000" kx="0" ky="0" algn="bl" rotWithShape="0" blurRad="101600" dist="25400" dir="5400000">
+            <a:outerShdw blurRad="101600" dist="25400" dir="5400000" algn="bl" rotWithShape="0">
               <a:srgbClr val="000000">
                 <a:alpha val="8000"/>
               </a:srgbClr>
             </a:outerShdw>
           </a:effectLst>
         </p:spPr>
+        <p:txBody>
+          <a:bodyPr/>
+          <a:lstStyle/>
+          <a:p>
+            <a:endParaRPr lang="ar-SA"/>
+          </a:p>
+        </p:txBody>
       </p:sp>
       <p:sp>
         <p:nvSpPr>
@@ -8567,17 +9368,24 @@
             <a:prstDash val="solid"/>
           </a:ln>
         </p:spPr>
+        <p:txBody>
+          <a:bodyPr/>
+          <a:lstStyle/>
+          <a:p>
+            <a:endParaRPr lang="ar-SA"/>
+          </a:p>
+        </p:txBody>
       </p:sp>
       <p:pic>
         <p:nvPicPr>
-          <p:cNvPr id="13" name="Image 1" descr="preencoded.png">    </p:cNvPr>
+          <p:cNvPr id="13" name="Image 1" descr="preencoded.png"/>
           <p:cNvPicPr>
             <a:picLocks noChangeAspect="1"/>
           </p:cNvPicPr>
           <p:nvPr/>
         </p:nvPicPr>
         <p:blipFill>
-          <a:blip r:embed="rId2"/>
+          <a:blip r:embed="rId4"/>
           <a:stretch>
             <a:fillRect/>
           </a:stretch>
@@ -8613,7 +9421,7 @@
           <a:bodyPr wrap="square" lIns="0" tIns="0" rIns="0" bIns="0" rtlCol="0" anchor="t"/>
           <a:lstStyle/>
           <a:p>
-            <a:pPr indent="0" marL="0">
+            <a:pPr marL="0" indent="0">
               <a:buNone/>
             </a:pPr>
             <a:r>
@@ -8652,7 +9460,7 @@
           <a:bodyPr wrap="square" lIns="0" tIns="0" rIns="0" bIns="0" rtlCol="0" anchor="t"/>
           <a:lstStyle/>
           <a:p>
-            <a:pPr indent="0" marL="0">
+            <a:pPr marL="0" indent="0">
               <a:buNone/>
             </a:pPr>
             <a:r>
@@ -8696,13 +9504,20 @@
             <a:prstDash val="solid"/>
           </a:ln>
           <a:effectLst>
-            <a:outerShdw sx="100000" sy="100000" kx="0" ky="0" algn="bl" rotWithShape="0" blurRad="101600" dist="25400" dir="5400000">
+            <a:outerShdw blurRad="101600" dist="25400" dir="5400000" algn="bl" rotWithShape="0">
               <a:srgbClr val="000000">
                 <a:alpha val="8000"/>
               </a:srgbClr>
             </a:outerShdw>
           </a:effectLst>
         </p:spPr>
+        <p:txBody>
+          <a:bodyPr/>
+          <a:lstStyle/>
+          <a:p>
+            <a:endParaRPr lang="ar-SA"/>
+          </a:p>
+        </p:txBody>
       </p:sp>
       <p:sp>
         <p:nvSpPr>
@@ -8728,17 +9543,24 @@
             <a:prstDash val="solid"/>
           </a:ln>
         </p:spPr>
+        <p:txBody>
+          <a:bodyPr/>
+          <a:lstStyle/>
+          <a:p>
+            <a:endParaRPr lang="ar-SA"/>
+          </a:p>
+        </p:txBody>
       </p:sp>
       <p:pic>
         <p:nvPicPr>
-          <p:cNvPr id="18" name="Image 2" descr="preencoded.png">    </p:cNvPr>
+          <p:cNvPr id="18" name="Image 2" descr="preencoded.png"/>
           <p:cNvPicPr>
             <a:picLocks noChangeAspect="1"/>
           </p:cNvPicPr>
           <p:nvPr/>
         </p:nvPicPr>
         <p:blipFill>
-          <a:blip r:embed="rId3"/>
+          <a:blip r:embed="rId5"/>
           <a:stretch>
             <a:fillRect/>
           </a:stretch>
@@ -8774,7 +9596,7 @@
           <a:bodyPr wrap="square" lIns="0" tIns="0" rIns="0" bIns="0" rtlCol="0" anchor="t"/>
           <a:lstStyle/>
           <a:p>
-            <a:pPr indent="0" marL="0">
+            <a:pPr marL="0" indent="0">
               <a:buNone/>
             </a:pPr>
             <a:r>
@@ -8813,7 +9635,7 @@
           <a:bodyPr wrap="square" lIns="0" tIns="0" rIns="0" bIns="0" rtlCol="0" anchor="t"/>
           <a:lstStyle/>
           <a:p>
-            <a:pPr indent="0" marL="0">
+            <a:pPr marL="0" indent="0">
               <a:buNone/>
             </a:pPr>
             <a:r>
@@ -8852,7 +9674,7 @@
           <a:bodyPr wrap="square" lIns="0" tIns="0" rIns="0" bIns="0" rtlCol="0" anchor="ctr"/>
           <a:lstStyle/>
           <a:p>
-            <a:pPr indent="0" marL="0">
+            <a:pPr marL="0" indent="0">
               <a:buNone/>
             </a:pPr>
             <a:r>
@@ -8891,7 +9713,7 @@
           <a:bodyPr wrap="square" lIns="0" tIns="0" rIns="0" bIns="0" rtlCol="0" anchor="ctr"/>
           <a:lstStyle/>
           <a:p>
-            <a:pPr algn="r" indent="0" marL="0">
+            <a:pPr marL="0" indent="0" algn="r">
               <a:buNone/>
             </a:pPr>
             <a:r>
@@ -8909,6 +9731,36 @@
           </a:p>
         </p:txBody>
       </p:sp>
+      <p:pic>
+        <p:nvPicPr>
+          <p:cNvPr id="24" name="Picture 23">
+            <a:extLst>
+              <a:ext uri="{FF2B5EF4-FFF2-40B4-BE49-F238E27FC236}">
+                <a16:creationId xmlns:a16="http://schemas.microsoft.com/office/drawing/2014/main" id="{18887600-CB86-8579-4AA3-EAEC91F1A8AB}"/>
+              </a:ext>
+            </a:extLst>
+          </p:cNvPr>
+          <p:cNvPicPr>
+            <a:picLocks noChangeAspect="1"/>
+          </p:cNvPicPr>
+          <p:nvPr/>
+        </p:nvPicPr>
+        <p:blipFill>
+          <a:blip r:embed="rId6"/>
+          <a:stretch>
+            <a:fillRect/>
+          </a:stretch>
+        </p:blipFill>
+        <p:spPr>
+          <a:xfrm>
+            <a:off x="8827008" y="-128064"/>
+            <a:ext cx="3361944" cy="1451589"/>
+          </a:xfrm>
+          <a:prstGeom prst="rect">
+            <a:avLst/>
+          </a:prstGeom>
+        </p:spPr>
+      </p:pic>
     </p:spTree>
   </p:cSld>
   <p:clrMapOvr>
@@ -8925,6 +9777,7 @@
         <a:solidFill>
           <a:srgbClr val="F3ECE1"/>
         </a:solidFill>
+        <a:effectLst/>
       </p:bgPr>
     </p:bg>
     <p:spTree>
@@ -8965,6 +9818,13 @@
             <a:prstDash val="solid"/>
           </a:ln>
         </p:spPr>
+        <p:txBody>
+          <a:bodyPr/>
+          <a:lstStyle/>
+          <a:p>
+            <a:endParaRPr lang="ar-SA"/>
+          </a:p>
+        </p:txBody>
       </p:sp>
       <p:sp>
         <p:nvSpPr>
@@ -8987,11 +9847,11 @@
           <a:bodyPr wrap="square" lIns="0" tIns="0" rIns="0" bIns="0" rtlCol="0" anchor="ctr"/>
           <a:lstStyle/>
           <a:p>
-            <a:pPr indent="0" marL="0">
-              <a:buNone/>
-            </a:pPr>
-            <a:r>
-              <a:rPr lang="en-US" sz="1200" b="1" spc="400" kern="0" dirty="0">
+            <a:pPr marL="0" indent="0">
+              <a:buNone/>
+            </a:pPr>
+            <a:r>
+              <a:rPr lang="en-US" sz="1200" b="1" kern="0" spc="400" dirty="0">
                 <a:solidFill>
                   <a:srgbClr val="4A5C57"/>
                 </a:solidFill>
@@ -9026,7 +9886,7 @@
           <a:bodyPr wrap="square" lIns="0" tIns="0" rIns="0" bIns="0" rtlCol="0" anchor="ctr"/>
           <a:lstStyle/>
           <a:p>
-            <a:pPr indent="0" marL="0">
+            <a:pPr marL="0" indent="0">
               <a:buNone/>
             </a:pPr>
             <a:r>
@@ -9065,7 +9925,7 @@
           <a:bodyPr wrap="square" lIns="0" tIns="0" rIns="0" bIns="0" rtlCol="0" anchor="ctr"/>
           <a:lstStyle/>
           <a:p>
-            <a:pPr indent="0" marL="0">
+            <a:pPr marL="0" indent="0">
               <a:buNone/>
             </a:pPr>
             <a:r>
@@ -9109,6 +9969,13 @@
             <a:prstDash val="solid"/>
           </a:ln>
         </p:spPr>
+        <p:txBody>
+          <a:bodyPr/>
+          <a:lstStyle/>
+          <a:p>
+            <a:endParaRPr lang="ar-SA"/>
+          </a:p>
+        </p:txBody>
       </p:sp>
       <p:sp>
         <p:nvSpPr>
@@ -9134,17 +10001,24 @@
             <a:prstDash val="solid"/>
           </a:ln>
         </p:spPr>
+        <p:txBody>
+          <a:bodyPr/>
+          <a:lstStyle/>
+          <a:p>
+            <a:endParaRPr lang="ar-SA"/>
+          </a:p>
+        </p:txBody>
       </p:sp>
       <p:pic>
         <p:nvPicPr>
-          <p:cNvPr id="8" name="Image 0" descr="preencoded.png">    </p:cNvPr>
+          <p:cNvPr id="8" name="Image 0" descr="preencoded.png"/>
           <p:cNvPicPr>
             <a:picLocks noChangeAspect="1"/>
           </p:cNvPicPr>
           <p:nvPr/>
         </p:nvPicPr>
         <p:blipFill>
-          <a:blip r:embed="rId1"/>
+          <a:blip r:embed="rId3"/>
           <a:stretch>
             <a:fillRect/>
           </a:stretch>
@@ -9180,7 +10054,7 @@
           <a:bodyPr wrap="square" lIns="0" tIns="0" rIns="0" bIns="0" rtlCol="0" anchor="ctr"/>
           <a:lstStyle/>
           <a:p>
-            <a:pPr indent="0" marL="0">
+            <a:pPr marL="0" indent="0">
               <a:buNone/>
             </a:pPr>
             <a:r>
@@ -9219,7 +10093,7 @@
           <a:bodyPr wrap="square" lIns="0" tIns="0" rIns="0" bIns="0" rtlCol="0" anchor="ctr"/>
           <a:lstStyle/>
           <a:p>
-            <a:pPr indent="0" marL="0">
+            <a:pPr marL="0" indent="0">
               <a:buNone/>
             </a:pPr>
             <a:r>
@@ -9261,6 +10135,13 @@
             <a:prstDash val="solid"/>
           </a:ln>
         </p:spPr>
+        <p:txBody>
+          <a:bodyPr/>
+          <a:lstStyle/>
+          <a:p>
+            <a:endParaRPr lang="ar-SA"/>
+          </a:p>
+        </p:txBody>
       </p:sp>
       <p:sp>
         <p:nvSpPr>
@@ -9283,7 +10164,7 @@
           <a:bodyPr wrap="square" lIns="0" tIns="0" rIns="0" bIns="0" rtlCol="0" anchor="ctr"/>
           <a:lstStyle/>
           <a:p>
-            <a:pPr indent="0" marL="0">
+            <a:pPr marL="0" indent="0">
               <a:buNone/>
             </a:pPr>
             <a:r>
@@ -9325,6 +10206,13 @@
             <a:prstDash val="solid"/>
           </a:ln>
         </p:spPr>
+        <p:txBody>
+          <a:bodyPr/>
+          <a:lstStyle/>
+          <a:p>
+            <a:endParaRPr lang="ar-SA"/>
+          </a:p>
+        </p:txBody>
       </p:sp>
       <p:sp>
         <p:nvSpPr>
@@ -9347,7 +10235,7 @@
           <a:bodyPr wrap="square" lIns="0" tIns="0" rIns="0" bIns="0" rtlCol="0" anchor="ctr"/>
           <a:lstStyle/>
           <a:p>
-            <a:pPr indent="0" marL="0">
+            <a:pPr marL="0" indent="0">
               <a:buNone/>
             </a:pPr>
             <a:r>
@@ -9389,6 +10277,13 @@
             <a:prstDash val="solid"/>
           </a:ln>
         </p:spPr>
+        <p:txBody>
+          <a:bodyPr/>
+          <a:lstStyle/>
+          <a:p>
+            <a:endParaRPr lang="ar-SA"/>
+          </a:p>
+        </p:txBody>
       </p:sp>
       <p:sp>
         <p:nvSpPr>
@@ -9411,7 +10306,7 @@
           <a:bodyPr wrap="square" lIns="0" tIns="0" rIns="0" bIns="0" rtlCol="0" anchor="ctr"/>
           <a:lstStyle/>
           <a:p>
-            <a:pPr indent="0" marL="0">
+            <a:pPr marL="0" indent="0">
               <a:buNone/>
             </a:pPr>
             <a:r>
@@ -9453,6 +10348,13 @@
             <a:prstDash val="solid"/>
           </a:ln>
         </p:spPr>
+        <p:txBody>
+          <a:bodyPr/>
+          <a:lstStyle/>
+          <a:p>
+            <a:endParaRPr lang="ar-SA"/>
+          </a:p>
+        </p:txBody>
       </p:sp>
       <p:sp>
         <p:nvSpPr>
@@ -9475,7 +10377,7 @@
           <a:bodyPr wrap="square" lIns="0" tIns="0" rIns="0" bIns="0" rtlCol="0" anchor="ctr"/>
           <a:lstStyle/>
           <a:p>
-            <a:pPr indent="0" marL="0">
+            <a:pPr marL="0" indent="0">
               <a:buNone/>
             </a:pPr>
             <a:r>
@@ -9515,6 +10417,13 @@
             <a:prstDash val="solid"/>
           </a:ln>
         </p:spPr>
+        <p:txBody>
+          <a:bodyPr/>
+          <a:lstStyle/>
+          <a:p>
+            <a:endParaRPr lang="ar-SA"/>
+          </a:p>
+        </p:txBody>
       </p:sp>
       <p:sp>
         <p:nvSpPr>
@@ -9540,6 +10449,13 @@
             <a:prstDash val="solid"/>
           </a:ln>
         </p:spPr>
+        <p:txBody>
+          <a:bodyPr/>
+          <a:lstStyle/>
+          <a:p>
+            <a:endParaRPr lang="ar-SA"/>
+          </a:p>
+        </p:txBody>
       </p:sp>
       <p:sp>
         <p:nvSpPr>
@@ -9562,7 +10478,7 @@
           <a:bodyPr wrap="square" lIns="0" tIns="0" rIns="0" bIns="0" rtlCol="0" anchor="ctr"/>
           <a:lstStyle/>
           <a:p>
-            <a:pPr algn="ctr" indent="0" marL="0">
+            <a:pPr marL="0" indent="0" algn="ctr">
               <a:buNone/>
             </a:pPr>
             <a:r>
@@ -9601,7 +10517,7 @@
           <a:bodyPr wrap="square" lIns="0" tIns="0" rIns="0" bIns="0" rtlCol="0" anchor="ctr"/>
           <a:lstStyle/>
           <a:p>
-            <a:pPr indent="0" marL="0">
+            <a:pPr marL="0" indent="0">
               <a:buNone/>
             </a:pPr>
             <a:r>
@@ -9640,7 +10556,7 @@
           <a:bodyPr wrap="square" lIns="0" tIns="0" rIns="0" bIns="0" rtlCol="0" anchor="t"/>
           <a:lstStyle/>
           <a:p>
-            <a:pPr indent="0" marL="0">
+            <a:pPr marL="0" indent="0">
               <a:buNone/>
             </a:pPr>
             <a:r>
@@ -9682,6 +10598,13 @@
             <a:prstDash val="solid"/>
           </a:ln>
         </p:spPr>
+        <p:txBody>
+          <a:bodyPr/>
+          <a:lstStyle/>
+          <a:p>
+            <a:endParaRPr lang="ar-SA"/>
+          </a:p>
+        </p:txBody>
       </p:sp>
       <p:sp>
         <p:nvSpPr>
@@ -9704,7 +10627,7 @@
           <a:bodyPr wrap="square" lIns="0" tIns="0" rIns="0" bIns="0" rtlCol="0" anchor="ctr"/>
           <a:lstStyle/>
           <a:p>
-            <a:pPr algn="ctr" indent="0" marL="0">
+            <a:pPr marL="0" indent="0" algn="ctr">
               <a:buNone/>
             </a:pPr>
             <a:r>
@@ -9743,7 +10666,7 @@
           <a:bodyPr wrap="square" lIns="0" tIns="0" rIns="0" bIns="0" rtlCol="0" anchor="ctr"/>
           <a:lstStyle/>
           <a:p>
-            <a:pPr indent="0" marL="0">
+            <a:pPr marL="0" indent="0">
               <a:buNone/>
             </a:pPr>
             <a:r>
@@ -9782,7 +10705,7 @@
           <a:bodyPr wrap="square" lIns="0" tIns="0" rIns="0" bIns="0" rtlCol="0" anchor="t"/>
           <a:lstStyle/>
           <a:p>
-            <a:pPr indent="0" marL="0">
+            <a:pPr marL="0" indent="0">
               <a:buNone/>
             </a:pPr>
             <a:r>
@@ -9824,6 +10747,13 @@
             <a:prstDash val="solid"/>
           </a:ln>
         </p:spPr>
+        <p:txBody>
+          <a:bodyPr/>
+          <a:lstStyle/>
+          <a:p>
+            <a:endParaRPr lang="ar-SA"/>
+          </a:p>
+        </p:txBody>
       </p:sp>
       <p:sp>
         <p:nvSpPr>
@@ -9846,7 +10776,7 @@
           <a:bodyPr wrap="square" lIns="0" tIns="0" rIns="0" bIns="0" rtlCol="0" anchor="ctr"/>
           <a:lstStyle/>
           <a:p>
-            <a:pPr algn="ctr" indent="0" marL="0">
+            <a:pPr marL="0" indent="0" algn="ctr">
               <a:buNone/>
             </a:pPr>
             <a:r>
@@ -9885,7 +10815,7 @@
           <a:bodyPr wrap="square" lIns="0" tIns="0" rIns="0" bIns="0" rtlCol="0" anchor="ctr"/>
           <a:lstStyle/>
           <a:p>
-            <a:pPr indent="0" marL="0">
+            <a:pPr marL="0" indent="0">
               <a:buNone/>
             </a:pPr>
             <a:r>
@@ -9924,7 +10854,7 @@
           <a:bodyPr wrap="square" lIns="0" tIns="0" rIns="0" bIns="0" rtlCol="0" anchor="t"/>
           <a:lstStyle/>
           <a:p>
-            <a:pPr indent="0" marL="0">
+            <a:pPr marL="0" indent="0">
               <a:buNone/>
             </a:pPr>
             <a:r>
@@ -9966,6 +10896,13 @@
             <a:prstDash val="solid"/>
           </a:ln>
         </p:spPr>
+        <p:txBody>
+          <a:bodyPr/>
+          <a:lstStyle/>
+          <a:p>
+            <a:endParaRPr lang="ar-SA"/>
+          </a:p>
+        </p:txBody>
       </p:sp>
       <p:sp>
         <p:nvSpPr>
@@ -9988,7 +10925,7 @@
           <a:bodyPr wrap="square" lIns="0" tIns="0" rIns="0" bIns="0" rtlCol="0" anchor="ctr"/>
           <a:lstStyle/>
           <a:p>
-            <a:pPr algn="ctr" indent="0" marL="0">
+            <a:pPr marL="0" indent="0" algn="ctr">
               <a:buNone/>
             </a:pPr>
             <a:r>
@@ -10027,7 +10964,7 @@
           <a:bodyPr wrap="square" lIns="0" tIns="0" rIns="0" bIns="0" rtlCol="0" anchor="ctr"/>
           <a:lstStyle/>
           <a:p>
-            <a:pPr indent="0" marL="0">
+            <a:pPr marL="0" indent="0">
               <a:buNone/>
             </a:pPr>
             <a:r>
@@ -10066,7 +11003,7 @@
           <a:bodyPr wrap="square" lIns="0" tIns="0" rIns="0" bIns="0" rtlCol="0" anchor="t"/>
           <a:lstStyle/>
           <a:p>
-            <a:pPr indent="0" marL="0">
+            <a:pPr marL="0" indent="0">
               <a:buNone/>
             </a:pPr>
             <a:r>
@@ -10105,7 +11042,7 @@
           <a:bodyPr wrap="square" lIns="0" tIns="0" rIns="0" bIns="0" rtlCol="0" anchor="ctr"/>
           <a:lstStyle/>
           <a:p>
-            <a:pPr indent="0" marL="0">
+            <a:pPr marL="0" indent="0">
               <a:buNone/>
             </a:pPr>
             <a:r>
@@ -10144,7 +11081,7 @@
           <a:bodyPr wrap="square" lIns="0" tIns="0" rIns="0" bIns="0" rtlCol="0" anchor="ctr"/>
           <a:lstStyle/>
           <a:p>
-            <a:pPr algn="r" indent="0" marL="0">
+            <a:pPr marL="0" indent="0" algn="r">
               <a:buNone/>
             </a:pPr>
             <a:r>
@@ -10162,6 +11099,36 @@
           </a:p>
         </p:txBody>
       </p:sp>
+      <p:pic>
+        <p:nvPicPr>
+          <p:cNvPr id="39" name="Picture 38">
+            <a:extLst>
+              <a:ext uri="{FF2B5EF4-FFF2-40B4-BE49-F238E27FC236}">
+                <a16:creationId xmlns:a16="http://schemas.microsoft.com/office/drawing/2014/main" id="{754623A6-F47A-88AE-57A5-FFF2036D2E3A}"/>
+              </a:ext>
+            </a:extLst>
+          </p:cNvPr>
+          <p:cNvPicPr>
+            <a:picLocks noChangeAspect="1"/>
+          </p:cNvPicPr>
+          <p:nvPr/>
+        </p:nvPicPr>
+        <p:blipFill>
+          <a:blip r:embed="rId4"/>
+          <a:stretch>
+            <a:fillRect/>
+          </a:stretch>
+        </p:blipFill>
+        <p:spPr>
+          <a:xfrm>
+            <a:off x="8827008" y="-128064"/>
+            <a:ext cx="3361944" cy="1451589"/>
+          </a:xfrm>
+          <a:prstGeom prst="rect">
+            <a:avLst/>
+          </a:prstGeom>
+        </p:spPr>
+      </p:pic>
     </p:spTree>
   </p:cSld>
   <p:clrMapOvr>
@@ -10178,6 +11145,7 @@
         <a:solidFill>
           <a:srgbClr val="F3ECE1"/>
         </a:solidFill>
+        <a:effectLst/>
       </p:bgPr>
     </p:bg>
     <p:spTree>
@@ -10218,6 +11186,13 @@
             <a:prstDash val="solid"/>
           </a:ln>
         </p:spPr>
+        <p:txBody>
+          <a:bodyPr/>
+          <a:lstStyle/>
+          <a:p>
+            <a:endParaRPr lang="ar-SA"/>
+          </a:p>
+        </p:txBody>
       </p:sp>
       <p:sp>
         <p:nvSpPr>
@@ -10240,11 +11215,11 @@
           <a:bodyPr wrap="square" lIns="0" tIns="0" rIns="0" bIns="0" rtlCol="0" anchor="ctr"/>
           <a:lstStyle/>
           <a:p>
-            <a:pPr indent="0" marL="0">
-              <a:buNone/>
-            </a:pPr>
-            <a:r>
-              <a:rPr lang="en-US" sz="1200" b="1" spc="400" kern="0" dirty="0">
+            <a:pPr marL="0" indent="0">
+              <a:buNone/>
+            </a:pPr>
+            <a:r>
+              <a:rPr lang="en-US" sz="1200" b="1" kern="0" spc="400" dirty="0">
                 <a:solidFill>
                   <a:srgbClr val="4A5C57"/>
                 </a:solidFill>
@@ -10279,7 +11254,7 @@
           <a:bodyPr wrap="square" lIns="0" tIns="0" rIns="0" bIns="0" rtlCol="0" anchor="ctr"/>
           <a:lstStyle/>
           <a:p>
-            <a:pPr indent="0" marL="0">
+            <a:pPr marL="0" indent="0">
               <a:buNone/>
             </a:pPr>
             <a:r>
@@ -10318,11 +11293,11 @@
           <a:bodyPr wrap="square" lIns="0" tIns="0" rIns="0" bIns="0" rtlCol="0" anchor="ctr"/>
           <a:lstStyle/>
           <a:p>
-            <a:pPr indent="0" marL="0">
-              <a:buNone/>
-            </a:pPr>
-            <a:r>
-              <a:rPr lang="en-US" sz="1200" b="1" spc="400" kern="0" dirty="0">
+            <a:pPr marL="0" indent="0">
+              <a:buNone/>
+            </a:pPr>
+            <a:r>
+              <a:rPr lang="en-US" sz="1200" b="1" kern="0" spc="400" dirty="0">
                 <a:solidFill>
                   <a:srgbClr val="4A5C57"/>
                 </a:solidFill>
@@ -10357,11 +11332,11 @@
           <a:bodyPr wrap="square" lIns="0" tIns="0" rIns="0" bIns="0" rtlCol="0" anchor="ctr"/>
           <a:lstStyle/>
           <a:p>
-            <a:pPr indent="0" marL="0">
-              <a:buNone/>
-            </a:pPr>
-            <a:r>
-              <a:rPr lang="en-US" sz="1200" b="1" spc="400" kern="0" dirty="0">
+            <a:pPr marL="0" indent="0">
+              <a:buNone/>
+            </a:pPr>
+            <a:r>
+              <a:rPr lang="en-US" sz="1200" b="1" kern="0" spc="400" dirty="0">
                 <a:solidFill>
                   <a:srgbClr val="B4532A"/>
                 </a:solidFill>
@@ -10399,17 +11374,24 @@
             <a:prstDash val="solid"/>
           </a:ln>
         </p:spPr>
+        <p:txBody>
+          <a:bodyPr/>
+          <a:lstStyle/>
+          <a:p>
+            <a:endParaRPr lang="ar-SA"/>
+          </a:p>
+        </p:txBody>
       </p:sp>
       <p:pic>
         <p:nvPicPr>
-          <p:cNvPr id="8" name="Image 0" descr="preencoded.png">    </p:cNvPr>
+          <p:cNvPr id="8" name="Image 0" descr="preencoded.png"/>
           <p:cNvPicPr>
             <a:picLocks noChangeAspect="1"/>
           </p:cNvPicPr>
           <p:nvPr/>
         </p:nvPicPr>
         <p:blipFill>
-          <a:blip r:embed="rId1"/>
+          <a:blip r:embed="rId3"/>
           <a:stretch>
             <a:fillRect/>
           </a:stretch>
@@ -10445,7 +11427,7 @@
           <a:bodyPr wrap="square" lIns="0" tIns="0" rIns="0" bIns="0" rtlCol="0" anchor="ctr"/>
           <a:lstStyle/>
           <a:p>
-            <a:pPr indent="0" marL="0">
+            <a:pPr marL="0" indent="0">
               <a:buNone/>
             </a:pPr>
             <a:r>
@@ -10484,7 +11466,7 @@
           <a:bodyPr wrap="square" lIns="0" tIns="0" rIns="0" bIns="0" rtlCol="0" anchor="ctr"/>
           <a:lstStyle/>
           <a:p>
-            <a:pPr indent="0" marL="0">
+            <a:pPr marL="0" indent="0">
               <a:buNone/>
             </a:pPr>
             <a:r>
@@ -10504,14 +11486,14 @@
       </p:sp>
       <p:pic>
         <p:nvPicPr>
-          <p:cNvPr id="11" name="Image 1" descr="preencoded.png">    </p:cNvPr>
+          <p:cNvPr id="11" name="Image 1" descr="preencoded.png"/>
           <p:cNvPicPr>
             <a:picLocks noChangeAspect="1"/>
           </p:cNvPicPr>
           <p:nvPr/>
         </p:nvPicPr>
         <p:blipFill>
-          <a:blip r:embed="rId2"/>
+          <a:blip r:embed="rId4"/>
           <a:stretch>
             <a:fillRect/>
           </a:stretch>
@@ -10552,13 +11534,20 @@
             <a:prstDash val="solid"/>
           </a:ln>
           <a:effectLst>
-            <a:outerShdw sx="100000" sy="100000" kx="0" ky="0" algn="bl" rotWithShape="0" blurRad="101600" dist="25400" dir="5400000">
+            <a:outerShdw blurRad="101600" dist="25400" dir="5400000" algn="bl" rotWithShape="0">
               <a:srgbClr val="000000">
                 <a:alpha val="8000"/>
               </a:srgbClr>
             </a:outerShdw>
           </a:effectLst>
         </p:spPr>
+        <p:txBody>
+          <a:bodyPr/>
+          <a:lstStyle/>
+          <a:p>
+            <a:endParaRPr lang="ar-SA"/>
+          </a:p>
+        </p:txBody>
       </p:sp>
       <p:sp>
         <p:nvSpPr>
@@ -10581,7 +11570,7 @@
           <a:bodyPr wrap="square" lIns="0" tIns="0" rIns="0" bIns="0" rtlCol="0" anchor="ctr"/>
           <a:lstStyle/>
           <a:p>
-            <a:pPr indent="0" marL="0">
+            <a:pPr marL="0" indent="0">
               <a:buNone/>
             </a:pPr>
             <a:r>
@@ -10623,17 +11612,24 @@
             <a:prstDash val="solid"/>
           </a:ln>
         </p:spPr>
+        <p:txBody>
+          <a:bodyPr/>
+          <a:lstStyle/>
+          <a:p>
+            <a:endParaRPr lang="ar-SA"/>
+          </a:p>
+        </p:txBody>
       </p:sp>
       <p:pic>
         <p:nvPicPr>
-          <p:cNvPr id="15" name="Image 2" descr="preencoded.png">    </p:cNvPr>
+          <p:cNvPr id="15" name="Image 2" descr="preencoded.png"/>
           <p:cNvPicPr>
             <a:picLocks noChangeAspect="1"/>
           </p:cNvPicPr>
           <p:nvPr/>
         </p:nvPicPr>
         <p:blipFill>
-          <a:blip r:embed="rId3"/>
+          <a:blip r:embed="rId5"/>
           <a:stretch>
             <a:fillRect/>
           </a:stretch>
@@ -10669,7 +11665,7 @@
           <a:bodyPr wrap="square" lIns="0" tIns="0" rIns="0" bIns="0" rtlCol="0" anchor="ctr"/>
           <a:lstStyle/>
           <a:p>
-            <a:pPr indent="0" marL="0">
+            <a:pPr marL="0" indent="0">
               <a:buNone/>
             </a:pPr>
             <a:r>
@@ -10708,7 +11704,7 @@
           <a:bodyPr wrap="square" lIns="0" tIns="0" rIns="0" bIns="0" rtlCol="0" anchor="ctr"/>
           <a:lstStyle/>
           <a:p>
-            <a:pPr indent="0" marL="0">
+            <a:pPr marL="0" indent="0">
               <a:buNone/>
             </a:pPr>
             <a:r>
@@ -10728,7 +11724,7 @@
       </p:sp>
       <p:pic>
         <p:nvPicPr>
-          <p:cNvPr id="18" name="Image 3" descr="preencoded.png">    </p:cNvPr>
+          <p:cNvPr id="18" name="Image 3" descr="preencoded.png"/>
           <p:cNvPicPr>
             <a:picLocks noChangeAspect="1"/>
           </p:cNvPicPr>
@@ -10776,13 +11772,20 @@
             <a:prstDash val="solid"/>
           </a:ln>
           <a:effectLst>
-            <a:outerShdw sx="100000" sy="100000" kx="0" ky="0" algn="bl" rotWithShape="0" blurRad="101600" dist="25400" dir="5400000">
+            <a:outerShdw blurRad="101600" dist="25400" dir="5400000" algn="bl" rotWithShape="0">
               <a:srgbClr val="000000">
                 <a:alpha val="8000"/>
               </a:srgbClr>
             </a:outerShdw>
           </a:effectLst>
         </p:spPr>
+        <p:txBody>
+          <a:bodyPr/>
+          <a:lstStyle/>
+          <a:p>
+            <a:endParaRPr lang="ar-SA"/>
+          </a:p>
+        </p:txBody>
       </p:sp>
       <p:sp>
         <p:nvSpPr>
@@ -10805,7 +11808,7 @@
           <a:bodyPr wrap="square" lIns="0" tIns="0" rIns="0" bIns="0" rtlCol="0" anchor="ctr"/>
           <a:lstStyle/>
           <a:p>
-            <a:pPr indent="0" marL="0">
+            <a:pPr marL="0" indent="0">
               <a:buNone/>
             </a:pPr>
             <a:r>
@@ -10847,112 +11850,17 @@
             <a:prstDash val="solid"/>
           </a:ln>
         </p:spPr>
+        <p:txBody>
+          <a:bodyPr/>
+          <a:lstStyle/>
+          <a:p>
+            <a:endParaRPr lang="ar-SA"/>
+          </a:p>
+        </p:txBody>
       </p:sp>
       <p:pic>
         <p:nvPicPr>
-          <p:cNvPr id="22" name="Image 4" descr="preencoded.png">    </p:cNvPr>
-          <p:cNvPicPr>
-            <a:picLocks noChangeAspect="1"/>
-          </p:cNvPicPr>
-          <p:nvPr/>
-        </p:nvPicPr>
-        <p:blipFill>
-          <a:blip r:embed="rId5"/>
-          <a:stretch>
-            <a:fillRect/>
-          </a:stretch>
-        </p:blipFill>
-        <p:spPr>
-          <a:xfrm>
-            <a:off x="874166" y="4394606"/>
-            <a:ext cx="263347" cy="263347"/>
-          </a:xfrm>
-          <a:prstGeom prst="rect">
-            <a:avLst/>
-          </a:prstGeom>
-        </p:spPr>
-      </p:pic>
-      <p:sp>
-        <p:nvSpPr>
-          <p:cNvPr id="23" name="Text 16"/>
-          <p:cNvSpPr txBox="1"/>
-          <p:nvPr/>
-        </p:nvSpPr>
-        <p:spPr>
-          <a:xfrm>
-            <a:off x="1463040" y="4114800"/>
-            <a:ext cx="1188720" cy="822960"/>
-          </a:xfrm>
-          <a:prstGeom prst="rect">
-            <a:avLst/>
-          </a:prstGeom>
-          <a:noFill/>
-          <a:ln/>
-        </p:spPr>
-        <p:txBody>
-          <a:bodyPr wrap="square" lIns="0" tIns="0" rIns="0" bIns="0" rtlCol="0" anchor="ctr"/>
-          <a:lstStyle/>
-          <a:p>
-            <a:pPr indent="0" marL="0">
-              <a:buNone/>
-            </a:pPr>
-            <a:r>
-              <a:rPr lang="en-US" sz="1800" b="1" dirty="0">
-                <a:solidFill>
-                  <a:srgbClr val="16302C"/>
-                </a:solidFill>
-                <a:latin typeface="Cambria" pitchFamily="34" charset="0"/>
-                <a:ea typeface="Cambria" pitchFamily="34" charset="-122"/>
-                <a:cs typeface="Cambria" pitchFamily="34" charset="-120"/>
-              </a:rPr>
-              <a:t>House rules</a:t>
-            </a:r>
-            <a:endParaRPr lang="en-US" sz="1800" dirty="0"/>
-          </a:p>
-        </p:txBody>
-      </p:sp>
-      <p:sp>
-        <p:nvSpPr>
-          <p:cNvPr id="24" name="Text 17"/>
-          <p:cNvSpPr txBox="1"/>
-          <p:nvPr/>
-        </p:nvSpPr>
-        <p:spPr>
-          <a:xfrm>
-            <a:off x="2743200" y="4114800"/>
-            <a:ext cx="3383280" cy="822960"/>
-          </a:xfrm>
-          <a:prstGeom prst="rect">
-            <a:avLst/>
-          </a:prstGeom>
-          <a:noFill/>
-          <a:ln/>
-        </p:spPr>
-        <p:txBody>
-          <a:bodyPr wrap="square" lIns="0" tIns="0" rIns="0" bIns="0" rtlCol="0" anchor="ctr"/>
-          <a:lstStyle/>
-          <a:p>
-            <a:pPr indent="0" marL="0">
-              <a:buNone/>
-            </a:pPr>
-            <a:r>
-              <a:rPr lang="en-US" sz="1500" i="1" dirty="0">
-                <a:solidFill>
-                  <a:srgbClr val="4A5C57"/>
-                </a:solidFill>
-                <a:latin typeface="Calibri" pitchFamily="34" charset="0"/>
-                <a:ea typeface="Calibri" pitchFamily="34" charset="-122"/>
-                <a:cs typeface="Calibri" pitchFamily="34" charset="-120"/>
-              </a:rPr>
-              <a:t>Spoken promises</a:t>
-            </a:r>
-            <a:endParaRPr lang="en-US" sz="1500" dirty="0"/>
-          </a:p>
-        </p:txBody>
-      </p:sp>
-      <p:pic>
-        <p:nvPicPr>
-          <p:cNvPr id="25" name="Image 5" descr="preencoded.png">    </p:cNvPr>
+          <p:cNvPr id="22" name="Image 4" descr="preencoded.png"/>
           <p:cNvPicPr>
             <a:picLocks noChangeAspect="1"/>
           </p:cNvPicPr>
@@ -10966,6 +11874,108 @@
         </p:blipFill>
         <p:spPr>
           <a:xfrm>
+            <a:off x="874166" y="4394606"/>
+            <a:ext cx="263347" cy="263347"/>
+          </a:xfrm>
+          <a:prstGeom prst="rect">
+            <a:avLst/>
+          </a:prstGeom>
+        </p:spPr>
+      </p:pic>
+      <p:sp>
+        <p:nvSpPr>
+          <p:cNvPr id="23" name="Text 16"/>
+          <p:cNvSpPr txBox="1"/>
+          <p:nvPr/>
+        </p:nvSpPr>
+        <p:spPr>
+          <a:xfrm>
+            <a:off x="1463040" y="4114800"/>
+            <a:ext cx="1188720" cy="822960"/>
+          </a:xfrm>
+          <a:prstGeom prst="rect">
+            <a:avLst/>
+          </a:prstGeom>
+          <a:noFill/>
+          <a:ln/>
+        </p:spPr>
+        <p:txBody>
+          <a:bodyPr wrap="square" lIns="0" tIns="0" rIns="0" bIns="0" rtlCol="0" anchor="ctr"/>
+          <a:lstStyle/>
+          <a:p>
+            <a:pPr marL="0" indent="0">
+              <a:buNone/>
+            </a:pPr>
+            <a:r>
+              <a:rPr lang="en-US" sz="1800" b="1" dirty="0">
+                <a:solidFill>
+                  <a:srgbClr val="16302C"/>
+                </a:solidFill>
+                <a:latin typeface="Cambria" pitchFamily="34" charset="0"/>
+                <a:ea typeface="Cambria" pitchFamily="34" charset="-122"/>
+                <a:cs typeface="Cambria" pitchFamily="34" charset="-120"/>
+              </a:rPr>
+              <a:t>House rules</a:t>
+            </a:r>
+            <a:endParaRPr lang="en-US" sz="1800" dirty="0"/>
+          </a:p>
+        </p:txBody>
+      </p:sp>
+      <p:sp>
+        <p:nvSpPr>
+          <p:cNvPr id="24" name="Text 17"/>
+          <p:cNvSpPr txBox="1"/>
+          <p:nvPr/>
+        </p:nvSpPr>
+        <p:spPr>
+          <a:xfrm>
+            <a:off x="2743200" y="4114800"/>
+            <a:ext cx="3383280" cy="822960"/>
+          </a:xfrm>
+          <a:prstGeom prst="rect">
+            <a:avLst/>
+          </a:prstGeom>
+          <a:noFill/>
+          <a:ln/>
+        </p:spPr>
+        <p:txBody>
+          <a:bodyPr wrap="square" lIns="0" tIns="0" rIns="0" bIns="0" rtlCol="0" anchor="ctr"/>
+          <a:lstStyle/>
+          <a:p>
+            <a:pPr marL="0" indent="0">
+              <a:buNone/>
+            </a:pPr>
+            <a:r>
+              <a:rPr lang="en-US" sz="1500" i="1" dirty="0">
+                <a:solidFill>
+                  <a:srgbClr val="4A5C57"/>
+                </a:solidFill>
+                <a:latin typeface="Calibri" pitchFamily="34" charset="0"/>
+                <a:ea typeface="Calibri" pitchFamily="34" charset="-122"/>
+                <a:cs typeface="Calibri" pitchFamily="34" charset="-120"/>
+              </a:rPr>
+              <a:t>Spoken promises</a:t>
+            </a:r>
+            <a:endParaRPr lang="en-US" sz="1500" dirty="0"/>
+          </a:p>
+        </p:txBody>
+      </p:sp>
+      <p:pic>
+        <p:nvPicPr>
+          <p:cNvPr id="25" name="Image 5" descr="preencoded.png"/>
+          <p:cNvPicPr>
+            <a:picLocks noChangeAspect="1"/>
+          </p:cNvPicPr>
+          <p:nvPr/>
+        </p:nvPicPr>
+        <p:blipFill>
+          <a:blip r:embed="rId4"/>
+          <a:stretch>
+            <a:fillRect/>
+          </a:stretch>
+        </p:blipFill>
+        <p:spPr>
+          <a:xfrm>
             <a:off x="6355080" y="4361688"/>
             <a:ext cx="329184" cy="329184"/>
           </a:xfrm>
@@ -11000,13 +12010,20 @@
             <a:prstDash val="solid"/>
           </a:ln>
           <a:effectLst>
-            <a:outerShdw sx="100000" sy="100000" kx="0" ky="0" algn="bl" rotWithShape="0" blurRad="101600" dist="25400" dir="5400000">
+            <a:outerShdw blurRad="101600" dist="25400" dir="5400000" algn="bl" rotWithShape="0">
               <a:srgbClr val="000000">
                 <a:alpha val="8000"/>
               </a:srgbClr>
             </a:outerShdw>
           </a:effectLst>
         </p:spPr>
+        <p:txBody>
+          <a:bodyPr/>
+          <a:lstStyle/>
+          <a:p>
+            <a:endParaRPr lang="ar-SA"/>
+          </a:p>
+        </p:txBody>
       </p:sp>
       <p:sp>
         <p:nvSpPr>
@@ -11029,7 +12046,7 @@
           <a:bodyPr wrap="square" lIns="0" tIns="0" rIns="0" bIns="0" rtlCol="0" anchor="ctr"/>
           <a:lstStyle/>
           <a:p>
-            <a:pPr indent="0" marL="0">
+            <a:pPr marL="0" indent="0">
               <a:buNone/>
             </a:pPr>
             <a:r>
@@ -11071,10 +12088,17 @@
             <a:prstDash val="solid"/>
           </a:ln>
         </p:spPr>
+        <p:txBody>
+          <a:bodyPr/>
+          <a:lstStyle/>
+          <a:p>
+            <a:endParaRPr lang="ar-SA"/>
+          </a:p>
+        </p:txBody>
       </p:sp>
       <p:pic>
         <p:nvPicPr>
-          <p:cNvPr id="29" name="Image 6" descr="preencoded.png">    </p:cNvPr>
+          <p:cNvPr id="29" name="Image 6" descr="preencoded.png"/>
           <p:cNvPicPr>
             <a:picLocks noChangeAspect="1"/>
           </p:cNvPicPr>
@@ -11117,7 +12141,7 @@
           <a:bodyPr wrap="square" lIns="0" tIns="0" rIns="0" bIns="0" rtlCol="0" anchor="ctr"/>
           <a:lstStyle/>
           <a:p>
-            <a:pPr indent="0" marL="0">
+            <a:pPr marL="0" indent="0">
               <a:buNone/>
             </a:pPr>
             <a:r>
@@ -11156,7 +12180,7 @@
           <a:bodyPr wrap="square" lIns="0" tIns="0" rIns="0" bIns="0" rtlCol="0" anchor="ctr"/>
           <a:lstStyle/>
           <a:p>
-            <a:pPr indent="0" marL="0">
+            <a:pPr marL="0" indent="0">
               <a:buNone/>
             </a:pPr>
             <a:r>
@@ -11176,7 +12200,195 @@
       </p:sp>
       <p:pic>
         <p:nvPicPr>
-          <p:cNvPr id="32" name="Image 7" descr="preencoded.png">    </p:cNvPr>
+          <p:cNvPr id="32" name="Image 7" descr="preencoded.png"/>
+          <p:cNvPicPr>
+            <a:picLocks noChangeAspect="1"/>
+          </p:cNvPicPr>
+          <p:nvPr/>
+        </p:nvPicPr>
+        <p:blipFill>
+          <a:blip r:embed="rId4"/>
+          <a:stretch>
+            <a:fillRect/>
+          </a:stretch>
+        </p:blipFill>
+        <p:spPr>
+          <a:xfrm>
+            <a:off x="6355080" y="5367528"/>
+            <a:ext cx="329184" cy="329184"/>
+          </a:xfrm>
+          <a:prstGeom prst="rect">
+            <a:avLst/>
+          </a:prstGeom>
+        </p:spPr>
+      </p:pic>
+      <p:sp>
+        <p:nvSpPr>
+          <p:cNvPr id="33" name="Shape 23"/>
+          <p:cNvSpPr/>
+          <p:nvPr/>
+        </p:nvSpPr>
+        <p:spPr>
+          <a:xfrm>
+            <a:off x="6949440" y="5120640"/>
+            <a:ext cx="4507992" cy="822960"/>
+          </a:xfrm>
+          <a:prstGeom prst="roundRect">
+            <a:avLst>
+              <a:gd name="adj" fmla="val 11111"/>
+            </a:avLst>
+          </a:prstGeom>
+          <a:solidFill>
+            <a:srgbClr val="FFFFFF"/>
+          </a:solidFill>
+          <a:ln w="9525">
+            <a:solidFill>
+              <a:srgbClr val="D9CFC0"/>
+            </a:solidFill>
+            <a:prstDash val="solid"/>
+          </a:ln>
+          <a:effectLst>
+            <a:outerShdw blurRad="101600" dist="25400" dir="5400000" algn="bl" rotWithShape="0">
+              <a:srgbClr val="000000">
+                <a:alpha val="8000"/>
+              </a:srgbClr>
+            </a:outerShdw>
+          </a:effectLst>
+        </p:spPr>
+        <p:txBody>
+          <a:bodyPr/>
+          <a:lstStyle/>
+          <a:p>
+            <a:endParaRPr lang="ar-SA"/>
+          </a:p>
+        </p:txBody>
+      </p:sp>
+      <p:sp>
+        <p:nvSpPr>
+          <p:cNvPr id="34" name="Text 24"/>
+          <p:cNvSpPr txBox="1"/>
+          <p:nvPr/>
+        </p:nvSpPr>
+        <p:spPr>
+          <a:xfrm>
+            <a:off x="7178040" y="5120640"/>
+            <a:ext cx="4069080" cy="822960"/>
+          </a:xfrm>
+          <a:prstGeom prst="rect">
+            <a:avLst/>
+          </a:prstGeom>
+          <a:noFill/>
+          <a:ln/>
+        </p:spPr>
+        <p:txBody>
+          <a:bodyPr wrap="square" lIns="0" tIns="0" rIns="0" bIns="0" rtlCol="0" anchor="ctr"/>
+          <a:lstStyle/>
+          <a:p>
+            <a:pPr marL="0" indent="0">
+              <a:buNone/>
+            </a:pPr>
+            <a:r>
+              <a:rPr lang="en-US" sz="1500" dirty="0">
+                <a:solidFill>
+                  <a:srgbClr val="16302C"/>
+                </a:solidFill>
+                <a:latin typeface="Calibri" pitchFamily="34" charset="0"/>
+                <a:ea typeface="Calibri" pitchFamily="34" charset="-122"/>
+                <a:cs typeface="Calibri" pitchFamily="34" charset="-120"/>
+              </a:rPr>
+              <a:t>Admin-verified accounts, reviews after every agreement, and reports</a:t>
+            </a:r>
+            <a:endParaRPr lang="en-US" sz="1500" dirty="0"/>
+          </a:p>
+        </p:txBody>
+      </p:sp>
+      <p:sp>
+        <p:nvSpPr>
+          <p:cNvPr id="35" name="Text 25"/>
+          <p:cNvSpPr txBox="1"/>
+          <p:nvPr/>
+        </p:nvSpPr>
+        <p:spPr>
+          <a:xfrm>
+            <a:off x="731520" y="6355080"/>
+            <a:ext cx="3108960" cy="274320"/>
+          </a:xfrm>
+          <a:prstGeom prst="rect">
+            <a:avLst/>
+          </a:prstGeom>
+          <a:noFill/>
+          <a:ln/>
+        </p:spPr>
+        <p:txBody>
+          <a:bodyPr wrap="square" lIns="0" tIns="0" rIns="0" bIns="0" rtlCol="0" anchor="ctr"/>
+          <a:lstStyle/>
+          <a:p>
+            <a:pPr marL="0" indent="0">
+              <a:buNone/>
+            </a:pPr>
+            <a:r>
+              <a:rPr lang="en-US" sz="1000" dirty="0">
+                <a:solidFill>
+                  <a:srgbClr val="4A5C57"/>
+                </a:solidFill>
+                <a:latin typeface="Calibri" pitchFamily="34" charset="0"/>
+                <a:ea typeface="Calibri" pitchFamily="34" charset="-122"/>
+                <a:cs typeface="Calibri" pitchFamily="34" charset="-120"/>
+              </a:rPr>
+              <a:t>Rifqa  ·  Spring Boot Capstone 2</a:t>
+            </a:r>
+            <a:endParaRPr lang="en-US" sz="1000" dirty="0"/>
+          </a:p>
+        </p:txBody>
+      </p:sp>
+      <p:sp>
+        <p:nvSpPr>
+          <p:cNvPr id="36" name="Text 26"/>
+          <p:cNvSpPr txBox="1"/>
+          <p:nvPr/>
+        </p:nvSpPr>
+        <p:spPr>
+          <a:xfrm>
+            <a:off x="10085832" y="6355080"/>
+            <a:ext cx="1371600" cy="274320"/>
+          </a:xfrm>
+          <a:prstGeom prst="rect">
+            <a:avLst/>
+          </a:prstGeom>
+          <a:noFill/>
+          <a:ln/>
+        </p:spPr>
+        <p:txBody>
+          <a:bodyPr wrap="square" lIns="0" tIns="0" rIns="0" bIns="0" rtlCol="0" anchor="ctr"/>
+          <a:lstStyle/>
+          <a:p>
+            <a:pPr marL="0" indent="0" algn="r">
+              <a:buNone/>
+            </a:pPr>
+            <a:r>
+              <a:rPr lang="en-US" sz="1000" dirty="0">
+                <a:solidFill>
+                  <a:srgbClr val="4A5C57"/>
+                </a:solidFill>
+                <a:latin typeface="Calibri" pitchFamily="34" charset="0"/>
+                <a:ea typeface="Calibri" pitchFamily="34" charset="-122"/>
+                <a:cs typeface="Calibri" pitchFamily="34" charset="-120"/>
+              </a:rPr>
+              <a:t>4 / 13</a:t>
+            </a:r>
+            <a:endParaRPr lang="en-US" sz="1000" dirty="0"/>
+          </a:p>
+        </p:txBody>
+      </p:sp>
+      <p:pic>
+        <p:nvPicPr>
+          <p:cNvPr id="38" name="Picture 37">
+            <a:extLst>
+              <a:ext uri="{FF2B5EF4-FFF2-40B4-BE49-F238E27FC236}">
+                <a16:creationId xmlns:a16="http://schemas.microsoft.com/office/drawing/2014/main" id="{FF9DDF3C-1C86-BB62-4461-875F274C714A}"/>
+              </a:ext>
+            </a:extLst>
+          </p:cNvPr>
           <p:cNvPicPr>
             <a:picLocks noChangeAspect="1"/>
           </p:cNvPicPr>
@@ -11190,165 +12402,14 @@
         </p:blipFill>
         <p:spPr>
           <a:xfrm>
-            <a:off x="6355080" y="5367528"/>
-            <a:ext cx="329184" cy="329184"/>
+            <a:off x="8827008" y="-128064"/>
+            <a:ext cx="3361944" cy="1451589"/>
           </a:xfrm>
           <a:prstGeom prst="rect">
             <a:avLst/>
           </a:prstGeom>
         </p:spPr>
       </p:pic>
-      <p:sp>
-        <p:nvSpPr>
-          <p:cNvPr id="33" name="Shape 23"/>
-          <p:cNvSpPr/>
-          <p:nvPr/>
-        </p:nvSpPr>
-        <p:spPr>
-          <a:xfrm>
-            <a:off x="6949440" y="5120640"/>
-            <a:ext cx="4507992" cy="822960"/>
-          </a:xfrm>
-          <a:prstGeom prst="roundRect">
-            <a:avLst>
-              <a:gd name="adj" fmla="val 11111"/>
-            </a:avLst>
-          </a:prstGeom>
-          <a:solidFill>
-            <a:srgbClr val="FFFFFF"/>
-          </a:solidFill>
-          <a:ln w="9525">
-            <a:solidFill>
-              <a:srgbClr val="D9CFC0"/>
-            </a:solidFill>
-            <a:prstDash val="solid"/>
-          </a:ln>
-          <a:effectLst>
-            <a:outerShdw sx="100000" sy="100000" kx="0" ky="0" algn="bl" rotWithShape="0" blurRad="101600" dist="25400" dir="5400000">
-              <a:srgbClr val="000000">
-                <a:alpha val="8000"/>
-              </a:srgbClr>
-            </a:outerShdw>
-          </a:effectLst>
-        </p:spPr>
-      </p:sp>
-      <p:sp>
-        <p:nvSpPr>
-          <p:cNvPr id="34" name="Text 24"/>
-          <p:cNvSpPr txBox="1"/>
-          <p:nvPr/>
-        </p:nvSpPr>
-        <p:spPr>
-          <a:xfrm>
-            <a:off x="7178040" y="5120640"/>
-            <a:ext cx="4069080" cy="822960"/>
-          </a:xfrm>
-          <a:prstGeom prst="rect">
-            <a:avLst/>
-          </a:prstGeom>
-          <a:noFill/>
-          <a:ln/>
-        </p:spPr>
-        <p:txBody>
-          <a:bodyPr wrap="square" lIns="0" tIns="0" rIns="0" bIns="0" rtlCol="0" anchor="ctr"/>
-          <a:lstStyle/>
-          <a:p>
-            <a:pPr indent="0" marL="0">
-              <a:buNone/>
-            </a:pPr>
-            <a:r>
-              <a:rPr lang="en-US" sz="1500" dirty="0">
-                <a:solidFill>
-                  <a:srgbClr val="16302C"/>
-                </a:solidFill>
-                <a:latin typeface="Calibri" pitchFamily="34" charset="0"/>
-                <a:ea typeface="Calibri" pitchFamily="34" charset="-122"/>
-                <a:cs typeface="Calibri" pitchFamily="34" charset="-120"/>
-              </a:rPr>
-              <a:t>Admin-verified accounts, reviews after every agreement, and reports</a:t>
-            </a:r>
-            <a:endParaRPr lang="en-US" sz="1500" dirty="0"/>
-          </a:p>
-        </p:txBody>
-      </p:sp>
-      <p:sp>
-        <p:nvSpPr>
-          <p:cNvPr id="35" name="Text 25"/>
-          <p:cNvSpPr txBox="1"/>
-          <p:nvPr/>
-        </p:nvSpPr>
-        <p:spPr>
-          <a:xfrm>
-            <a:off x="731520" y="6355080"/>
-            <a:ext cx="3108960" cy="274320"/>
-          </a:xfrm>
-          <a:prstGeom prst="rect">
-            <a:avLst/>
-          </a:prstGeom>
-          <a:noFill/>
-          <a:ln/>
-        </p:spPr>
-        <p:txBody>
-          <a:bodyPr wrap="square" lIns="0" tIns="0" rIns="0" bIns="0" rtlCol="0" anchor="ctr"/>
-          <a:lstStyle/>
-          <a:p>
-            <a:pPr indent="0" marL="0">
-              <a:buNone/>
-            </a:pPr>
-            <a:r>
-              <a:rPr lang="en-US" sz="1000" dirty="0">
-                <a:solidFill>
-                  <a:srgbClr val="4A5C57"/>
-                </a:solidFill>
-                <a:latin typeface="Calibri" pitchFamily="34" charset="0"/>
-                <a:ea typeface="Calibri" pitchFamily="34" charset="-122"/>
-                <a:cs typeface="Calibri" pitchFamily="34" charset="-120"/>
-              </a:rPr>
-              <a:t>Rifqa  ·  Spring Boot Capstone 2</a:t>
-            </a:r>
-            <a:endParaRPr lang="en-US" sz="1000" dirty="0"/>
-          </a:p>
-        </p:txBody>
-      </p:sp>
-      <p:sp>
-        <p:nvSpPr>
-          <p:cNvPr id="36" name="Text 26"/>
-          <p:cNvSpPr txBox="1"/>
-          <p:nvPr/>
-        </p:nvSpPr>
-        <p:spPr>
-          <a:xfrm>
-            <a:off x="10085832" y="6355080"/>
-            <a:ext cx="1371600" cy="274320"/>
-          </a:xfrm>
-          <a:prstGeom prst="rect">
-            <a:avLst/>
-          </a:prstGeom>
-          <a:noFill/>
-          <a:ln/>
-        </p:spPr>
-        <p:txBody>
-          <a:bodyPr wrap="square" lIns="0" tIns="0" rIns="0" bIns="0" rtlCol="0" anchor="ctr"/>
-          <a:lstStyle/>
-          <a:p>
-            <a:pPr algn="r" indent="0" marL="0">
-              <a:buNone/>
-            </a:pPr>
-            <a:r>
-              <a:rPr lang="en-US" sz="1000" dirty="0">
-                <a:solidFill>
-                  <a:srgbClr val="4A5C57"/>
-                </a:solidFill>
-                <a:latin typeface="Calibri" pitchFamily="34" charset="0"/>
-                <a:ea typeface="Calibri" pitchFamily="34" charset="-122"/>
-                <a:cs typeface="Calibri" pitchFamily="34" charset="-120"/>
-              </a:rPr>
-              <a:t>4 / 13</a:t>
-            </a:r>
-            <a:endParaRPr lang="en-US" sz="1000" dirty="0"/>
-          </a:p>
-        </p:txBody>
-      </p:sp>
     </p:spTree>
   </p:cSld>
   <p:clrMapOvr>
@@ -11365,6 +12426,7 @@
         <a:solidFill>
           <a:srgbClr val="F3ECE1"/>
         </a:solidFill>
+        <a:effectLst/>
       </p:bgPr>
     </p:bg>
     <p:spTree>
@@ -11405,6 +12467,13 @@
             <a:prstDash val="solid"/>
           </a:ln>
         </p:spPr>
+        <p:txBody>
+          <a:bodyPr/>
+          <a:lstStyle/>
+          <a:p>
+            <a:endParaRPr lang="ar-SA"/>
+          </a:p>
+        </p:txBody>
       </p:sp>
       <p:sp>
         <p:nvSpPr>
@@ -11427,11 +12496,11 @@
           <a:bodyPr wrap="square" lIns="0" tIns="0" rIns="0" bIns="0" rtlCol="0" anchor="ctr"/>
           <a:lstStyle/>
           <a:p>
-            <a:pPr indent="0" marL="0">
-              <a:buNone/>
-            </a:pPr>
-            <a:r>
-              <a:rPr lang="en-US" sz="1200" b="1" spc="400" kern="0" dirty="0">
+            <a:pPr marL="0" indent="0">
+              <a:buNone/>
+            </a:pPr>
+            <a:r>
+              <a:rPr lang="en-US" sz="1200" b="1" kern="0" spc="400" dirty="0">
                 <a:solidFill>
                   <a:srgbClr val="4A5C57"/>
                 </a:solidFill>
@@ -11466,7 +12535,7 @@
           <a:bodyPr wrap="square" lIns="0" tIns="0" rIns="0" bIns="0" rtlCol="0" anchor="ctr"/>
           <a:lstStyle/>
           <a:p>
-            <a:pPr indent="0" marL="0">
+            <a:pPr marL="0" indent="0">
               <a:buNone/>
             </a:pPr>
             <a:r>
@@ -11510,13 +12579,20 @@
             <a:prstDash val="solid"/>
           </a:ln>
           <a:effectLst>
-            <a:outerShdw sx="100000" sy="100000" kx="0" ky="0" algn="bl" rotWithShape="0" blurRad="101600" dist="25400" dir="5400000">
+            <a:outerShdw blurRad="101600" dist="25400" dir="5400000" algn="bl" rotWithShape="0">
               <a:srgbClr val="000000">
                 <a:alpha val="8000"/>
               </a:srgbClr>
             </a:outerShdw>
           </a:effectLst>
         </p:spPr>
+        <p:txBody>
+          <a:bodyPr/>
+          <a:lstStyle/>
+          <a:p>
+            <a:endParaRPr lang="ar-SA"/>
+          </a:p>
+        </p:txBody>
       </p:sp>
       <p:sp>
         <p:nvSpPr>
@@ -11542,17 +12618,24 @@
             <a:prstDash val="solid"/>
           </a:ln>
         </p:spPr>
+        <p:txBody>
+          <a:bodyPr/>
+          <a:lstStyle/>
+          <a:p>
+            <a:endParaRPr lang="ar-SA"/>
+          </a:p>
+        </p:txBody>
       </p:sp>
       <p:pic>
         <p:nvPicPr>
-          <p:cNvPr id="7" name="Image 0" descr="preencoded.png">    </p:cNvPr>
+          <p:cNvPr id="7" name="Image 0" descr="preencoded.png"/>
           <p:cNvPicPr>
             <a:picLocks noChangeAspect="1"/>
           </p:cNvPicPr>
           <p:nvPr/>
         </p:nvPicPr>
         <p:blipFill>
-          <a:blip r:embed="rId1"/>
+          <a:blip r:embed="rId3"/>
           <a:stretch>
             <a:fillRect/>
           </a:stretch>
@@ -11588,7 +12671,7 @@
           <a:bodyPr wrap="square" lIns="0" tIns="0" rIns="0" bIns="0" rtlCol="0" anchor="ctr"/>
           <a:lstStyle/>
           <a:p>
-            <a:pPr indent="0" marL="0">
+            <a:pPr marL="0" indent="0">
               <a:buNone/>
             </a:pPr>
             <a:r>
@@ -11627,7 +12710,7 @@
           <a:bodyPr wrap="square" lIns="0" tIns="0" rIns="0" bIns="0" rtlCol="0" anchor="ctr"/>
           <a:lstStyle/>
           <a:p>
-            <a:pPr indent="0" marL="0">
+            <a:pPr marL="0" indent="0">
               <a:buNone/>
             </a:pPr>
             <a:r>
@@ -11666,7 +12749,7 @@
           <a:bodyPr wrap="square" lIns="0" tIns="0" rIns="0" bIns="0" rtlCol="0" anchor="ctr"/>
           <a:lstStyle/>
           <a:p>
-            <a:pPr indent="0" marL="0">
+            <a:pPr marL="0" indent="0">
               <a:buNone/>
             </a:pPr>
             <a:r>
@@ -11705,7 +12788,7 @@
           <a:bodyPr wrap="square" lIns="0" tIns="0" rIns="0" bIns="0" rtlCol="0" anchor="ctr"/>
           <a:lstStyle/>
           <a:p>
-            <a:pPr indent="0" marL="0">
+            <a:pPr marL="0" indent="0">
               <a:buNone/>
             </a:pPr>
             <a:r>
@@ -11744,7 +12827,7 @@
           <a:bodyPr wrap="square" lIns="0" tIns="0" rIns="0" bIns="0" rtlCol="0" anchor="ctr"/>
           <a:lstStyle/>
           <a:p>
-            <a:pPr indent="0" marL="0">
+            <a:pPr marL="0" indent="0">
               <a:buNone/>
             </a:pPr>
             <a:r>
@@ -11783,7 +12866,7 @@
           <a:bodyPr wrap="square" lIns="0" tIns="0" rIns="0" bIns="0" rtlCol="0" anchor="ctr"/>
           <a:lstStyle/>
           <a:p>
-            <a:pPr indent="0" marL="0">
+            <a:pPr marL="0" indent="0">
               <a:buNone/>
             </a:pPr>
             <a:r>
@@ -11822,7 +12905,7 @@
           <a:bodyPr wrap="square" lIns="0" tIns="0" rIns="0" bIns="0" rtlCol="0" anchor="ctr"/>
           <a:lstStyle/>
           <a:p>
-            <a:pPr indent="0" marL="0">
+            <a:pPr marL="0" indent="0">
               <a:buNone/>
             </a:pPr>
             <a:r>
@@ -11866,13 +12949,20 @@
             <a:prstDash val="solid"/>
           </a:ln>
           <a:effectLst>
-            <a:outerShdw sx="100000" sy="100000" kx="0" ky="0" algn="bl" rotWithShape="0" blurRad="101600" dist="25400" dir="5400000">
+            <a:outerShdw blurRad="101600" dist="25400" dir="5400000" algn="bl" rotWithShape="0">
               <a:srgbClr val="000000">
                 <a:alpha val="8000"/>
               </a:srgbClr>
             </a:outerShdw>
           </a:effectLst>
         </p:spPr>
+        <p:txBody>
+          <a:bodyPr/>
+          <a:lstStyle/>
+          <a:p>
+            <a:endParaRPr lang="ar-SA"/>
+          </a:p>
+        </p:txBody>
       </p:sp>
       <p:sp>
         <p:nvSpPr>
@@ -11898,17 +12988,24 @@
             <a:prstDash val="solid"/>
           </a:ln>
         </p:spPr>
+        <p:txBody>
+          <a:bodyPr/>
+          <a:lstStyle/>
+          <a:p>
+            <a:endParaRPr lang="ar-SA"/>
+          </a:p>
+        </p:txBody>
       </p:sp>
       <p:pic>
         <p:nvPicPr>
-          <p:cNvPr id="17" name="Image 1" descr="preencoded.png">    </p:cNvPr>
+          <p:cNvPr id="17" name="Image 1" descr="preencoded.png"/>
           <p:cNvPicPr>
             <a:picLocks noChangeAspect="1"/>
           </p:cNvPicPr>
           <p:nvPr/>
         </p:nvPicPr>
         <p:blipFill>
-          <a:blip r:embed="rId2"/>
+          <a:blip r:embed="rId4"/>
           <a:stretch>
             <a:fillRect/>
           </a:stretch>
@@ -11944,7 +13041,7 @@
           <a:bodyPr wrap="square" lIns="0" tIns="0" rIns="0" bIns="0" rtlCol="0" anchor="ctr"/>
           <a:lstStyle/>
           <a:p>
-            <a:pPr indent="0" marL="0">
+            <a:pPr marL="0" indent="0">
               <a:buNone/>
             </a:pPr>
             <a:r>
@@ -11983,7 +13080,7 @@
           <a:bodyPr wrap="square" lIns="0" tIns="0" rIns="0" bIns="0" rtlCol="0" anchor="ctr"/>
           <a:lstStyle/>
           <a:p>
-            <a:pPr indent="0" marL="0">
+            <a:pPr marL="0" indent="0">
               <a:buNone/>
             </a:pPr>
             <a:r>
@@ -12022,7 +13119,7 @@
           <a:bodyPr wrap="square" lIns="0" tIns="0" rIns="0" bIns="0" rtlCol="0" anchor="ctr"/>
           <a:lstStyle/>
           <a:p>
-            <a:pPr indent="0" marL="0">
+            <a:pPr marL="0" indent="0">
               <a:buNone/>
             </a:pPr>
             <a:r>
@@ -12061,7 +13158,7 @@
           <a:bodyPr wrap="square" lIns="0" tIns="0" rIns="0" bIns="0" rtlCol="0" anchor="ctr"/>
           <a:lstStyle/>
           <a:p>
-            <a:pPr indent="0" marL="0">
+            <a:pPr marL="0" indent="0">
               <a:buNone/>
             </a:pPr>
             <a:r>
@@ -12100,7 +13197,7 @@
           <a:bodyPr wrap="square" lIns="0" tIns="0" rIns="0" bIns="0" rtlCol="0" anchor="ctr"/>
           <a:lstStyle/>
           <a:p>
-            <a:pPr indent="0" marL="0">
+            <a:pPr marL="0" indent="0">
               <a:buNone/>
             </a:pPr>
             <a:r>
@@ -12139,7 +13236,7 @@
           <a:bodyPr wrap="square" lIns="0" tIns="0" rIns="0" bIns="0" rtlCol="0" anchor="ctr"/>
           <a:lstStyle/>
           <a:p>
-            <a:pPr indent="0" marL="0">
+            <a:pPr marL="0" indent="0">
               <a:buNone/>
             </a:pPr>
             <a:r>
@@ -12178,7 +13275,7 @@
           <a:bodyPr wrap="square" lIns="0" tIns="0" rIns="0" bIns="0" rtlCol="0" anchor="ctr"/>
           <a:lstStyle/>
           <a:p>
-            <a:pPr indent="0" marL="0">
+            <a:pPr marL="0" indent="0">
               <a:buNone/>
             </a:pPr>
             <a:r>
@@ -12222,13 +13319,20 @@
             <a:prstDash val="solid"/>
           </a:ln>
           <a:effectLst>
-            <a:outerShdw sx="100000" sy="100000" kx="0" ky="0" algn="bl" rotWithShape="0" blurRad="101600" dist="25400" dir="5400000">
+            <a:outerShdw blurRad="101600" dist="25400" dir="5400000" algn="bl" rotWithShape="0">
               <a:srgbClr val="000000">
                 <a:alpha val="8000"/>
               </a:srgbClr>
             </a:outerShdw>
           </a:effectLst>
         </p:spPr>
+        <p:txBody>
+          <a:bodyPr/>
+          <a:lstStyle/>
+          <a:p>
+            <a:endParaRPr lang="ar-SA"/>
+          </a:p>
+        </p:txBody>
       </p:sp>
       <p:sp>
         <p:nvSpPr>
@@ -12254,17 +13358,24 @@
             <a:prstDash val="solid"/>
           </a:ln>
         </p:spPr>
+        <p:txBody>
+          <a:bodyPr/>
+          <a:lstStyle/>
+          <a:p>
+            <a:endParaRPr lang="ar-SA"/>
+          </a:p>
+        </p:txBody>
       </p:sp>
       <p:pic>
         <p:nvPicPr>
-          <p:cNvPr id="27" name="Image 2" descr="preencoded.png">    </p:cNvPr>
+          <p:cNvPr id="27" name="Image 2" descr="preencoded.png"/>
           <p:cNvPicPr>
             <a:picLocks noChangeAspect="1"/>
           </p:cNvPicPr>
           <p:nvPr/>
         </p:nvPicPr>
         <p:blipFill>
-          <a:blip r:embed="rId3"/>
+          <a:blip r:embed="rId5"/>
           <a:stretch>
             <a:fillRect/>
           </a:stretch>
@@ -12300,7 +13411,7 @@
           <a:bodyPr wrap="square" lIns="0" tIns="0" rIns="0" bIns="0" rtlCol="0" anchor="ctr"/>
           <a:lstStyle/>
           <a:p>
-            <a:pPr indent="0" marL="0">
+            <a:pPr marL="0" indent="0">
               <a:buNone/>
             </a:pPr>
             <a:r>
@@ -12339,7 +13450,7 @@
           <a:bodyPr wrap="square" lIns="0" tIns="0" rIns="0" bIns="0" rtlCol="0" anchor="ctr"/>
           <a:lstStyle/>
           <a:p>
-            <a:pPr indent="0" marL="0">
+            <a:pPr marL="0" indent="0">
               <a:buNone/>
             </a:pPr>
             <a:r>
@@ -12378,7 +13489,7 @@
           <a:bodyPr wrap="square" lIns="0" tIns="0" rIns="0" bIns="0" rtlCol="0" anchor="ctr"/>
           <a:lstStyle/>
           <a:p>
-            <a:pPr indent="0" marL="0">
+            <a:pPr marL="0" indent="0">
               <a:buNone/>
             </a:pPr>
             <a:r>
@@ -12417,7 +13528,7 @@
           <a:bodyPr wrap="square" lIns="0" tIns="0" rIns="0" bIns="0" rtlCol="0" anchor="ctr"/>
           <a:lstStyle/>
           <a:p>
-            <a:pPr indent="0" marL="0">
+            <a:pPr marL="0" indent="0">
               <a:buNone/>
             </a:pPr>
             <a:r>
@@ -12456,7 +13567,7 @@
           <a:bodyPr wrap="square" lIns="0" tIns="0" rIns="0" bIns="0" rtlCol="0" anchor="ctr"/>
           <a:lstStyle/>
           <a:p>
-            <a:pPr indent="0" marL="0">
+            <a:pPr marL="0" indent="0">
               <a:buNone/>
             </a:pPr>
             <a:r>
@@ -12495,7 +13606,7 @@
           <a:bodyPr wrap="square" lIns="0" tIns="0" rIns="0" bIns="0" rtlCol="0" anchor="ctr"/>
           <a:lstStyle/>
           <a:p>
-            <a:pPr indent="0" marL="0">
+            <a:pPr marL="0" indent="0">
               <a:buNone/>
             </a:pPr>
             <a:r>
@@ -12534,7 +13645,7 @@
           <a:bodyPr wrap="square" lIns="0" tIns="0" rIns="0" bIns="0" rtlCol="0" anchor="ctr"/>
           <a:lstStyle/>
           <a:p>
-            <a:pPr indent="0" marL="0">
+            <a:pPr marL="0" indent="0">
               <a:buNone/>
             </a:pPr>
             <a:r>
@@ -12578,13 +13689,20 @@
             <a:prstDash val="solid"/>
           </a:ln>
           <a:effectLst>
-            <a:outerShdw sx="100000" sy="100000" kx="0" ky="0" algn="bl" rotWithShape="0" blurRad="101600" dist="25400" dir="5400000">
+            <a:outerShdw blurRad="101600" dist="25400" dir="5400000" algn="bl" rotWithShape="0">
               <a:srgbClr val="000000">
                 <a:alpha val="8000"/>
               </a:srgbClr>
             </a:outerShdw>
           </a:effectLst>
         </p:spPr>
+        <p:txBody>
+          <a:bodyPr/>
+          <a:lstStyle/>
+          <a:p>
+            <a:endParaRPr lang="ar-SA"/>
+          </a:p>
+        </p:txBody>
       </p:sp>
       <p:sp>
         <p:nvSpPr>
@@ -12610,17 +13728,24 @@
             <a:prstDash val="solid"/>
           </a:ln>
         </p:spPr>
+        <p:txBody>
+          <a:bodyPr/>
+          <a:lstStyle/>
+          <a:p>
+            <a:endParaRPr lang="ar-SA"/>
+          </a:p>
+        </p:txBody>
       </p:sp>
       <p:pic>
         <p:nvPicPr>
-          <p:cNvPr id="37" name="Image 3" descr="preencoded.png">    </p:cNvPr>
+          <p:cNvPr id="37" name="Image 3" descr="preencoded.png"/>
           <p:cNvPicPr>
             <a:picLocks noChangeAspect="1"/>
           </p:cNvPicPr>
           <p:nvPr/>
         </p:nvPicPr>
         <p:blipFill>
-          <a:blip r:embed="rId4"/>
+          <a:blip r:embed="rId6"/>
           <a:stretch>
             <a:fillRect/>
           </a:stretch>
@@ -12656,7 +13781,7 @@
           <a:bodyPr wrap="square" lIns="0" tIns="0" rIns="0" bIns="0" rtlCol="0" anchor="ctr"/>
           <a:lstStyle/>
           <a:p>
-            <a:pPr indent="0" marL="0">
+            <a:pPr marL="0" indent="0">
               <a:buNone/>
             </a:pPr>
             <a:r>
@@ -12695,7 +13820,7 @@
           <a:bodyPr wrap="square" lIns="0" tIns="0" rIns="0" bIns="0" rtlCol="0" anchor="ctr"/>
           <a:lstStyle/>
           <a:p>
-            <a:pPr indent="0" marL="0">
+            <a:pPr marL="0" indent="0">
               <a:buNone/>
             </a:pPr>
             <a:r>
@@ -12734,7 +13859,7 @@
           <a:bodyPr wrap="square" lIns="0" tIns="0" rIns="0" bIns="0" rtlCol="0" anchor="ctr"/>
           <a:lstStyle/>
           <a:p>
-            <a:pPr indent="0" marL="0">
+            <a:pPr marL="0" indent="0">
               <a:buNone/>
             </a:pPr>
             <a:r>
@@ -12773,7 +13898,7 @@
           <a:bodyPr wrap="square" lIns="0" tIns="0" rIns="0" bIns="0" rtlCol="0" anchor="ctr"/>
           <a:lstStyle/>
           <a:p>
-            <a:pPr indent="0" marL="0">
+            <a:pPr marL="0" indent="0">
               <a:buNone/>
             </a:pPr>
             <a:r>
@@ -12812,7 +13937,7 @@
           <a:bodyPr wrap="square" lIns="0" tIns="0" rIns="0" bIns="0" rtlCol="0" anchor="ctr"/>
           <a:lstStyle/>
           <a:p>
-            <a:pPr indent="0" marL="0">
+            <a:pPr marL="0" indent="0">
               <a:buNone/>
             </a:pPr>
             <a:r>
@@ -12851,7 +13976,7 @@
           <a:bodyPr wrap="square" lIns="0" tIns="0" rIns="0" bIns="0" rtlCol="0" anchor="ctr"/>
           <a:lstStyle/>
           <a:p>
-            <a:pPr indent="0" marL="0">
+            <a:pPr marL="0" indent="0">
               <a:buNone/>
             </a:pPr>
             <a:r>
@@ -12890,7 +14015,7 @@
           <a:bodyPr wrap="square" lIns="0" tIns="0" rIns="0" bIns="0" rtlCol="0" anchor="ctr"/>
           <a:lstStyle/>
           <a:p>
-            <a:pPr algn="r" indent="0" marL="0">
+            <a:pPr marL="0" indent="0" algn="r">
               <a:buNone/>
             </a:pPr>
             <a:r>
@@ -12908,6 +14033,36 @@
           </a:p>
         </p:txBody>
       </p:sp>
+      <p:pic>
+        <p:nvPicPr>
+          <p:cNvPr id="46" name="Picture 45">
+            <a:extLst>
+              <a:ext uri="{FF2B5EF4-FFF2-40B4-BE49-F238E27FC236}">
+                <a16:creationId xmlns:a16="http://schemas.microsoft.com/office/drawing/2014/main" id="{8FDCD763-E16B-1788-4BE5-D69FA1D24F36}"/>
+              </a:ext>
+            </a:extLst>
+          </p:cNvPr>
+          <p:cNvPicPr>
+            <a:picLocks noChangeAspect="1"/>
+          </p:cNvPicPr>
+          <p:nvPr/>
+        </p:nvPicPr>
+        <p:blipFill>
+          <a:blip r:embed="rId7"/>
+          <a:stretch>
+            <a:fillRect/>
+          </a:stretch>
+        </p:blipFill>
+        <p:spPr>
+          <a:xfrm>
+            <a:off x="8827008" y="-128064"/>
+            <a:ext cx="3361944" cy="1451589"/>
+          </a:xfrm>
+          <a:prstGeom prst="rect">
+            <a:avLst/>
+          </a:prstGeom>
+        </p:spPr>
+      </p:pic>
     </p:spTree>
   </p:cSld>
   <p:clrMapOvr>
@@ -12924,6 +14079,7 @@
         <a:solidFill>
           <a:srgbClr val="F3ECE1"/>
         </a:solidFill>
+        <a:effectLst/>
       </p:bgPr>
     </p:bg>
     <p:spTree>
@@ -12964,6 +14120,13 @@
             <a:prstDash val="solid"/>
           </a:ln>
         </p:spPr>
+        <p:txBody>
+          <a:bodyPr/>
+          <a:lstStyle/>
+          <a:p>
+            <a:endParaRPr lang="ar-SA"/>
+          </a:p>
+        </p:txBody>
       </p:sp>
       <p:sp>
         <p:nvSpPr>
@@ -12989,6 +14152,13 @@
             <a:prstDash val="solid"/>
           </a:ln>
         </p:spPr>
+        <p:txBody>
+          <a:bodyPr/>
+          <a:lstStyle/>
+          <a:p>
+            <a:endParaRPr lang="ar-SA"/>
+          </a:p>
+        </p:txBody>
       </p:sp>
       <p:sp>
         <p:nvSpPr>
@@ -13011,11 +14181,11 @@
           <a:bodyPr wrap="square" lIns="0" tIns="0" rIns="0" bIns="0" rtlCol="0" anchor="ctr"/>
           <a:lstStyle/>
           <a:p>
-            <a:pPr indent="0" marL="0">
-              <a:buNone/>
-            </a:pPr>
-            <a:r>
-              <a:rPr lang="en-US" sz="1200" b="1" spc="400" kern="0" dirty="0">
+            <a:pPr marL="0" indent="0">
+              <a:buNone/>
+            </a:pPr>
+            <a:r>
+              <a:rPr lang="en-US" sz="1200" b="1" kern="0" spc="400" dirty="0">
                 <a:solidFill>
                   <a:srgbClr val="EDB897"/>
                 </a:solidFill>
@@ -13050,7 +14220,7 @@
           <a:bodyPr wrap="square" lIns="0" tIns="0" rIns="0" bIns="0" rtlCol="0" anchor="ctr"/>
           <a:lstStyle/>
           <a:p>
-            <a:pPr indent="0" marL="0">
+            <a:pPr marL="0" indent="0">
               <a:buNone/>
             </a:pPr>
             <a:r>
@@ -13089,7 +14259,7 @@
           <a:bodyPr wrap="square" lIns="0" tIns="0" rIns="0" bIns="0" rtlCol="0" anchor="ctr"/>
           <a:lstStyle/>
           <a:p>
-            <a:pPr indent="0" marL="0">
+            <a:pPr marL="0" indent="0">
               <a:buNone/>
             </a:pPr>
             <a:r>
@@ -13128,7 +14298,7 @@
           <a:bodyPr wrap="square" lIns="0" tIns="0" rIns="0" bIns="0" rtlCol="0" anchor="ctr"/>
           <a:lstStyle/>
           <a:p>
-            <a:pPr indent="0" marL="0">
+            <a:pPr marL="0" indent="0">
               <a:buNone/>
             </a:pPr>
             <a:r>
@@ -13167,7 +14337,7 @@
           <a:bodyPr wrap="square" lIns="0" tIns="0" rIns="0" bIns="0" rtlCol="0" anchor="ctr"/>
           <a:lstStyle/>
           <a:p>
-            <a:pPr indent="0" marL="0">
+            <a:pPr marL="0" indent="0">
               <a:buNone/>
             </a:pPr>
             <a:r>
@@ -13206,7 +14376,7 @@
           <a:bodyPr wrap="square" lIns="0" tIns="0" rIns="0" bIns="0" rtlCol="0" anchor="ctr"/>
           <a:lstStyle/>
           <a:p>
-            <a:pPr indent="0" marL="0">
+            <a:pPr marL="0" indent="0">
               <a:buNone/>
             </a:pPr>
             <a:r>
@@ -13248,342 +14418,17 @@
             <a:prstDash val="solid"/>
           </a:ln>
         </p:spPr>
+        <p:txBody>
+          <a:bodyPr/>
+          <a:lstStyle/>
+          <a:p>
+            <a:endParaRPr lang="ar-SA"/>
+          </a:p>
+        </p:txBody>
       </p:sp>
       <p:pic>
         <p:nvPicPr>
-          <p:cNvPr id="11" name="Image 0" descr="preencoded.png">    </p:cNvPr>
-          <p:cNvPicPr>
-            <a:picLocks noChangeAspect="1"/>
-          </p:cNvPicPr>
-          <p:nvPr/>
-        </p:nvPicPr>
-        <p:blipFill>
-          <a:blip r:embed="rId1"/>
-          <a:stretch>
-            <a:fillRect/>
-          </a:stretch>
-        </p:blipFill>
-        <p:spPr>
-          <a:xfrm>
-            <a:off x="4738421" y="989381"/>
-            <a:ext cx="307238" cy="307238"/>
-          </a:xfrm>
-          <a:prstGeom prst="rect">
-            <a:avLst/>
-          </a:prstGeom>
-        </p:spPr>
-      </p:pic>
-      <p:sp>
-        <p:nvSpPr>
-          <p:cNvPr id="12" name="Text 9"/>
-          <p:cNvSpPr txBox="1"/>
-          <p:nvPr/>
-        </p:nvSpPr>
-        <p:spPr>
-          <a:xfrm>
-            <a:off x="5440680" y="777240"/>
-            <a:ext cx="914400" cy="365760"/>
-          </a:xfrm>
-          <a:prstGeom prst="rect">
-            <a:avLst/>
-          </a:prstGeom>
-          <a:noFill/>
-          <a:ln/>
-        </p:spPr>
-        <p:txBody>
-          <a:bodyPr wrap="square" lIns="0" tIns="0" rIns="0" bIns="0" rtlCol="0" anchor="ctr"/>
-          <a:lstStyle/>
-          <a:p>
-            <a:pPr indent="0" marL="0">
-              <a:buNone/>
-            </a:pPr>
-            <a:r>
-              <a:rPr lang="en-US" sz="1300" b="1" dirty="0">
-                <a:solidFill>
-                  <a:srgbClr val="B4532A"/>
-                </a:solidFill>
-                <a:latin typeface="Calibri" pitchFamily="34" charset="0"/>
-                <a:ea typeface="Calibri" pitchFamily="34" charset="-122"/>
-                <a:cs typeface="Calibri" pitchFamily="34" charset="-120"/>
-              </a:rPr>
-              <a:t>01–03</a:t>
-            </a:r>
-            <a:endParaRPr lang="en-US" sz="1300" dirty="0"/>
-          </a:p>
-        </p:txBody>
-      </p:sp>
-      <p:sp>
-        <p:nvSpPr>
-          <p:cNvPr id="13" name="Text 10"/>
-          <p:cNvSpPr txBox="1"/>
-          <p:nvPr/>
-        </p:nvSpPr>
-        <p:spPr>
-          <a:xfrm>
-            <a:off x="6263640" y="777240"/>
-            <a:ext cx="5120640" cy="365760"/>
-          </a:xfrm>
-          <a:prstGeom prst="rect">
-            <a:avLst/>
-          </a:prstGeom>
-          <a:noFill/>
-          <a:ln/>
-        </p:spPr>
-        <p:txBody>
-          <a:bodyPr wrap="square" lIns="0" tIns="0" rIns="0" bIns="0" rtlCol="0" anchor="ctr"/>
-          <a:lstStyle/>
-          <a:p>
-            <a:pPr indent="0" marL="0">
-              <a:buNone/>
-            </a:pPr>
-            <a:r>
-              <a:rPr lang="en-US" sz="2000" b="1" dirty="0">
-                <a:solidFill>
-                  <a:srgbClr val="16302C"/>
-                </a:solidFill>
-                <a:latin typeface="Cambria" pitchFamily="34" charset="0"/>
-                <a:ea typeface="Cambria" pitchFamily="34" charset="-122"/>
-                <a:cs typeface="Cambria" pitchFamily="34" charset="-120"/>
-              </a:rPr>
-              <a:t>AI Matching</a:t>
-            </a:r>
-            <a:endParaRPr lang="en-US" sz="2000" dirty="0"/>
-          </a:p>
-        </p:txBody>
-      </p:sp>
-      <p:sp>
-        <p:nvSpPr>
-          <p:cNvPr id="14" name="Text 11"/>
-          <p:cNvSpPr txBox="1"/>
-          <p:nvPr/>
-        </p:nvSpPr>
-        <p:spPr>
-          <a:xfrm>
-            <a:off x="5440680" y="1188720"/>
-            <a:ext cx="6035040" cy="320040"/>
-          </a:xfrm>
-          <a:prstGeom prst="rect">
-            <a:avLst/>
-          </a:prstGeom>
-          <a:noFill/>
-          <a:ln/>
-        </p:spPr>
-        <p:txBody>
-          <a:bodyPr wrap="square" lIns="0" tIns="0" rIns="0" bIns="0" rtlCol="0" anchor="ctr"/>
-          <a:lstStyle/>
-          <a:p>
-            <a:pPr indent="0" marL="0">
-              <a:buNone/>
-            </a:pPr>
-            <a:r>
-              <a:rPr lang="en-US" sz="1400" dirty="0">
-                <a:solidFill>
-                  <a:srgbClr val="3A4C47"/>
-                </a:solidFill>
-                <a:latin typeface="Calibri" pitchFamily="34" charset="0"/>
-                <a:ea typeface="Calibri" pitchFamily="34" charset="-122"/>
-                <a:cs typeface="Calibri" pitchFamily="34" charset="-120"/>
-              </a:rPr>
-              <a:t>Suggest a roommate  ·  Confirm a match  ·  Unmatch</a:t>
-            </a:r>
-            <a:endParaRPr lang="en-US" sz="1400" dirty="0"/>
-          </a:p>
-        </p:txBody>
-      </p:sp>
-      <p:sp>
-        <p:nvSpPr>
-          <p:cNvPr id="15" name="Shape 12"/>
-          <p:cNvSpPr/>
-          <p:nvPr/>
-        </p:nvSpPr>
-        <p:spPr>
-          <a:xfrm>
-            <a:off x="4572000" y="1920240"/>
-            <a:ext cx="640080" cy="640080"/>
-          </a:xfrm>
-          <a:prstGeom prst="ellipse">
-            <a:avLst/>
-          </a:prstGeom>
-          <a:solidFill>
-            <a:srgbClr val="B4532A"/>
-          </a:solidFill>
-          <a:ln w="12700">
-            <a:solidFill>
-              <a:srgbClr val="B4532A"/>
-            </a:solidFill>
-            <a:prstDash val="solid"/>
-          </a:ln>
-        </p:spPr>
-      </p:sp>
-      <p:pic>
-        <p:nvPicPr>
-          <p:cNvPr id="16" name="Image 1" descr="preencoded.png">    </p:cNvPr>
-          <p:cNvPicPr>
-            <a:picLocks noChangeAspect="1"/>
-          </p:cNvPicPr>
-          <p:nvPr/>
-        </p:nvPicPr>
-        <p:blipFill>
-          <a:blip r:embed="rId2"/>
-          <a:stretch>
-            <a:fillRect/>
-          </a:stretch>
-        </p:blipFill>
-        <p:spPr>
-          <a:xfrm>
-            <a:off x="4738421" y="2086661"/>
-            <a:ext cx="307238" cy="307238"/>
-          </a:xfrm>
-          <a:prstGeom prst="rect">
-            <a:avLst/>
-          </a:prstGeom>
-        </p:spPr>
-      </p:pic>
-      <p:sp>
-        <p:nvSpPr>
-          <p:cNvPr id="17" name="Text 13"/>
-          <p:cNvSpPr txBox="1"/>
-          <p:nvPr/>
-        </p:nvSpPr>
-        <p:spPr>
-          <a:xfrm>
-            <a:off x="5440680" y="1874520"/>
-            <a:ext cx="914400" cy="365760"/>
-          </a:xfrm>
-          <a:prstGeom prst="rect">
-            <a:avLst/>
-          </a:prstGeom>
-          <a:noFill/>
-          <a:ln/>
-        </p:spPr>
-        <p:txBody>
-          <a:bodyPr wrap="square" lIns="0" tIns="0" rIns="0" bIns="0" rtlCol="0" anchor="ctr"/>
-          <a:lstStyle/>
-          <a:p>
-            <a:pPr indent="0" marL="0">
-              <a:buNone/>
-            </a:pPr>
-            <a:r>
-              <a:rPr lang="en-US" sz="1300" b="1" dirty="0">
-                <a:solidFill>
-                  <a:srgbClr val="B4532A"/>
-                </a:solidFill>
-                <a:latin typeface="Calibri" pitchFamily="34" charset="0"/>
-                <a:ea typeface="Calibri" pitchFamily="34" charset="-122"/>
-                <a:cs typeface="Calibri" pitchFamily="34" charset="-120"/>
-              </a:rPr>
-              <a:t>04–06</a:t>
-            </a:r>
-            <a:endParaRPr lang="en-US" sz="1300" dirty="0"/>
-          </a:p>
-        </p:txBody>
-      </p:sp>
-      <p:sp>
-        <p:nvSpPr>
-          <p:cNvPr id="18" name="Text 14"/>
-          <p:cNvSpPr txBox="1"/>
-          <p:nvPr/>
-        </p:nvSpPr>
-        <p:spPr>
-          <a:xfrm>
-            <a:off x="6263640" y="1874520"/>
-            <a:ext cx="5120640" cy="365760"/>
-          </a:xfrm>
-          <a:prstGeom prst="rect">
-            <a:avLst/>
-          </a:prstGeom>
-          <a:noFill/>
-          <a:ln/>
-        </p:spPr>
-        <p:txBody>
-          <a:bodyPr wrap="square" lIns="0" tIns="0" rIns="0" bIns="0" rtlCol="0" anchor="ctr"/>
-          <a:lstStyle/>
-          <a:p>
-            <a:pPr indent="0" marL="0">
-              <a:buNone/>
-            </a:pPr>
-            <a:r>
-              <a:rPr lang="en-US" sz="2000" b="1" dirty="0">
-                <a:solidFill>
-                  <a:srgbClr val="16302C"/>
-                </a:solidFill>
-                <a:latin typeface="Cambria" pitchFamily="34" charset="0"/>
-                <a:ea typeface="Cambria" pitchFamily="34" charset="-122"/>
-                <a:cs typeface="Cambria" pitchFamily="34" charset="-120"/>
-              </a:rPr>
-              <a:t>Room Listings</a:t>
-            </a:r>
-            <a:endParaRPr lang="en-US" sz="2000" dirty="0"/>
-          </a:p>
-        </p:txBody>
-      </p:sp>
-      <p:sp>
-        <p:nvSpPr>
-          <p:cNvPr id="19" name="Text 15"/>
-          <p:cNvSpPr txBox="1"/>
-          <p:nvPr/>
-        </p:nvSpPr>
-        <p:spPr>
-          <a:xfrm>
-            <a:off x="5440680" y="2286000"/>
-            <a:ext cx="6035040" cy="320040"/>
-          </a:xfrm>
-          <a:prstGeom prst="rect">
-            <a:avLst/>
-          </a:prstGeom>
-          <a:noFill/>
-          <a:ln/>
-        </p:spPr>
-        <p:txBody>
-          <a:bodyPr wrap="square" lIns="0" tIns="0" rIns="0" bIns="0" rtlCol="0" anchor="ctr"/>
-          <a:lstStyle/>
-          <a:p>
-            <a:pPr indent="0" marL="0">
-              <a:buNone/>
-            </a:pPr>
-            <a:r>
-              <a:rPr lang="en-US" sz="1400" dirty="0">
-                <a:solidFill>
-                  <a:srgbClr val="3A4C47"/>
-                </a:solidFill>
-                <a:latin typeface="Calibri" pitchFamily="34" charset="0"/>
-                <a:ea typeface="Calibri" pitchFamily="34" charset="-122"/>
-                <a:cs typeface="Calibri" pitchFamily="34" charset="-120"/>
-              </a:rPr>
-              <a:t>Rooms by city  ·  Rooms under a budget  ·  Toggle availability</a:t>
-            </a:r>
-            <a:endParaRPr lang="en-US" sz="1400" dirty="0"/>
-          </a:p>
-        </p:txBody>
-      </p:sp>
-      <p:sp>
-        <p:nvSpPr>
-          <p:cNvPr id="20" name="Shape 16"/>
-          <p:cNvSpPr/>
-          <p:nvPr/>
-        </p:nvSpPr>
-        <p:spPr>
-          <a:xfrm>
-            <a:off x="4572000" y="3017520"/>
-            <a:ext cx="640080" cy="640080"/>
-          </a:xfrm>
-          <a:prstGeom prst="ellipse">
-            <a:avLst/>
-          </a:prstGeom>
-          <a:solidFill>
-            <a:srgbClr val="B4532A"/>
-          </a:solidFill>
-          <a:ln w="12700">
-            <a:solidFill>
-              <a:srgbClr val="B4532A"/>
-            </a:solidFill>
-            <a:prstDash val="solid"/>
-          </a:ln>
-        </p:spPr>
-      </p:sp>
-      <p:pic>
-        <p:nvPicPr>
-          <p:cNvPr id="21" name="Image 2" descr="preencoded.png">    </p:cNvPr>
+          <p:cNvPr id="11" name="Image 0" descr="preencoded.png"/>
           <p:cNvPicPr>
             <a:picLocks noChangeAspect="1"/>
           </p:cNvPicPr>
@@ -13597,7 +14442,7 @@
         </p:blipFill>
         <p:spPr>
           <a:xfrm>
-            <a:off x="4738421" y="3183941"/>
+            <a:off x="4738421" y="989381"/>
             <a:ext cx="307238" cy="307238"/>
           </a:xfrm>
           <a:prstGeom prst="rect">
@@ -13607,13 +14452,13 @@
       </p:pic>
       <p:sp>
         <p:nvSpPr>
-          <p:cNvPr id="22" name="Text 17"/>
-          <p:cNvSpPr txBox="1"/>
-          <p:nvPr/>
-        </p:nvSpPr>
-        <p:spPr>
-          <a:xfrm>
-            <a:off x="5440680" y="2971800"/>
+          <p:cNvPr id="12" name="Text 9"/>
+          <p:cNvSpPr txBox="1"/>
+          <p:nvPr/>
+        </p:nvSpPr>
+        <p:spPr>
+          <a:xfrm>
+            <a:off x="5440680" y="777240"/>
             <a:ext cx="914400" cy="365760"/>
           </a:xfrm>
           <a:prstGeom prst="rect">
@@ -13626,7 +14471,7 @@
           <a:bodyPr wrap="square" lIns="0" tIns="0" rIns="0" bIns="0" rtlCol="0" anchor="ctr"/>
           <a:lstStyle/>
           <a:p>
-            <a:pPr indent="0" marL="0">
+            <a:pPr marL="0" indent="0">
               <a:buNone/>
             </a:pPr>
             <a:r>
@@ -13638,7 +14483,7 @@
                 <a:ea typeface="Calibri" pitchFamily="34" charset="-122"/>
                 <a:cs typeface="Calibri" pitchFamily="34" charset="-120"/>
               </a:rPr>
-              <a:t>07–09</a:t>
+              <a:t>01–03</a:t>
             </a:r>
             <a:endParaRPr lang="en-US" sz="1300" dirty="0"/>
           </a:p>
@@ -13646,13 +14491,13 @@
       </p:sp>
       <p:sp>
         <p:nvSpPr>
-          <p:cNvPr id="23" name="Text 18"/>
-          <p:cNvSpPr txBox="1"/>
-          <p:nvPr/>
-        </p:nvSpPr>
-        <p:spPr>
-          <a:xfrm>
-            <a:off x="6263640" y="2971800"/>
+          <p:cNvPr id="13" name="Text 10"/>
+          <p:cNvSpPr txBox="1"/>
+          <p:nvPr/>
+        </p:nvSpPr>
+        <p:spPr>
+          <a:xfrm>
+            <a:off x="6263640" y="777240"/>
             <a:ext cx="5120640" cy="365760"/>
           </a:xfrm>
           <a:prstGeom prst="rect">
@@ -13665,7 +14510,7 @@
           <a:bodyPr wrap="square" lIns="0" tIns="0" rIns="0" bIns="0" rtlCol="0" anchor="ctr"/>
           <a:lstStyle/>
           <a:p>
-            <a:pPr indent="0" marL="0">
+            <a:pPr marL="0" indent="0">
               <a:buNone/>
             </a:pPr>
             <a:r>
@@ -13677,7 +14522,7 @@
                 <a:ea typeface="Cambria" pitchFamily="34" charset="-122"/>
                 <a:cs typeface="Cambria" pitchFamily="34" charset="-120"/>
               </a:rPr>
-              <a:t>Listing Requests</a:t>
+              <a:t>AI Matching</a:t>
             </a:r>
             <a:endParaRPr lang="en-US" sz="2000" dirty="0"/>
           </a:p>
@@ -13685,13 +14530,13 @@
       </p:sp>
       <p:sp>
         <p:nvSpPr>
-          <p:cNvPr id="24" name="Text 19"/>
-          <p:cNvSpPr txBox="1"/>
-          <p:nvPr/>
-        </p:nvSpPr>
-        <p:spPr>
-          <a:xfrm>
-            <a:off x="5440680" y="3383280"/>
+          <p:cNvPr id="14" name="Text 11"/>
+          <p:cNvSpPr txBox="1"/>
+          <p:nvPr/>
+        </p:nvSpPr>
+        <p:spPr>
+          <a:xfrm>
+            <a:off x="5440680" y="1188720"/>
             <a:ext cx="6035040" cy="320040"/>
           </a:xfrm>
           <a:prstGeom prst="rect">
@@ -13704,7 +14549,7 @@
           <a:bodyPr wrap="square" lIns="0" tIns="0" rIns="0" bIns="0" rtlCol="0" anchor="ctr"/>
           <a:lstStyle/>
           <a:p>
-            <a:pPr indent="0" marL="0">
+            <a:pPr marL="0" indent="0">
               <a:buNone/>
             </a:pPr>
             <a:r>
@@ -13716,7 +14561,7 @@
                 <a:ea typeface="Calibri" pitchFamily="34" charset="-122"/>
                 <a:cs typeface="Calibri" pitchFamily="34" charset="-120"/>
               </a:rPr>
-              <a:t>Request a room  ·  Accept a request  ·  Reject a request</a:t>
+              <a:t>Suggest a roommate  ·  Confirm a match  ·  Unmatch</a:t>
             </a:r>
             <a:endParaRPr lang="en-US" sz="1400" dirty="0"/>
           </a:p>
@@ -13724,13 +14569,13 @@
       </p:sp>
       <p:sp>
         <p:nvSpPr>
-          <p:cNvPr id="25" name="Shape 20"/>
+          <p:cNvPr id="15" name="Shape 12"/>
           <p:cNvSpPr/>
           <p:nvPr/>
         </p:nvSpPr>
         <p:spPr>
           <a:xfrm>
-            <a:off x="4572000" y="4114800"/>
+            <a:off x="4572000" y="1920240"/>
             <a:ext cx="640080" cy="640080"/>
           </a:xfrm>
           <a:prstGeom prst="ellipse">
@@ -13746,10 +14591,17 @@
             <a:prstDash val="solid"/>
           </a:ln>
         </p:spPr>
+        <p:txBody>
+          <a:bodyPr/>
+          <a:lstStyle/>
+          <a:p>
+            <a:endParaRPr lang="ar-SA"/>
+          </a:p>
+        </p:txBody>
       </p:sp>
       <p:pic>
         <p:nvPicPr>
-          <p:cNvPr id="26" name="Image 3" descr="preencoded.png">    </p:cNvPr>
+          <p:cNvPr id="16" name="Image 1" descr="preencoded.png"/>
           <p:cNvPicPr>
             <a:picLocks noChangeAspect="1"/>
           </p:cNvPicPr>
@@ -13763,7 +14615,7 @@
         </p:blipFill>
         <p:spPr>
           <a:xfrm>
-            <a:off x="4738421" y="4281221"/>
+            <a:off x="4738421" y="2086661"/>
             <a:ext cx="307238" cy="307238"/>
           </a:xfrm>
           <a:prstGeom prst="rect">
@@ -13773,13 +14625,13 @@
       </p:pic>
       <p:sp>
         <p:nvSpPr>
-          <p:cNvPr id="27" name="Text 21"/>
-          <p:cNvSpPr txBox="1"/>
-          <p:nvPr/>
-        </p:nvSpPr>
-        <p:spPr>
-          <a:xfrm>
-            <a:off x="5440680" y="4069080"/>
+          <p:cNvPr id="17" name="Text 13"/>
+          <p:cNvSpPr txBox="1"/>
+          <p:nvPr/>
+        </p:nvSpPr>
+        <p:spPr>
+          <a:xfrm>
+            <a:off x="5440680" y="1874520"/>
             <a:ext cx="914400" cy="365760"/>
           </a:xfrm>
           <a:prstGeom prst="rect">
@@ -13792,7 +14644,7 @@
           <a:bodyPr wrap="square" lIns="0" tIns="0" rIns="0" bIns="0" rtlCol="0" anchor="ctr"/>
           <a:lstStyle/>
           <a:p>
-            <a:pPr indent="0" marL="0">
+            <a:pPr marL="0" indent="0">
               <a:buNone/>
             </a:pPr>
             <a:r>
@@ -13804,7 +14656,7 @@
                 <a:ea typeface="Calibri" pitchFamily="34" charset="-122"/>
                 <a:cs typeface="Calibri" pitchFamily="34" charset="-120"/>
               </a:rPr>
-              <a:t>10–12</a:t>
+              <a:t>04–06</a:t>
             </a:r>
             <a:endParaRPr lang="en-US" sz="1300" dirty="0"/>
           </a:p>
@@ -13812,13 +14664,13 @@
       </p:sp>
       <p:sp>
         <p:nvSpPr>
-          <p:cNvPr id="28" name="Text 22"/>
-          <p:cNvSpPr txBox="1"/>
-          <p:nvPr/>
-        </p:nvSpPr>
-        <p:spPr>
-          <a:xfrm>
-            <a:off x="6263640" y="4069080"/>
+          <p:cNvPr id="18" name="Text 14"/>
+          <p:cNvSpPr txBox="1"/>
+          <p:nvPr/>
+        </p:nvSpPr>
+        <p:spPr>
+          <a:xfrm>
+            <a:off x="6263640" y="1874520"/>
             <a:ext cx="5120640" cy="365760"/>
           </a:xfrm>
           <a:prstGeom prst="rect">
@@ -13831,7 +14683,7 @@
           <a:bodyPr wrap="square" lIns="0" tIns="0" rIns="0" bIns="0" rtlCol="0" anchor="ctr"/>
           <a:lstStyle/>
           <a:p>
-            <a:pPr indent="0" marL="0">
+            <a:pPr marL="0" indent="0">
               <a:buNone/>
             </a:pPr>
             <a:r>
@@ -13843,7 +14695,7 @@
                 <a:ea typeface="Cambria" pitchFamily="34" charset="-122"/>
                 <a:cs typeface="Cambria" pitchFamily="34" charset="-120"/>
               </a:rPr>
-              <a:t>Agreements</a:t>
+              <a:t>Room Listings</a:t>
             </a:r>
             <a:endParaRPr lang="en-US" sz="2000" dirty="0"/>
           </a:p>
@@ -13851,13 +14703,13 @@
       </p:sp>
       <p:sp>
         <p:nvSpPr>
-          <p:cNvPr id="29" name="Text 23"/>
-          <p:cNvSpPr txBox="1"/>
-          <p:nvPr/>
-        </p:nvSpPr>
-        <p:spPr>
-          <a:xfrm>
-            <a:off x="5440680" y="4480560"/>
+          <p:cNvPr id="19" name="Text 15"/>
+          <p:cNvSpPr txBox="1"/>
+          <p:nvPr/>
+        </p:nvSpPr>
+        <p:spPr>
+          <a:xfrm>
+            <a:off x="5440680" y="2286000"/>
             <a:ext cx="6035040" cy="320040"/>
           </a:xfrm>
           <a:prstGeom prst="rect">
@@ -13870,7 +14722,7 @@
           <a:bodyPr wrap="square" lIns="0" tIns="0" rIns="0" bIns="0" rtlCol="0" anchor="ctr"/>
           <a:lstStyle/>
           <a:p>
-            <a:pPr indent="0" marL="0">
+            <a:pPr marL="0" indent="0">
               <a:buNone/>
             </a:pPr>
             <a:r>
@@ -13882,7 +14734,7 @@
                 <a:ea typeface="Calibri" pitchFamily="34" charset="-122"/>
                 <a:cs typeface="Calibri" pitchFamily="34" charset="-120"/>
               </a:rPr>
-              <a:t>Add a house rule  ·  Activate  ·  Terminate</a:t>
+              <a:t>Rooms by city  ·  Rooms under a budget  ·  Toggle availability</a:t>
             </a:r>
             <a:endParaRPr lang="en-US" sz="1400" dirty="0"/>
           </a:p>
@@ -13890,13 +14742,13 @@
       </p:sp>
       <p:sp>
         <p:nvSpPr>
-          <p:cNvPr id="30" name="Shape 24"/>
+          <p:cNvPr id="20" name="Shape 16"/>
           <p:cNvSpPr/>
           <p:nvPr/>
         </p:nvSpPr>
         <p:spPr>
           <a:xfrm>
-            <a:off x="4572000" y="5212080"/>
+            <a:off x="4572000" y="3017520"/>
             <a:ext cx="640080" cy="640080"/>
           </a:xfrm>
           <a:prstGeom prst="ellipse">
@@ -13912,10 +14764,17 @@
             <a:prstDash val="solid"/>
           </a:ln>
         </p:spPr>
+        <p:txBody>
+          <a:bodyPr/>
+          <a:lstStyle/>
+          <a:p>
+            <a:endParaRPr lang="ar-SA"/>
+          </a:p>
+        </p:txBody>
       </p:sp>
       <p:pic>
         <p:nvPicPr>
-          <p:cNvPr id="31" name="Image 4" descr="preencoded.png">    </p:cNvPr>
+          <p:cNvPr id="21" name="Image 2" descr="preencoded.png"/>
           <p:cNvPicPr>
             <a:picLocks noChangeAspect="1"/>
           </p:cNvPicPr>
@@ -13929,7 +14788,7 @@
         </p:blipFill>
         <p:spPr>
           <a:xfrm>
-            <a:off x="4738421" y="5378501"/>
+            <a:off x="4738421" y="3183941"/>
             <a:ext cx="307238" cy="307238"/>
           </a:xfrm>
           <a:prstGeom prst="rect">
@@ -13939,13 +14798,13 @@
       </p:pic>
       <p:sp>
         <p:nvSpPr>
-          <p:cNvPr id="32" name="Text 25"/>
-          <p:cNvSpPr txBox="1"/>
-          <p:nvPr/>
-        </p:nvSpPr>
-        <p:spPr>
-          <a:xfrm>
-            <a:off x="5440680" y="5166360"/>
+          <p:cNvPr id="22" name="Text 17"/>
+          <p:cNvSpPr txBox="1"/>
+          <p:nvPr/>
+        </p:nvSpPr>
+        <p:spPr>
+          <a:xfrm>
+            <a:off x="5440680" y="2971800"/>
             <a:ext cx="914400" cy="365760"/>
           </a:xfrm>
           <a:prstGeom prst="rect">
@@ -13958,7 +14817,7 @@
           <a:bodyPr wrap="square" lIns="0" tIns="0" rIns="0" bIns="0" rtlCol="0" anchor="ctr"/>
           <a:lstStyle/>
           <a:p>
-            <a:pPr indent="0" marL="0">
+            <a:pPr marL="0" indent="0">
               <a:buNone/>
             </a:pPr>
             <a:r>
@@ -13970,7 +14829,7 @@
                 <a:ea typeface="Calibri" pitchFamily="34" charset="-122"/>
                 <a:cs typeface="Calibri" pitchFamily="34" charset="-120"/>
               </a:rPr>
-              <a:t>13–15</a:t>
+              <a:t>07–09</a:t>
             </a:r>
             <a:endParaRPr lang="en-US" sz="1300" dirty="0"/>
           </a:p>
@@ -13978,13 +14837,13 @@
       </p:sp>
       <p:sp>
         <p:nvSpPr>
-          <p:cNvPr id="33" name="Text 26"/>
-          <p:cNvSpPr txBox="1"/>
-          <p:nvPr/>
-        </p:nvSpPr>
-        <p:spPr>
-          <a:xfrm>
-            <a:off x="6263640" y="5166360"/>
+          <p:cNvPr id="23" name="Text 18"/>
+          <p:cNvSpPr txBox="1"/>
+          <p:nvPr/>
+        </p:nvSpPr>
+        <p:spPr>
+          <a:xfrm>
+            <a:off x="6263640" y="2971800"/>
             <a:ext cx="5120640" cy="365760"/>
           </a:xfrm>
           <a:prstGeom prst="rect">
@@ -13997,7 +14856,7 @@
           <a:bodyPr wrap="square" lIns="0" tIns="0" rIns="0" bIns="0" rtlCol="0" anchor="ctr"/>
           <a:lstStyle/>
           <a:p>
-            <a:pPr indent="0" marL="0">
+            <a:pPr marL="0" indent="0">
               <a:buNone/>
             </a:pPr>
             <a:r>
@@ -14009,7 +14868,7 @@
                 <a:ea typeface="Cambria" pitchFamily="34" charset="-122"/>
                 <a:cs typeface="Cambria" pitchFamily="34" charset="-120"/>
               </a:rPr>
-              <a:t>Trust &amp; Safety</a:t>
+              <a:t>Listing Requests</a:t>
             </a:r>
             <a:endParaRPr lang="en-US" sz="2000" dirty="0"/>
           </a:p>
@@ -14017,13 +14876,13 @@
       </p:sp>
       <p:sp>
         <p:nvSpPr>
-          <p:cNvPr id="34" name="Text 27"/>
-          <p:cNvSpPr txBox="1"/>
-          <p:nvPr/>
-        </p:nvSpPr>
-        <p:spPr>
-          <a:xfrm>
-            <a:off x="5440680" y="5577840"/>
+          <p:cNvPr id="24" name="Text 19"/>
+          <p:cNvSpPr txBox="1"/>
+          <p:nvPr/>
+        </p:nvSpPr>
+        <p:spPr>
+          <a:xfrm>
+            <a:off x="5440680" y="3383280"/>
             <a:ext cx="6035040" cy="320040"/>
           </a:xfrm>
           <a:prstGeom prst="rect">
@@ -14036,7 +14895,7 @@
           <a:bodyPr wrap="square" lIns="0" tIns="0" rIns="0" bIns="0" rtlCol="0" anchor="ctr"/>
           <a:lstStyle/>
           <a:p>
-            <a:pPr indent="0" marL="0">
+            <a:pPr marL="0" indent="0">
               <a:buNone/>
             </a:pPr>
             <a:r>
@@ -14048,7 +14907,7 @@
                 <a:ea typeface="Calibri" pitchFamily="34" charset="-122"/>
                 <a:cs typeface="Calibri" pitchFamily="34" charset="-120"/>
               </a:rPr>
-              <a:t>Review a roommate  ·  Average rating  ·  Resolve a report</a:t>
+              <a:t>Request a room  ·  Accept a request  ·  Reject a request</a:t>
             </a:r>
             <a:endParaRPr lang="en-US" sz="1400" dirty="0"/>
           </a:p>
@@ -14056,82 +14915,458 @@
       </p:sp>
       <p:sp>
         <p:nvSpPr>
-          <p:cNvPr id="35" name="Text 28"/>
-          <p:cNvSpPr txBox="1"/>
-          <p:nvPr/>
-        </p:nvSpPr>
-        <p:spPr>
-          <a:xfrm>
-            <a:off x="731520" y="6355080"/>
-            <a:ext cx="3108960" cy="274320"/>
-          </a:xfrm>
-          <a:prstGeom prst="rect">
-            <a:avLst/>
-          </a:prstGeom>
-          <a:noFill/>
-          <a:ln/>
-        </p:spPr>
-        <p:txBody>
-          <a:bodyPr wrap="square" lIns="0" tIns="0" rIns="0" bIns="0" rtlCol="0" anchor="ctr"/>
-          <a:lstStyle/>
-          <a:p>
-            <a:pPr indent="0" marL="0">
-              <a:buNone/>
-            </a:pPr>
-            <a:r>
-              <a:rPr lang="en-US" sz="1000" dirty="0">
-                <a:solidFill>
-                  <a:srgbClr val="C9D4D0"/>
+          <p:cNvPr id="25" name="Shape 20"/>
+          <p:cNvSpPr/>
+          <p:nvPr/>
+        </p:nvSpPr>
+        <p:spPr>
+          <a:xfrm>
+            <a:off x="4572000" y="4114800"/>
+            <a:ext cx="640080" cy="640080"/>
+          </a:xfrm>
+          <a:prstGeom prst="ellipse">
+            <a:avLst/>
+          </a:prstGeom>
+          <a:solidFill>
+            <a:srgbClr val="B4532A"/>
+          </a:solidFill>
+          <a:ln w="12700">
+            <a:solidFill>
+              <a:srgbClr val="B4532A"/>
+            </a:solidFill>
+            <a:prstDash val="solid"/>
+          </a:ln>
+        </p:spPr>
+        <p:txBody>
+          <a:bodyPr/>
+          <a:lstStyle/>
+          <a:p>
+            <a:endParaRPr lang="ar-SA"/>
+          </a:p>
+        </p:txBody>
+      </p:sp>
+      <p:pic>
+        <p:nvPicPr>
+          <p:cNvPr id="26" name="Image 3" descr="preencoded.png"/>
+          <p:cNvPicPr>
+            <a:picLocks noChangeAspect="1"/>
+          </p:cNvPicPr>
+          <p:nvPr/>
+        </p:nvPicPr>
+        <p:blipFill>
+          <a:blip r:embed="rId6"/>
+          <a:stretch>
+            <a:fillRect/>
+          </a:stretch>
+        </p:blipFill>
+        <p:spPr>
+          <a:xfrm>
+            <a:off x="4738421" y="4281221"/>
+            <a:ext cx="307238" cy="307238"/>
+          </a:xfrm>
+          <a:prstGeom prst="rect">
+            <a:avLst/>
+          </a:prstGeom>
+        </p:spPr>
+      </p:pic>
+      <p:sp>
+        <p:nvSpPr>
+          <p:cNvPr id="27" name="Text 21"/>
+          <p:cNvSpPr txBox="1"/>
+          <p:nvPr/>
+        </p:nvSpPr>
+        <p:spPr>
+          <a:xfrm>
+            <a:off x="5440680" y="4069080"/>
+            <a:ext cx="914400" cy="365760"/>
+          </a:xfrm>
+          <a:prstGeom prst="rect">
+            <a:avLst/>
+          </a:prstGeom>
+          <a:noFill/>
+          <a:ln/>
+        </p:spPr>
+        <p:txBody>
+          <a:bodyPr wrap="square" lIns="0" tIns="0" rIns="0" bIns="0" rtlCol="0" anchor="ctr"/>
+          <a:lstStyle/>
+          <a:p>
+            <a:pPr marL="0" indent="0">
+              <a:buNone/>
+            </a:pPr>
+            <a:r>
+              <a:rPr lang="en-US" sz="1300" b="1" dirty="0">
+                <a:solidFill>
+                  <a:srgbClr val="B4532A"/>
                 </a:solidFill>
                 <a:latin typeface="Calibri" pitchFamily="34" charset="0"/>
                 <a:ea typeface="Calibri" pitchFamily="34" charset="-122"/>
                 <a:cs typeface="Calibri" pitchFamily="34" charset="-120"/>
               </a:rPr>
-              <a:t>Rifqa  ·  Spring Boot Capstone 2</a:t>
-            </a:r>
-            <a:endParaRPr lang="en-US" sz="1000" dirty="0"/>
-          </a:p>
-        </p:txBody>
-      </p:sp>
-      <p:sp>
-        <p:nvSpPr>
-          <p:cNvPr id="36" name="Text 29"/>
-          <p:cNvSpPr txBox="1"/>
-          <p:nvPr/>
-        </p:nvSpPr>
-        <p:spPr>
-          <a:xfrm>
-            <a:off x="10085832" y="6355080"/>
-            <a:ext cx="1371600" cy="274320"/>
-          </a:xfrm>
-          <a:prstGeom prst="rect">
-            <a:avLst/>
-          </a:prstGeom>
-          <a:noFill/>
-          <a:ln/>
-        </p:spPr>
-        <p:txBody>
-          <a:bodyPr wrap="square" lIns="0" tIns="0" rIns="0" bIns="0" rtlCol="0" anchor="ctr"/>
-          <a:lstStyle/>
-          <a:p>
-            <a:pPr algn="r" indent="0" marL="0">
-              <a:buNone/>
-            </a:pPr>
-            <a:r>
-              <a:rPr lang="en-US" sz="1000" dirty="0">
-                <a:solidFill>
-                  <a:srgbClr val="4A5C57"/>
+              <a:t>10–12</a:t>
+            </a:r>
+            <a:endParaRPr lang="en-US" sz="1300" dirty="0"/>
+          </a:p>
+        </p:txBody>
+      </p:sp>
+      <p:sp>
+        <p:nvSpPr>
+          <p:cNvPr id="28" name="Text 22"/>
+          <p:cNvSpPr txBox="1"/>
+          <p:nvPr/>
+        </p:nvSpPr>
+        <p:spPr>
+          <a:xfrm>
+            <a:off x="6263640" y="4069080"/>
+            <a:ext cx="5120640" cy="365760"/>
+          </a:xfrm>
+          <a:prstGeom prst="rect">
+            <a:avLst/>
+          </a:prstGeom>
+          <a:noFill/>
+          <a:ln/>
+        </p:spPr>
+        <p:txBody>
+          <a:bodyPr wrap="square" lIns="0" tIns="0" rIns="0" bIns="0" rtlCol="0" anchor="ctr"/>
+          <a:lstStyle/>
+          <a:p>
+            <a:pPr marL="0" indent="0">
+              <a:buNone/>
+            </a:pPr>
+            <a:r>
+              <a:rPr lang="en-US" sz="2000" b="1" dirty="0">
+                <a:solidFill>
+                  <a:srgbClr val="16302C"/>
+                </a:solidFill>
+                <a:latin typeface="Cambria" pitchFamily="34" charset="0"/>
+                <a:ea typeface="Cambria" pitchFamily="34" charset="-122"/>
+                <a:cs typeface="Cambria" pitchFamily="34" charset="-120"/>
+              </a:rPr>
+              <a:t>Agreements</a:t>
+            </a:r>
+            <a:endParaRPr lang="en-US" sz="2000" dirty="0"/>
+          </a:p>
+        </p:txBody>
+      </p:sp>
+      <p:sp>
+        <p:nvSpPr>
+          <p:cNvPr id="29" name="Text 23"/>
+          <p:cNvSpPr txBox="1"/>
+          <p:nvPr/>
+        </p:nvSpPr>
+        <p:spPr>
+          <a:xfrm>
+            <a:off x="5440680" y="4480560"/>
+            <a:ext cx="6035040" cy="320040"/>
+          </a:xfrm>
+          <a:prstGeom prst="rect">
+            <a:avLst/>
+          </a:prstGeom>
+          <a:noFill/>
+          <a:ln/>
+        </p:spPr>
+        <p:txBody>
+          <a:bodyPr wrap="square" lIns="0" tIns="0" rIns="0" bIns="0" rtlCol="0" anchor="ctr"/>
+          <a:lstStyle/>
+          <a:p>
+            <a:pPr marL="0" indent="0">
+              <a:buNone/>
+            </a:pPr>
+            <a:r>
+              <a:rPr lang="en-US" sz="1400" dirty="0">
+                <a:solidFill>
+                  <a:srgbClr val="3A4C47"/>
                 </a:solidFill>
                 <a:latin typeface="Calibri" pitchFamily="34" charset="0"/>
                 <a:ea typeface="Calibri" pitchFamily="34" charset="-122"/>
                 <a:cs typeface="Calibri" pitchFamily="34" charset="-120"/>
               </a:rPr>
+              <a:t>Add a house rule  ·  Activate  ·  Terminate</a:t>
+            </a:r>
+            <a:endParaRPr lang="en-US" sz="1400" dirty="0"/>
+          </a:p>
+        </p:txBody>
+      </p:sp>
+      <p:sp>
+        <p:nvSpPr>
+          <p:cNvPr id="30" name="Shape 24"/>
+          <p:cNvSpPr/>
+          <p:nvPr/>
+        </p:nvSpPr>
+        <p:spPr>
+          <a:xfrm>
+            <a:off x="4572000" y="5212080"/>
+            <a:ext cx="640080" cy="640080"/>
+          </a:xfrm>
+          <a:prstGeom prst="ellipse">
+            <a:avLst/>
+          </a:prstGeom>
+          <a:solidFill>
+            <a:srgbClr val="B4532A"/>
+          </a:solidFill>
+          <a:ln w="12700">
+            <a:solidFill>
+              <a:srgbClr val="B4532A"/>
+            </a:solidFill>
+            <a:prstDash val="solid"/>
+          </a:ln>
+        </p:spPr>
+        <p:txBody>
+          <a:bodyPr/>
+          <a:lstStyle/>
+          <a:p>
+            <a:endParaRPr lang="ar-SA"/>
+          </a:p>
+        </p:txBody>
+      </p:sp>
+      <p:pic>
+        <p:nvPicPr>
+          <p:cNvPr id="31" name="Image 4" descr="preencoded.png"/>
+          <p:cNvPicPr>
+            <a:picLocks noChangeAspect="1"/>
+          </p:cNvPicPr>
+          <p:nvPr/>
+        </p:nvPicPr>
+        <p:blipFill>
+          <a:blip r:embed="rId7"/>
+          <a:stretch>
+            <a:fillRect/>
+          </a:stretch>
+        </p:blipFill>
+        <p:spPr>
+          <a:xfrm>
+            <a:off x="4738421" y="5378501"/>
+            <a:ext cx="307238" cy="307238"/>
+          </a:xfrm>
+          <a:prstGeom prst="rect">
+            <a:avLst/>
+          </a:prstGeom>
+        </p:spPr>
+      </p:pic>
+      <p:sp>
+        <p:nvSpPr>
+          <p:cNvPr id="32" name="Text 25"/>
+          <p:cNvSpPr txBox="1"/>
+          <p:nvPr/>
+        </p:nvSpPr>
+        <p:spPr>
+          <a:xfrm>
+            <a:off x="5440680" y="5166360"/>
+            <a:ext cx="914400" cy="365760"/>
+          </a:xfrm>
+          <a:prstGeom prst="rect">
+            <a:avLst/>
+          </a:prstGeom>
+          <a:noFill/>
+          <a:ln/>
+        </p:spPr>
+        <p:txBody>
+          <a:bodyPr wrap="square" lIns="0" tIns="0" rIns="0" bIns="0" rtlCol="0" anchor="ctr"/>
+          <a:lstStyle/>
+          <a:p>
+            <a:pPr marL="0" indent="0">
+              <a:buNone/>
+            </a:pPr>
+            <a:r>
+              <a:rPr lang="en-US" sz="1300" b="1" dirty="0">
+                <a:solidFill>
+                  <a:srgbClr val="B4532A"/>
+                </a:solidFill>
+                <a:latin typeface="Calibri" pitchFamily="34" charset="0"/>
+                <a:ea typeface="Calibri" pitchFamily="34" charset="-122"/>
+                <a:cs typeface="Calibri" pitchFamily="34" charset="-120"/>
+              </a:rPr>
+              <a:t>13–15</a:t>
+            </a:r>
+            <a:endParaRPr lang="en-US" sz="1300" dirty="0"/>
+          </a:p>
+        </p:txBody>
+      </p:sp>
+      <p:sp>
+        <p:nvSpPr>
+          <p:cNvPr id="33" name="Text 26"/>
+          <p:cNvSpPr txBox="1"/>
+          <p:nvPr/>
+        </p:nvSpPr>
+        <p:spPr>
+          <a:xfrm>
+            <a:off x="6263640" y="5166360"/>
+            <a:ext cx="5120640" cy="365760"/>
+          </a:xfrm>
+          <a:prstGeom prst="rect">
+            <a:avLst/>
+          </a:prstGeom>
+          <a:noFill/>
+          <a:ln/>
+        </p:spPr>
+        <p:txBody>
+          <a:bodyPr wrap="square" lIns="0" tIns="0" rIns="0" bIns="0" rtlCol="0" anchor="ctr"/>
+          <a:lstStyle/>
+          <a:p>
+            <a:pPr marL="0" indent="0">
+              <a:buNone/>
+            </a:pPr>
+            <a:r>
+              <a:rPr lang="en-US" sz="2000" b="1" dirty="0">
+                <a:solidFill>
+                  <a:srgbClr val="16302C"/>
+                </a:solidFill>
+                <a:latin typeface="Cambria" pitchFamily="34" charset="0"/>
+                <a:ea typeface="Cambria" pitchFamily="34" charset="-122"/>
+                <a:cs typeface="Cambria" pitchFamily="34" charset="-120"/>
+              </a:rPr>
+              <a:t>Trust &amp; Safety</a:t>
+            </a:r>
+            <a:endParaRPr lang="en-US" sz="2000" dirty="0"/>
+          </a:p>
+        </p:txBody>
+      </p:sp>
+      <p:sp>
+        <p:nvSpPr>
+          <p:cNvPr id="34" name="Text 27"/>
+          <p:cNvSpPr txBox="1"/>
+          <p:nvPr/>
+        </p:nvSpPr>
+        <p:spPr>
+          <a:xfrm>
+            <a:off x="5440680" y="5577840"/>
+            <a:ext cx="6035040" cy="320040"/>
+          </a:xfrm>
+          <a:prstGeom prst="rect">
+            <a:avLst/>
+          </a:prstGeom>
+          <a:noFill/>
+          <a:ln/>
+        </p:spPr>
+        <p:txBody>
+          <a:bodyPr wrap="square" lIns="0" tIns="0" rIns="0" bIns="0" rtlCol="0" anchor="ctr"/>
+          <a:lstStyle/>
+          <a:p>
+            <a:pPr marL="0" indent="0">
+              <a:buNone/>
+            </a:pPr>
+            <a:r>
+              <a:rPr lang="en-US" sz="1400" dirty="0">
+                <a:solidFill>
+                  <a:srgbClr val="3A4C47"/>
+                </a:solidFill>
+                <a:latin typeface="Calibri" pitchFamily="34" charset="0"/>
+                <a:ea typeface="Calibri" pitchFamily="34" charset="-122"/>
+                <a:cs typeface="Calibri" pitchFamily="34" charset="-120"/>
+              </a:rPr>
+              <a:t>Review a roommate  ·  Average rating  ·  Resolve a report</a:t>
+            </a:r>
+            <a:endParaRPr lang="en-US" sz="1400" dirty="0"/>
+          </a:p>
+        </p:txBody>
+      </p:sp>
+      <p:sp>
+        <p:nvSpPr>
+          <p:cNvPr id="35" name="Text 28"/>
+          <p:cNvSpPr txBox="1"/>
+          <p:nvPr/>
+        </p:nvSpPr>
+        <p:spPr>
+          <a:xfrm>
+            <a:off x="731520" y="6355080"/>
+            <a:ext cx="3108960" cy="274320"/>
+          </a:xfrm>
+          <a:prstGeom prst="rect">
+            <a:avLst/>
+          </a:prstGeom>
+          <a:noFill/>
+          <a:ln/>
+        </p:spPr>
+        <p:txBody>
+          <a:bodyPr wrap="square" lIns="0" tIns="0" rIns="0" bIns="0" rtlCol="0" anchor="ctr"/>
+          <a:lstStyle/>
+          <a:p>
+            <a:pPr marL="0" indent="0">
+              <a:buNone/>
+            </a:pPr>
+            <a:r>
+              <a:rPr lang="en-US" sz="1000" dirty="0">
+                <a:solidFill>
+                  <a:srgbClr val="C9D4D0"/>
+                </a:solidFill>
+                <a:latin typeface="Calibri" pitchFamily="34" charset="0"/>
+                <a:ea typeface="Calibri" pitchFamily="34" charset="-122"/>
+                <a:cs typeface="Calibri" pitchFamily="34" charset="-120"/>
+              </a:rPr>
+              <a:t>Rifqa  ·  Spring Boot Capstone 2</a:t>
+            </a:r>
+            <a:endParaRPr lang="en-US" sz="1000" dirty="0"/>
+          </a:p>
+        </p:txBody>
+      </p:sp>
+      <p:sp>
+        <p:nvSpPr>
+          <p:cNvPr id="36" name="Text 29"/>
+          <p:cNvSpPr txBox="1"/>
+          <p:nvPr/>
+        </p:nvSpPr>
+        <p:spPr>
+          <a:xfrm>
+            <a:off x="10085832" y="6355080"/>
+            <a:ext cx="1371600" cy="274320"/>
+          </a:xfrm>
+          <a:prstGeom prst="rect">
+            <a:avLst/>
+          </a:prstGeom>
+          <a:noFill/>
+          <a:ln/>
+        </p:spPr>
+        <p:txBody>
+          <a:bodyPr wrap="square" lIns="0" tIns="0" rIns="0" bIns="0" rtlCol="0" anchor="ctr"/>
+          <a:lstStyle/>
+          <a:p>
+            <a:pPr marL="0" indent="0" algn="r">
+              <a:buNone/>
+            </a:pPr>
+            <a:r>
+              <a:rPr lang="en-US" sz="1000" dirty="0">
+                <a:solidFill>
+                  <a:srgbClr val="4A5C57"/>
+                </a:solidFill>
+                <a:latin typeface="Calibri" pitchFamily="34" charset="0"/>
+                <a:ea typeface="Calibri" pitchFamily="34" charset="-122"/>
+                <a:cs typeface="Calibri" pitchFamily="34" charset="-120"/>
+              </a:rPr>
               <a:t>6 / 13</a:t>
             </a:r>
             <a:endParaRPr lang="en-US" sz="1000" dirty="0"/>
           </a:p>
         </p:txBody>
       </p:sp>
+      <p:pic>
+        <p:nvPicPr>
+          <p:cNvPr id="38" name="Picture 37">
+            <a:extLst>
+              <a:ext uri="{FF2B5EF4-FFF2-40B4-BE49-F238E27FC236}">
+                <a16:creationId xmlns:a16="http://schemas.microsoft.com/office/drawing/2014/main" id="{47134298-39DA-4D3A-3F26-3D1D8FFB905F}"/>
+              </a:ext>
+            </a:extLst>
+          </p:cNvPr>
+          <p:cNvPicPr>
+            <a:picLocks noChangeAspect="1"/>
+          </p:cNvPicPr>
+          <p:nvPr/>
+        </p:nvPicPr>
+        <p:blipFill>
+          <a:blip r:embed="rId8"/>
+          <a:stretch>
+            <a:fillRect/>
+          </a:stretch>
+        </p:blipFill>
+        <p:spPr>
+          <a:xfrm>
+            <a:off x="8827008" y="-128064"/>
+            <a:ext cx="3361944" cy="1451589"/>
+          </a:xfrm>
+          <a:prstGeom prst="rect">
+            <a:avLst/>
+          </a:prstGeom>
+        </p:spPr>
+      </p:pic>
     </p:spTree>
   </p:cSld>
   <p:clrMapOvr>
@@ -14148,6 +15383,7 @@
         <a:solidFill>
           <a:srgbClr val="F3ECE1"/>
         </a:solidFill>
+        <a:effectLst/>
       </p:bgPr>
     </p:bg>
     <p:spTree>
@@ -14188,6 +15424,13 @@
             <a:prstDash val="solid"/>
           </a:ln>
         </p:spPr>
+        <p:txBody>
+          <a:bodyPr/>
+          <a:lstStyle/>
+          <a:p>
+            <a:endParaRPr lang="ar-SA"/>
+          </a:p>
+        </p:txBody>
       </p:sp>
       <p:sp>
         <p:nvSpPr>
@@ -14210,11 +15453,11 @@
           <a:bodyPr wrap="square" lIns="0" tIns="0" rIns="0" bIns="0" rtlCol="0" anchor="ctr"/>
           <a:lstStyle/>
           <a:p>
-            <a:pPr indent="0" marL="0">
-              <a:buNone/>
-            </a:pPr>
-            <a:r>
-              <a:rPr lang="en-US" sz="1200" b="1" spc="400" kern="0" dirty="0">
+            <a:pPr marL="0" indent="0">
+              <a:buNone/>
+            </a:pPr>
+            <a:r>
+              <a:rPr lang="en-US" sz="1200" b="1" kern="0" spc="400" dirty="0">
                 <a:solidFill>
                   <a:srgbClr val="4A5C57"/>
                 </a:solidFill>
@@ -14249,7 +15492,7 @@
           <a:bodyPr wrap="square" lIns="0" tIns="0" rIns="0" bIns="0" rtlCol="0" anchor="ctr"/>
           <a:lstStyle/>
           <a:p>
-            <a:pPr indent="0" marL="0">
+            <a:pPr marL="0" indent="0">
               <a:buNone/>
             </a:pPr>
             <a:r>
@@ -14293,13 +15536,20 @@
             <a:prstDash val="solid"/>
           </a:ln>
           <a:effectLst>
-            <a:outerShdw sx="100000" sy="100000" kx="0" ky="0" algn="bl" rotWithShape="0" blurRad="101600" dist="25400" dir="5400000">
+            <a:outerShdw blurRad="101600" dist="25400" dir="5400000" algn="bl" rotWithShape="0">
               <a:srgbClr val="000000">
                 <a:alpha val="8000"/>
               </a:srgbClr>
             </a:outerShdw>
           </a:effectLst>
         </p:spPr>
+        <p:txBody>
+          <a:bodyPr/>
+          <a:lstStyle/>
+          <a:p>
+            <a:endParaRPr lang="ar-SA"/>
+          </a:p>
+        </p:txBody>
       </p:sp>
       <p:sp>
         <p:nvSpPr>
@@ -14322,7 +15572,7 @@
           <a:bodyPr wrap="square" lIns="0" tIns="0" rIns="0" bIns="0" rtlCol="0" anchor="ctr"/>
           <a:lstStyle/>
           <a:p>
-            <a:pPr indent="0" marL="0">
+            <a:pPr marL="0" indent="0">
               <a:buNone/>
             </a:pPr>
             <a:r>
@@ -14366,6 +15616,13 @@
             <a:prstDash val="solid"/>
           </a:ln>
         </p:spPr>
+        <p:txBody>
+          <a:bodyPr/>
+          <a:lstStyle/>
+          <a:p>
+            <a:endParaRPr lang="ar-SA"/>
+          </a:p>
+        </p:txBody>
       </p:sp>
       <p:sp>
         <p:nvSpPr>
@@ -14388,7 +15645,7 @@
           <a:bodyPr wrap="square" lIns="0" tIns="0" rIns="0" bIns="0" rtlCol="0" anchor="ctr"/>
           <a:lstStyle/>
           <a:p>
-            <a:pPr algn="ctr" indent="0" marL="0">
+            <a:pPr marL="0" indent="0" algn="ctr">
               <a:buNone/>
             </a:pPr>
             <a:r>
@@ -14427,7 +15684,7 @@
           <a:bodyPr wrap="square" lIns="0" tIns="0" rIns="0" bIns="0" rtlCol="0" anchor="ctr"/>
           <a:lstStyle/>
           <a:p>
-            <a:pPr indent="0" marL="0">
+            <a:pPr marL="0" indent="0">
               <a:buNone/>
             </a:pPr>
             <a:r>
@@ -14471,6 +15728,13 @@
             <a:prstDash val="solid"/>
           </a:ln>
         </p:spPr>
+        <p:txBody>
+          <a:bodyPr/>
+          <a:lstStyle/>
+          <a:p>
+            <a:endParaRPr lang="ar-SA"/>
+          </a:p>
+        </p:txBody>
       </p:sp>
       <p:sp>
         <p:nvSpPr>
@@ -14493,7 +15757,7 @@
           <a:bodyPr wrap="square" lIns="0" tIns="0" rIns="0" bIns="0" rtlCol="0" anchor="ctr"/>
           <a:lstStyle/>
           <a:p>
-            <a:pPr indent="0" marL="0">
+            <a:pPr marL="0" indent="0">
               <a:buNone/>
             </a:pPr>
             <a:r>
@@ -14622,13 +15886,20 @@
             <a:prstDash val="solid"/>
           </a:ln>
           <a:effectLst>
-            <a:outerShdw sx="100000" sy="100000" kx="0" ky="0" algn="bl" rotWithShape="0" blurRad="101600" dist="25400" dir="5400000">
+            <a:outerShdw blurRad="101600" dist="25400" dir="5400000" algn="bl" rotWithShape="0">
               <a:srgbClr val="000000">
                 <a:alpha val="8000"/>
               </a:srgbClr>
             </a:outerShdw>
           </a:effectLst>
         </p:spPr>
+        <p:txBody>
+          <a:bodyPr/>
+          <a:lstStyle/>
+          <a:p>
+            <a:endParaRPr lang="ar-SA"/>
+          </a:p>
+        </p:txBody>
       </p:sp>
       <p:sp>
         <p:nvSpPr>
@@ -14651,7 +15922,7 @@
           <a:bodyPr wrap="square" lIns="0" tIns="0" rIns="0" bIns="0" rtlCol="0" anchor="ctr"/>
           <a:lstStyle/>
           <a:p>
-            <a:pPr indent="0" marL="0">
+            <a:pPr marL="0" indent="0">
               <a:buNone/>
             </a:pPr>
             <a:r>
@@ -14695,6 +15966,13 @@
             <a:prstDash val="solid"/>
           </a:ln>
         </p:spPr>
+        <p:txBody>
+          <a:bodyPr/>
+          <a:lstStyle/>
+          <a:p>
+            <a:endParaRPr lang="ar-SA"/>
+          </a:p>
+        </p:txBody>
       </p:sp>
       <p:sp>
         <p:nvSpPr>
@@ -14717,7 +15995,7 @@
           <a:bodyPr wrap="square" lIns="0" tIns="0" rIns="0" bIns="0" rtlCol="0" anchor="ctr"/>
           <a:lstStyle/>
           <a:p>
-            <a:pPr algn="ctr" indent="0" marL="0">
+            <a:pPr marL="0" indent="0" algn="ctr">
               <a:buNone/>
             </a:pPr>
             <a:r>
@@ -14756,7 +16034,7 @@
           <a:bodyPr wrap="square" lIns="0" tIns="0" rIns="0" bIns="0" rtlCol="0" anchor="ctr"/>
           <a:lstStyle/>
           <a:p>
-            <a:pPr indent="0" marL="0">
+            <a:pPr marL="0" indent="0">
               <a:buNone/>
             </a:pPr>
             <a:r>
@@ -14800,6 +16078,13 @@
             <a:prstDash val="solid"/>
           </a:ln>
         </p:spPr>
+        <p:txBody>
+          <a:bodyPr/>
+          <a:lstStyle/>
+          <a:p>
+            <a:endParaRPr lang="ar-SA"/>
+          </a:p>
+        </p:txBody>
       </p:sp>
       <p:sp>
         <p:nvSpPr>
@@ -14822,7 +16107,7 @@
           <a:bodyPr wrap="square" lIns="0" tIns="0" rIns="0" bIns="0" rtlCol="0" anchor="ctr"/>
           <a:lstStyle/>
           <a:p>
-            <a:pPr indent="0" marL="0">
+            <a:pPr marL="0" indent="0">
               <a:buNone/>
             </a:pPr>
             <a:r>
@@ -14951,13 +16236,20 @@
             <a:prstDash val="solid"/>
           </a:ln>
           <a:effectLst>
-            <a:outerShdw sx="100000" sy="100000" kx="0" ky="0" algn="bl" rotWithShape="0" blurRad="101600" dist="25400" dir="5400000">
+            <a:outerShdw blurRad="101600" dist="25400" dir="5400000" algn="bl" rotWithShape="0">
               <a:srgbClr val="000000">
                 <a:alpha val="8000"/>
               </a:srgbClr>
             </a:outerShdw>
           </a:effectLst>
         </p:spPr>
+        <p:txBody>
+          <a:bodyPr/>
+          <a:lstStyle/>
+          <a:p>
+            <a:endParaRPr lang="ar-SA"/>
+          </a:p>
+        </p:txBody>
       </p:sp>
       <p:sp>
         <p:nvSpPr>
@@ -14980,7 +16272,7 @@
           <a:bodyPr wrap="square" lIns="0" tIns="0" rIns="0" bIns="0" rtlCol="0" anchor="ctr"/>
           <a:lstStyle/>
           <a:p>
-            <a:pPr indent="0" marL="0">
+            <a:pPr marL="0" indent="0">
               <a:buNone/>
             </a:pPr>
             <a:r>
@@ -15024,6 +16316,13 @@
             <a:prstDash val="solid"/>
           </a:ln>
         </p:spPr>
+        <p:txBody>
+          <a:bodyPr/>
+          <a:lstStyle/>
+          <a:p>
+            <a:endParaRPr lang="ar-SA"/>
+          </a:p>
+        </p:txBody>
       </p:sp>
       <p:sp>
         <p:nvSpPr>
@@ -15046,7 +16345,7 @@
           <a:bodyPr wrap="square" lIns="0" tIns="0" rIns="0" bIns="0" rtlCol="0" anchor="ctr"/>
           <a:lstStyle/>
           <a:p>
-            <a:pPr algn="ctr" indent="0" marL="0">
+            <a:pPr marL="0" indent="0" algn="ctr">
               <a:buNone/>
             </a:pPr>
             <a:r>
@@ -15085,7 +16384,7 @@
           <a:bodyPr wrap="square" lIns="0" tIns="0" rIns="0" bIns="0" rtlCol="0" anchor="ctr"/>
           <a:lstStyle/>
           <a:p>
-            <a:pPr indent="0" marL="0">
+            <a:pPr marL="0" indent="0">
               <a:buNone/>
             </a:pPr>
             <a:r>
@@ -15129,6 +16428,13 @@
             <a:prstDash val="solid"/>
           </a:ln>
         </p:spPr>
+        <p:txBody>
+          <a:bodyPr/>
+          <a:lstStyle/>
+          <a:p>
+            <a:endParaRPr lang="ar-SA"/>
+          </a:p>
+        </p:txBody>
       </p:sp>
       <p:sp>
         <p:nvSpPr>
@@ -15151,7 +16457,7 @@
           <a:bodyPr wrap="square" lIns="0" tIns="0" rIns="0" bIns="0" rtlCol="0" anchor="ctr"/>
           <a:lstStyle/>
           <a:p>
-            <a:pPr indent="0" marL="0">
+            <a:pPr marL="0" indent="0">
               <a:buNone/>
             </a:pPr>
             <a:r>
@@ -15254,7 +16560,7 @@
           <a:bodyPr wrap="square" lIns="0" tIns="0" rIns="0" bIns="0" rtlCol="0" anchor="ctr"/>
           <a:lstStyle/>
           <a:p>
-            <a:pPr indent="0" marL="0">
+            <a:pPr marL="0" indent="0">
               <a:buNone/>
             </a:pPr>
             <a:r>
@@ -15293,7 +16599,7 @@
           <a:bodyPr wrap="square" lIns="0" tIns="0" rIns="0" bIns="0" rtlCol="0" anchor="ctr"/>
           <a:lstStyle/>
           <a:p>
-            <a:pPr algn="r" indent="0" marL="0">
+            <a:pPr marL="0" indent="0" algn="r">
               <a:buNone/>
             </a:pPr>
             <a:r>
@@ -15311,6 +16617,36 @@
           </a:p>
         </p:txBody>
       </p:sp>
+      <p:pic>
+        <p:nvPicPr>
+          <p:cNvPr id="32" name="Picture 31">
+            <a:extLst>
+              <a:ext uri="{FF2B5EF4-FFF2-40B4-BE49-F238E27FC236}">
+                <a16:creationId xmlns:a16="http://schemas.microsoft.com/office/drawing/2014/main" id="{B12A0EA6-111E-494F-599C-B74FD0308ED1}"/>
+              </a:ext>
+            </a:extLst>
+          </p:cNvPr>
+          <p:cNvPicPr>
+            <a:picLocks noChangeAspect="1"/>
+          </p:cNvPicPr>
+          <p:nvPr/>
+        </p:nvPicPr>
+        <p:blipFill>
+          <a:blip r:embed="rId3"/>
+          <a:stretch>
+            <a:fillRect/>
+          </a:stretch>
+        </p:blipFill>
+        <p:spPr>
+          <a:xfrm>
+            <a:off x="8827008" y="-128064"/>
+            <a:ext cx="3361944" cy="1451589"/>
+          </a:xfrm>
+          <a:prstGeom prst="rect">
+            <a:avLst/>
+          </a:prstGeom>
+        </p:spPr>
+      </p:pic>
     </p:spTree>
   </p:cSld>
   <p:clrMapOvr>
@@ -15327,6 +16663,7 @@
         <a:solidFill>
           <a:srgbClr val="F3ECE1"/>
         </a:solidFill>
+        <a:effectLst/>
       </p:bgPr>
     </p:bg>
     <p:spTree>
@@ -15367,6 +16704,13 @@
             <a:prstDash val="solid"/>
           </a:ln>
         </p:spPr>
+        <p:txBody>
+          <a:bodyPr/>
+          <a:lstStyle/>
+          <a:p>
+            <a:endParaRPr lang="ar-SA"/>
+          </a:p>
+        </p:txBody>
       </p:sp>
       <p:sp>
         <p:nvSpPr>
@@ -15389,11 +16733,11 @@
           <a:bodyPr wrap="square" lIns="0" tIns="0" rIns="0" bIns="0" rtlCol="0" anchor="ctr"/>
           <a:lstStyle/>
           <a:p>
-            <a:pPr indent="0" marL="0">
-              <a:buNone/>
-            </a:pPr>
-            <a:r>
-              <a:rPr lang="en-US" sz="1200" b="1" spc="400" kern="0" dirty="0">
+            <a:pPr marL="0" indent="0">
+              <a:buNone/>
+            </a:pPr>
+            <a:r>
+              <a:rPr lang="en-US" sz="1200" b="1" kern="0" spc="400" dirty="0">
                 <a:solidFill>
                   <a:srgbClr val="4A5C57"/>
                 </a:solidFill>
@@ -15428,7 +16772,7 @@
           <a:bodyPr wrap="square" lIns="0" tIns="0" rIns="0" bIns="0" rtlCol="0" anchor="ctr"/>
           <a:lstStyle/>
           <a:p>
-            <a:pPr indent="0" marL="0">
+            <a:pPr marL="0" indent="0">
               <a:buNone/>
             </a:pPr>
             <a:r>
@@ -15468,6 +16812,13 @@
             <a:prstDash val="solid"/>
           </a:ln>
         </p:spPr>
+        <p:txBody>
+          <a:bodyPr/>
+          <a:lstStyle/>
+          <a:p>
+            <a:endParaRPr lang="ar-SA"/>
+          </a:p>
+        </p:txBody>
       </p:sp>
       <p:sp>
         <p:nvSpPr>
@@ -15493,6 +16844,13 @@
             <a:prstDash val="solid"/>
           </a:ln>
         </p:spPr>
+        <p:txBody>
+          <a:bodyPr/>
+          <a:lstStyle/>
+          <a:p>
+            <a:endParaRPr lang="ar-SA"/>
+          </a:p>
+        </p:txBody>
       </p:sp>
       <p:sp>
         <p:nvSpPr>
@@ -15515,7 +16873,7 @@
           <a:bodyPr wrap="square" lIns="0" tIns="0" rIns="0" bIns="0" rtlCol="0" anchor="ctr"/>
           <a:lstStyle/>
           <a:p>
-            <a:pPr algn="ctr" indent="0" marL="0">
+            <a:pPr marL="0" indent="0" algn="ctr">
               <a:buNone/>
             </a:pPr>
             <a:r>
@@ -15554,7 +16912,7 @@
           <a:bodyPr wrap="square" lIns="0" tIns="0" rIns="0" bIns="0" rtlCol="0" anchor="ctr"/>
           <a:lstStyle/>
           <a:p>
-            <a:pPr indent="0" marL="0">
+            <a:pPr marL="0" indent="0">
               <a:buNone/>
             </a:pPr>
             <a:r>
@@ -15593,7 +16951,7 @@
           <a:bodyPr wrap="square" lIns="0" tIns="0" rIns="0" bIns="0" rtlCol="0" anchor="ctr"/>
           <a:lstStyle/>
           <a:p>
-            <a:pPr indent="0" marL="0">
+            <a:pPr marL="0" indent="0">
               <a:buNone/>
             </a:pPr>
             <a:r>
@@ -15635,6 +16993,13 @@
             <a:prstDash val="solid"/>
           </a:ln>
         </p:spPr>
+        <p:txBody>
+          <a:bodyPr/>
+          <a:lstStyle/>
+          <a:p>
+            <a:endParaRPr lang="ar-SA"/>
+          </a:p>
+        </p:txBody>
       </p:sp>
       <p:sp>
         <p:nvSpPr>
@@ -15657,7 +17022,7 @@
           <a:bodyPr wrap="square" lIns="0" tIns="0" rIns="0" bIns="0" rtlCol="0" anchor="ctr"/>
           <a:lstStyle/>
           <a:p>
-            <a:pPr algn="ctr" indent="0" marL="0">
+            <a:pPr marL="0" indent="0" algn="ctr">
               <a:buNone/>
             </a:pPr>
             <a:r>
@@ -15696,7 +17061,7 @@
           <a:bodyPr wrap="square" lIns="0" tIns="0" rIns="0" bIns="0" rtlCol="0" anchor="ctr"/>
           <a:lstStyle/>
           <a:p>
-            <a:pPr indent="0" marL="0">
+            <a:pPr marL="0" indent="0">
               <a:buNone/>
             </a:pPr>
             <a:r>
@@ -15735,7 +17100,7 @@
           <a:bodyPr wrap="square" lIns="0" tIns="0" rIns="0" bIns="0" rtlCol="0" anchor="ctr"/>
           <a:lstStyle/>
           <a:p>
-            <a:pPr indent="0" marL="0">
+            <a:pPr marL="0" indent="0">
               <a:buNone/>
             </a:pPr>
             <a:r>
@@ -15777,6 +17142,13 @@
             <a:prstDash val="solid"/>
           </a:ln>
         </p:spPr>
+        <p:txBody>
+          <a:bodyPr/>
+          <a:lstStyle/>
+          <a:p>
+            <a:endParaRPr lang="ar-SA"/>
+          </a:p>
+        </p:txBody>
       </p:sp>
       <p:sp>
         <p:nvSpPr>
@@ -15799,7 +17171,7 @@
           <a:bodyPr wrap="square" lIns="0" tIns="0" rIns="0" bIns="0" rtlCol="0" anchor="ctr"/>
           <a:lstStyle/>
           <a:p>
-            <a:pPr algn="ctr" indent="0" marL="0">
+            <a:pPr marL="0" indent="0" algn="ctr">
               <a:buNone/>
             </a:pPr>
             <a:r>
@@ -15838,7 +17210,7 @@
           <a:bodyPr wrap="square" lIns="0" tIns="0" rIns="0" bIns="0" rtlCol="0" anchor="ctr"/>
           <a:lstStyle/>
           <a:p>
-            <a:pPr indent="0" marL="0">
+            <a:pPr marL="0" indent="0">
               <a:buNone/>
             </a:pPr>
             <a:r>
@@ -15877,7 +17249,7 @@
           <a:bodyPr wrap="square" lIns="0" tIns="0" rIns="0" bIns="0" rtlCol="0" anchor="ctr"/>
           <a:lstStyle/>
           <a:p>
-            <a:pPr indent="0" marL="0">
+            <a:pPr marL="0" indent="0">
               <a:buNone/>
             </a:pPr>
             <a:r>
@@ -15919,6 +17291,13 @@
             <a:prstDash val="solid"/>
           </a:ln>
         </p:spPr>
+        <p:txBody>
+          <a:bodyPr/>
+          <a:lstStyle/>
+          <a:p>
+            <a:endParaRPr lang="ar-SA"/>
+          </a:p>
+        </p:txBody>
       </p:sp>
       <p:sp>
         <p:nvSpPr>
@@ -15941,7 +17320,7 @@
           <a:bodyPr wrap="square" lIns="0" tIns="0" rIns="0" bIns="0" rtlCol="0" anchor="ctr"/>
           <a:lstStyle/>
           <a:p>
-            <a:pPr algn="ctr" indent="0" marL="0">
+            <a:pPr marL="0" indent="0" algn="ctr">
               <a:buNone/>
             </a:pPr>
             <a:r>
@@ -15980,7 +17359,7 @@
           <a:bodyPr wrap="square" lIns="0" tIns="0" rIns="0" bIns="0" rtlCol="0" anchor="ctr"/>
           <a:lstStyle/>
           <a:p>
-            <a:pPr indent="0" marL="0">
+            <a:pPr marL="0" indent="0">
               <a:buNone/>
             </a:pPr>
             <a:r>
@@ -16019,7 +17398,7 @@
           <a:bodyPr wrap="square" lIns="0" tIns="0" rIns="0" bIns="0" rtlCol="0" anchor="ctr"/>
           <a:lstStyle/>
           <a:p>
-            <a:pPr indent="0" marL="0">
+            <a:pPr marL="0" indent="0">
               <a:buNone/>
             </a:pPr>
             <a:r>
@@ -16061,6 +17440,13 @@
             <a:prstDash val="solid"/>
           </a:ln>
         </p:spPr>
+        <p:txBody>
+          <a:bodyPr/>
+          <a:lstStyle/>
+          <a:p>
+            <a:endParaRPr lang="ar-SA"/>
+          </a:p>
+        </p:txBody>
       </p:sp>
       <p:sp>
         <p:nvSpPr>
@@ -16083,7 +17469,7 @@
           <a:bodyPr wrap="square" lIns="0" tIns="0" rIns="0" bIns="0" rtlCol="0" anchor="ctr"/>
           <a:lstStyle/>
           <a:p>
-            <a:pPr algn="ctr" indent="0" marL="0">
+            <a:pPr marL="0" indent="0" algn="ctr">
               <a:buNone/>
             </a:pPr>
             <a:r>
@@ -16122,7 +17508,7 @@
           <a:bodyPr wrap="square" lIns="0" tIns="0" rIns="0" bIns="0" rtlCol="0" anchor="ctr"/>
           <a:lstStyle/>
           <a:p>
-            <a:pPr indent="0" marL="0">
+            <a:pPr marL="0" indent="0">
               <a:buNone/>
             </a:pPr>
             <a:r>
@@ -16161,7 +17547,7 @@
           <a:bodyPr wrap="square" lIns="0" tIns="0" rIns="0" bIns="0" rtlCol="0" anchor="ctr"/>
           <a:lstStyle/>
           <a:p>
-            <a:pPr indent="0" marL="0">
+            <a:pPr marL="0" indent="0">
               <a:buNone/>
             </a:pPr>
             <a:r>
@@ -16205,6 +17591,13 @@
             <a:prstDash val="solid"/>
           </a:ln>
         </p:spPr>
+        <p:txBody>
+          <a:bodyPr/>
+          <a:lstStyle/>
+          <a:p>
+            <a:endParaRPr lang="ar-SA"/>
+          </a:p>
+        </p:txBody>
       </p:sp>
       <p:sp>
         <p:nvSpPr>
@@ -16227,11 +17620,11 @@
           <a:bodyPr wrap="square" lIns="0" tIns="0" rIns="0" bIns="0" rtlCol="0" anchor="ctr"/>
           <a:lstStyle/>
           <a:p>
-            <a:pPr indent="0" marL="0">
-              <a:buNone/>
-            </a:pPr>
-            <a:r>
-              <a:rPr lang="en-US" sz="1200" b="1" spc="400" kern="0" dirty="0">
+            <a:pPr marL="0" indent="0">
+              <a:buNone/>
+            </a:pPr>
+            <a:r>
+              <a:rPr lang="en-US" sz="1200" b="1" kern="0" spc="400" dirty="0">
                 <a:solidFill>
                   <a:srgbClr val="EDB897"/>
                 </a:solidFill>
@@ -16266,7 +17659,7 @@
           <a:bodyPr wrap="square" lIns="0" tIns="0" rIns="0" bIns="0" rtlCol="0" anchor="t"/>
           <a:lstStyle/>
           <a:p>
-            <a:pPr indent="0" marL="0">
+            <a:pPr marL="0" indent="0">
               <a:buNone/>
             </a:pPr>
             <a:r>
@@ -16283,7 +17676,7 @@
             <a:endParaRPr lang="en-US" sz="1250" dirty="0"/>
           </a:p>
           <a:p>
-            <a:pPr indent="0" marL="0">
+            <a:pPr marL="0" indent="0">
               <a:buNone/>
             </a:pPr>
             <a:r>
@@ -16297,9 +17690,6 @@
               </a:rPr>
               <a:t>  "userId": </a:t>
             </a:r>
-            <a:pPr indent="0" marL="0">
-              <a:buNone/>
-            </a:pPr>
             <a:r>
               <a:rPr lang="en-US" sz="1250" dirty="0">
                 <a:solidFill>
@@ -16314,7 +17704,7 @@
             <a:endParaRPr lang="en-US" sz="1250" dirty="0"/>
           </a:p>
           <a:p>
-            <a:pPr indent="0" marL="0">
+            <a:pPr marL="0" indent="0">
               <a:buNone/>
             </a:pPr>
             <a:r>
@@ -16328,9 +17718,6 @@
               </a:rPr>
               <a:t>  "suggestedUserId": </a:t>
             </a:r>
-            <a:pPr indent="0" marL="0">
-              <a:buNone/>
-            </a:pPr>
             <a:r>
               <a:rPr lang="en-US" sz="1250" dirty="0">
                 <a:solidFill>
@@ -16345,7 +17732,7 @@
             <a:endParaRPr lang="en-US" sz="1250" dirty="0"/>
           </a:p>
           <a:p>
-            <a:pPr indent="0" marL="0">
+            <a:pPr marL="0" indent="0">
               <a:buNone/>
             </a:pPr>
             <a:r>
@@ -16359,9 +17746,6 @@
               </a:rPr>
               <a:t>  "suggestedUserName": </a:t>
             </a:r>
-            <a:pPr indent="0" marL="0">
-              <a:buNone/>
-            </a:pPr>
             <a:r>
               <a:rPr lang="en-US" sz="1250" dirty="0">
                 <a:solidFill>
@@ -16376,7 +17760,7 @@
             <a:endParaRPr lang="en-US" sz="1250" dirty="0"/>
           </a:p>
           <a:p>
-            <a:pPr indent="0" marL="0">
+            <a:pPr marL="0" indent="0">
               <a:buNone/>
             </a:pPr>
             <a:r>
@@ -16390,9 +17774,6 @@
               </a:rPr>
               <a:t>  "compatibilityScore": </a:t>
             </a:r>
-            <a:pPr indent="0" marL="0">
-              <a:buNone/>
-            </a:pPr>
             <a:r>
               <a:rPr lang="en-US" sz="1250" dirty="0">
                 <a:solidFill>
@@ -16407,7 +17788,7 @@
             <a:endParaRPr lang="en-US" sz="1250" dirty="0"/>
           </a:p>
           <a:p>
-            <a:pPr indent="0" marL="0">
+            <a:pPr marL="0" indent="0">
               <a:buNone/>
             </a:pPr>
             <a:r>
@@ -16421,9 +17802,6 @@
               </a:rPr>
               <a:t>  "aiReasoning": </a:t>
             </a:r>
-            <a:pPr indent="0" marL="0">
-              <a:buNone/>
-            </a:pPr>
             <a:r>
               <a:rPr lang="en-US" sz="1250" dirty="0">
                 <a:solidFill>
@@ -16438,7 +17816,7 @@
             <a:endParaRPr lang="en-US" sz="1250" dirty="0"/>
           </a:p>
           <a:p>
-            <a:pPr indent="0" marL="0">
+            <a:pPr marL="0" indent="0">
               <a:buNone/>
             </a:pPr>
             <a:r>
@@ -16455,7 +17833,7 @@
             <a:endParaRPr lang="en-US" sz="1250" dirty="0"/>
           </a:p>
           <a:p>
-            <a:pPr indent="0" marL="0">
+            <a:pPr marL="0" indent="0">
               <a:buNone/>
             </a:pPr>
             <a:r>
@@ -16472,7 +17850,7 @@
             <a:endParaRPr lang="en-US" sz="1250" dirty="0"/>
           </a:p>
           <a:p>
-            <a:pPr indent="0" marL="0">
+            <a:pPr marL="0" indent="0">
               <a:buNone/>
             </a:pPr>
             <a:r>
@@ -16512,6 +17890,13 @@
             <a:prstDash val="solid"/>
           </a:ln>
         </p:spPr>
+        <p:txBody>
+          <a:bodyPr/>
+          <a:lstStyle/>
+          <a:p>
+            <a:endParaRPr lang="ar-SA"/>
+          </a:p>
+        </p:txBody>
       </p:sp>
       <p:sp>
         <p:nvSpPr>
@@ -16537,17 +17922,24 @@
             <a:prstDash val="solid"/>
           </a:ln>
         </p:spPr>
+        <p:txBody>
+          <a:bodyPr/>
+          <a:lstStyle/>
+          <a:p>
+            <a:endParaRPr lang="ar-SA"/>
+          </a:p>
+        </p:txBody>
       </p:sp>
       <p:pic>
         <p:nvPicPr>
-          <p:cNvPr id="31" name="Image 0" descr="preencoded.png">    </p:cNvPr>
+          <p:cNvPr id="31" name="Image 0" descr="preencoded.png"/>
           <p:cNvPicPr>
             <a:picLocks noChangeAspect="1"/>
           </p:cNvPicPr>
           <p:nvPr/>
         </p:nvPicPr>
         <p:blipFill>
-          <a:blip r:embed="rId1"/>
+          <a:blip r:embed="rId3"/>
           <a:stretch>
             <a:fillRect/>
           </a:stretch>
@@ -16583,7 +17975,7 @@
           <a:bodyPr wrap="square" lIns="0" tIns="0" rIns="0" bIns="0" rtlCol="0" anchor="ctr"/>
           <a:lstStyle/>
           <a:p>
-            <a:pPr indent="0" marL="0">
+            <a:pPr marL="0" indent="0">
               <a:buNone/>
             </a:pPr>
             <a:r>
@@ -16622,7 +18014,7 @@
           <a:bodyPr wrap="square" lIns="0" tIns="0" rIns="0" bIns="0" rtlCol="0" anchor="ctr"/>
           <a:lstStyle/>
           <a:p>
-            <a:pPr indent="0" marL="0">
+            <a:pPr marL="0" indent="0">
               <a:buNone/>
             </a:pPr>
             <a:r>
@@ -16661,7 +18053,7 @@
           <a:bodyPr wrap="square" lIns="0" tIns="0" rIns="0" bIns="0" rtlCol="0" anchor="ctr"/>
           <a:lstStyle/>
           <a:p>
-            <a:pPr algn="r" indent="0" marL="0">
+            <a:pPr marL="0" indent="0" algn="r">
               <a:buNone/>
             </a:pPr>
             <a:r>
@@ -16679,6 +18071,36 @@
           </a:p>
         </p:txBody>
       </p:sp>
+      <p:pic>
+        <p:nvPicPr>
+          <p:cNvPr id="36" name="Picture 35">
+            <a:extLst>
+              <a:ext uri="{FF2B5EF4-FFF2-40B4-BE49-F238E27FC236}">
+                <a16:creationId xmlns:a16="http://schemas.microsoft.com/office/drawing/2014/main" id="{124C7669-58EE-D7B4-923D-12C5B2A5ED44}"/>
+              </a:ext>
+            </a:extLst>
+          </p:cNvPr>
+          <p:cNvPicPr>
+            <a:picLocks noChangeAspect="1"/>
+          </p:cNvPicPr>
+          <p:nvPr/>
+        </p:nvPicPr>
+        <p:blipFill>
+          <a:blip r:embed="rId4"/>
+          <a:stretch>
+            <a:fillRect/>
+          </a:stretch>
+        </p:blipFill>
+        <p:spPr>
+          <a:xfrm>
+            <a:off x="8827008" y="-128064"/>
+            <a:ext cx="3361944" cy="1451589"/>
+          </a:xfrm>
+          <a:prstGeom prst="rect">
+            <a:avLst/>
+          </a:prstGeom>
+        </p:spPr>
+      </p:pic>
     </p:spTree>
   </p:cSld>
   <p:clrMapOvr>
@@ -16695,6 +18117,7 @@
         <a:solidFill>
           <a:srgbClr val="F3ECE1"/>
         </a:solidFill>
+        <a:effectLst/>
       </p:bgPr>
     </p:bg>
     <p:spTree>
@@ -16735,6 +18158,13 @@
             <a:prstDash val="solid"/>
           </a:ln>
         </p:spPr>
+        <p:txBody>
+          <a:bodyPr/>
+          <a:lstStyle/>
+          <a:p>
+            <a:endParaRPr lang="ar-SA"/>
+          </a:p>
+        </p:txBody>
       </p:sp>
       <p:sp>
         <p:nvSpPr>
@@ -16757,11 +18187,11 @@
           <a:bodyPr wrap="square" lIns="0" tIns="0" rIns="0" bIns="0" rtlCol="0" anchor="ctr"/>
           <a:lstStyle/>
           <a:p>
-            <a:pPr indent="0" marL="0">
-              <a:buNone/>
-            </a:pPr>
-            <a:r>
-              <a:rPr lang="en-US" sz="1200" b="1" spc="400" kern="0" dirty="0">
+            <a:pPr marL="0" indent="0">
+              <a:buNone/>
+            </a:pPr>
+            <a:r>
+              <a:rPr lang="en-US" sz="1200" b="1" kern="0" spc="400" dirty="0">
                 <a:solidFill>
                   <a:srgbClr val="4A5C57"/>
                 </a:solidFill>
@@ -16796,7 +18226,7 @@
           <a:bodyPr wrap="square" lIns="0" tIns="0" rIns="0" bIns="0" rtlCol="0" anchor="ctr"/>
           <a:lstStyle/>
           <a:p>
-            <a:pPr indent="0" marL="0">
+            <a:pPr marL="0" indent="0">
               <a:buNone/>
             </a:pPr>
             <a:r>
@@ -16840,13 +18270,20 @@
             <a:prstDash val="solid"/>
           </a:ln>
           <a:effectLst>
-            <a:outerShdw sx="100000" sy="100000" kx="0" ky="0" algn="bl" rotWithShape="0" blurRad="101600" dist="25400" dir="5400000">
+            <a:outerShdw blurRad="101600" dist="25400" dir="5400000" algn="bl" rotWithShape="0">
               <a:srgbClr val="000000">
                 <a:alpha val="8000"/>
               </a:srgbClr>
             </a:outerShdw>
           </a:effectLst>
         </p:spPr>
+        <p:txBody>
+          <a:bodyPr/>
+          <a:lstStyle/>
+          <a:p>
+            <a:endParaRPr lang="ar-SA"/>
+          </a:p>
+        </p:txBody>
       </p:sp>
       <p:sp>
         <p:nvSpPr>
@@ -16869,7 +18306,7 @@
           <a:bodyPr wrap="square" lIns="0" tIns="0" rIns="0" bIns="0" rtlCol="0" anchor="ctr"/>
           <a:lstStyle/>
           <a:p>
-            <a:pPr indent="0" marL="0">
+            <a:pPr marL="0" indent="0">
               <a:buNone/>
             </a:pPr>
             <a:r>
@@ -16913,6 +18350,13 @@
             <a:prstDash val="solid"/>
           </a:ln>
         </p:spPr>
+        <p:txBody>
+          <a:bodyPr/>
+          <a:lstStyle/>
+          <a:p>
+            <a:endParaRPr lang="ar-SA"/>
+          </a:p>
+        </p:txBody>
       </p:sp>
       <p:sp>
         <p:nvSpPr>
@@ -16935,7 +18379,7 @@
           <a:bodyPr wrap="square" lIns="0" tIns="0" rIns="0" bIns="0" rtlCol="0" anchor="ctr"/>
           <a:lstStyle/>
           <a:p>
-            <a:pPr algn="ctr" indent="0" marL="0">
+            <a:pPr marL="0" indent="0" algn="ctr">
               <a:buNone/>
             </a:pPr>
             <a:r>
@@ -16974,7 +18418,7 @@
           <a:bodyPr wrap="square" lIns="0" tIns="0" rIns="0" bIns="0" rtlCol="0" anchor="ctr"/>
           <a:lstStyle/>
           <a:p>
-            <a:pPr indent="0" marL="0">
+            <a:pPr marL="0" indent="0">
               <a:buNone/>
             </a:pPr>
             <a:r>
@@ -17018,6 +18462,13 @@
             <a:prstDash val="solid"/>
           </a:ln>
         </p:spPr>
+        <p:txBody>
+          <a:bodyPr/>
+          <a:lstStyle/>
+          <a:p>
+            <a:endParaRPr lang="ar-SA"/>
+          </a:p>
+        </p:txBody>
       </p:sp>
       <p:sp>
         <p:nvSpPr>
@@ -17040,7 +18491,7 @@
           <a:bodyPr wrap="square" lIns="0" tIns="0" rIns="0" bIns="0" rtlCol="0" anchor="ctr"/>
           <a:lstStyle/>
           <a:p>
-            <a:pPr indent="0" marL="0">
+            <a:pPr marL="0" indent="0">
               <a:buNone/>
             </a:pPr>
             <a:r>
@@ -17148,13 +18599,20 @@
             <a:prstDash val="solid"/>
           </a:ln>
           <a:effectLst>
-            <a:outerShdw sx="100000" sy="100000" kx="0" ky="0" algn="bl" rotWithShape="0" blurRad="101600" dist="25400" dir="5400000">
+            <a:outerShdw blurRad="101600" dist="25400" dir="5400000" algn="bl" rotWithShape="0">
               <a:srgbClr val="000000">
                 <a:alpha val="8000"/>
               </a:srgbClr>
             </a:outerShdw>
           </a:effectLst>
         </p:spPr>
+        <p:txBody>
+          <a:bodyPr/>
+          <a:lstStyle/>
+          <a:p>
+            <a:endParaRPr lang="ar-SA"/>
+          </a:p>
+        </p:txBody>
       </p:sp>
       <p:sp>
         <p:nvSpPr>
@@ -17177,7 +18635,7 @@
           <a:bodyPr wrap="square" lIns="0" tIns="0" rIns="0" bIns="0" rtlCol="0" anchor="ctr"/>
           <a:lstStyle/>
           <a:p>
-            <a:pPr indent="0" marL="0">
+            <a:pPr marL="0" indent="0">
               <a:buNone/>
             </a:pPr>
             <a:r>
@@ -17221,6 +18679,13 @@
             <a:prstDash val="solid"/>
           </a:ln>
         </p:spPr>
+        <p:txBody>
+          <a:bodyPr/>
+          <a:lstStyle/>
+          <a:p>
+            <a:endParaRPr lang="ar-SA"/>
+          </a:p>
+        </p:txBody>
       </p:sp>
       <p:sp>
         <p:nvSpPr>
@@ -17243,7 +18708,7 @@
           <a:bodyPr wrap="square" lIns="0" tIns="0" rIns="0" bIns="0" rtlCol="0" anchor="ctr"/>
           <a:lstStyle/>
           <a:p>
-            <a:pPr algn="ctr" indent="0" marL="0">
+            <a:pPr marL="0" indent="0" algn="ctr">
               <a:buNone/>
             </a:pPr>
             <a:r>
@@ -17282,7 +18747,7 @@
           <a:bodyPr wrap="square" lIns="0" tIns="0" rIns="0" bIns="0" rtlCol="0" anchor="ctr"/>
           <a:lstStyle/>
           <a:p>
-            <a:pPr indent="0" marL="0">
+            <a:pPr marL="0" indent="0">
               <a:buNone/>
             </a:pPr>
             <a:r>
@@ -17326,6 +18791,13 @@
             <a:prstDash val="solid"/>
           </a:ln>
         </p:spPr>
+        <p:txBody>
+          <a:bodyPr/>
+          <a:lstStyle/>
+          <a:p>
+            <a:endParaRPr lang="ar-SA"/>
+          </a:p>
+        </p:txBody>
       </p:sp>
       <p:sp>
         <p:nvSpPr>
@@ -17348,7 +18820,7 @@
           <a:bodyPr wrap="square" lIns="0" tIns="0" rIns="0" bIns="0" rtlCol="0" anchor="ctr"/>
           <a:lstStyle/>
           <a:p>
-            <a:pPr indent="0" marL="0">
+            <a:pPr marL="0" indent="0">
               <a:buNone/>
             </a:pPr>
             <a:r>
@@ -17456,13 +18928,20 @@
             <a:prstDash val="solid"/>
           </a:ln>
           <a:effectLst>
-            <a:outerShdw sx="100000" sy="100000" kx="0" ky="0" algn="bl" rotWithShape="0" blurRad="101600" dist="25400" dir="5400000">
+            <a:outerShdw blurRad="101600" dist="25400" dir="5400000" algn="bl" rotWithShape="0">
               <a:srgbClr val="000000">
                 <a:alpha val="8000"/>
               </a:srgbClr>
             </a:outerShdw>
           </a:effectLst>
         </p:spPr>
+        <p:txBody>
+          <a:bodyPr/>
+          <a:lstStyle/>
+          <a:p>
+            <a:endParaRPr lang="ar-SA"/>
+          </a:p>
+        </p:txBody>
       </p:sp>
       <p:sp>
         <p:nvSpPr>
@@ -17485,7 +18964,7 @@
           <a:bodyPr wrap="square" lIns="0" tIns="0" rIns="0" bIns="0" rtlCol="0" anchor="ctr"/>
           <a:lstStyle/>
           <a:p>
-            <a:pPr indent="0" marL="0">
+            <a:pPr marL="0" indent="0">
               <a:buNone/>
             </a:pPr>
             <a:r>
@@ -17529,6 +19008,13 @@
             <a:prstDash val="solid"/>
           </a:ln>
         </p:spPr>
+        <p:txBody>
+          <a:bodyPr/>
+          <a:lstStyle/>
+          <a:p>
+            <a:endParaRPr lang="ar-SA"/>
+          </a:p>
+        </p:txBody>
       </p:sp>
       <p:sp>
         <p:nvSpPr>
@@ -17551,7 +19037,7 @@
           <a:bodyPr wrap="square" lIns="0" tIns="0" rIns="0" bIns="0" rtlCol="0" anchor="ctr"/>
           <a:lstStyle/>
           <a:p>
-            <a:pPr algn="ctr" indent="0" marL="0">
+            <a:pPr marL="0" indent="0" algn="ctr">
               <a:buNone/>
             </a:pPr>
             <a:r>
@@ -17590,7 +19076,7 @@
           <a:bodyPr wrap="square" lIns="0" tIns="0" rIns="0" bIns="0" rtlCol="0" anchor="ctr"/>
           <a:lstStyle/>
           <a:p>
-            <a:pPr indent="0" marL="0">
+            <a:pPr marL="0" indent="0">
               <a:buNone/>
             </a:pPr>
             <a:r>
@@ -17634,6 +19120,13 @@
             <a:prstDash val="solid"/>
           </a:ln>
         </p:spPr>
+        <p:txBody>
+          <a:bodyPr/>
+          <a:lstStyle/>
+          <a:p>
+            <a:endParaRPr lang="ar-SA"/>
+          </a:p>
+        </p:txBody>
       </p:sp>
       <p:sp>
         <p:nvSpPr>
@@ -17656,7 +19149,7 @@
           <a:bodyPr wrap="square" lIns="0" tIns="0" rIns="0" bIns="0" rtlCol="0" anchor="ctr"/>
           <a:lstStyle/>
           <a:p>
-            <a:pPr indent="0" marL="0">
+            <a:pPr marL="0" indent="0">
               <a:buNone/>
             </a:pPr>
             <a:r>
@@ -17759,7 +19252,7 @@
           <a:bodyPr wrap="square" lIns="0" tIns="0" rIns="0" bIns="0" rtlCol="0" anchor="ctr"/>
           <a:lstStyle/>
           <a:p>
-            <a:pPr indent="0" marL="0">
+            <a:pPr marL="0" indent="0">
               <a:buNone/>
             </a:pPr>
             <a:r>
@@ -17798,7 +19291,7 @@
           <a:bodyPr wrap="square" lIns="0" tIns="0" rIns="0" bIns="0" rtlCol="0" anchor="ctr"/>
           <a:lstStyle/>
           <a:p>
-            <a:pPr algn="r" indent="0" marL="0">
+            <a:pPr marL="0" indent="0" algn="r">
               <a:buNone/>
             </a:pPr>
             <a:r>
@@ -17816,6 +19309,36 @@
           </a:p>
         </p:txBody>
       </p:sp>
+      <p:pic>
+        <p:nvPicPr>
+          <p:cNvPr id="32" name="Picture 31">
+            <a:extLst>
+              <a:ext uri="{FF2B5EF4-FFF2-40B4-BE49-F238E27FC236}">
+                <a16:creationId xmlns:a16="http://schemas.microsoft.com/office/drawing/2014/main" id="{0C85432E-5BF5-BFB3-9058-3256BBC065A5}"/>
+              </a:ext>
+            </a:extLst>
+          </p:cNvPr>
+          <p:cNvPicPr>
+            <a:picLocks noChangeAspect="1"/>
+          </p:cNvPicPr>
+          <p:nvPr/>
+        </p:nvPicPr>
+        <p:blipFill>
+          <a:blip r:embed="rId3"/>
+          <a:stretch>
+            <a:fillRect/>
+          </a:stretch>
+        </p:blipFill>
+        <p:spPr>
+          <a:xfrm>
+            <a:off x="8827008" y="-128064"/>
+            <a:ext cx="3361944" cy="1451589"/>
+          </a:xfrm>
+          <a:prstGeom prst="rect">
+            <a:avLst/>
+          </a:prstGeom>
+        </p:spPr>
+      </p:pic>
     </p:spTree>
   </p:cSld>
   <p:clrMapOvr>
@@ -18117,4 +19640,319 @@
     </a:ext>
   </a:extLst>
 </a:theme>
+</file>
+
+<file path=ppt/theme/theme2.xml><?xml version="1.0" encoding="utf-8"?>
+<a:theme xmlns:a="http://schemas.openxmlformats.org/drawingml/2006/main" name="Office Theme">
+  <a:themeElements>
+    <a:clrScheme name="Office">
+      <a:dk1>
+        <a:sysClr val="windowText" lastClr="000000"/>
+      </a:dk1>
+      <a:lt1>
+        <a:sysClr val="window" lastClr="FFFFFF"/>
+      </a:lt1>
+      <a:dk2>
+        <a:srgbClr val="0E2841"/>
+      </a:dk2>
+      <a:lt2>
+        <a:srgbClr val="E8E8E8"/>
+      </a:lt2>
+      <a:accent1>
+        <a:srgbClr val="156082"/>
+      </a:accent1>
+      <a:accent2>
+        <a:srgbClr val="E97132"/>
+      </a:accent2>
+      <a:accent3>
+        <a:srgbClr val="196B24"/>
+      </a:accent3>
+      <a:accent4>
+        <a:srgbClr val="0F9ED5"/>
+      </a:accent4>
+      <a:accent5>
+        <a:srgbClr val="A02B93"/>
+      </a:accent5>
+      <a:accent6>
+        <a:srgbClr val="4EA72E"/>
+      </a:accent6>
+      <a:hlink>
+        <a:srgbClr val="467886"/>
+      </a:hlink>
+      <a:folHlink>
+        <a:srgbClr val="96607D"/>
+      </a:folHlink>
+    </a:clrScheme>
+    <a:fontScheme name="Office">
+      <a:majorFont>
+        <a:latin typeface="Aptos Display" panose="02110004020202020204"/>
+        <a:ea typeface=""/>
+        <a:cs typeface=""/>
+        <a:font script="Jpan" typeface="游ゴシック Light"/>
+        <a:font script="Hang" typeface="맑은 고딕"/>
+        <a:font script="Hans" typeface="等线 Light"/>
+        <a:font script="Hant" typeface="新細明體"/>
+        <a:font script="Arab" typeface="Times New Roman"/>
+        <a:font script="Hebr" typeface="Times New Roman"/>
+        <a:font script="Thai" typeface="Angsana New"/>
+        <a:font script="Ethi" typeface="Nyala"/>
+        <a:font script="Beng" typeface="Vrinda"/>
+        <a:font script="Gujr" typeface="Shruti"/>
+        <a:font script="Khmr" typeface="MoolBoran"/>
+        <a:font script="Knda" typeface="Tunga"/>
+        <a:font script="Guru" typeface="Raavi"/>
+        <a:font script="Cans" typeface="Euphemia"/>
+        <a:font script="Cher" typeface="Plantagenet Cherokee"/>
+        <a:font script="Yiii" typeface="Microsoft Yi Baiti"/>
+        <a:font script="Tibt" typeface="Microsoft Himalaya"/>
+        <a:font script="Thaa" typeface="MV Boli"/>
+        <a:font script="Deva" typeface="Mangal"/>
+        <a:font script="Telu" typeface="Gautami"/>
+        <a:font script="Taml" typeface="Latha"/>
+        <a:font script="Syrc" typeface="Estrangelo Edessa"/>
+        <a:font script="Orya" typeface="Kalinga"/>
+        <a:font script="Mlym" typeface="Kartika"/>
+        <a:font script="Laoo" typeface="DokChampa"/>
+        <a:font script="Sinh" typeface="Iskoola Pota"/>
+        <a:font script="Mong" typeface="Mongolian Baiti"/>
+        <a:font script="Viet" typeface="Times New Roman"/>
+        <a:font script="Uigh" typeface="Microsoft Uighur"/>
+        <a:font script="Geor" typeface="Sylfaen"/>
+        <a:font script="Armn" typeface="Arial"/>
+        <a:font script="Bugi" typeface="Leelawadee UI"/>
+        <a:font script="Bopo" typeface="Microsoft JhengHei"/>
+        <a:font script="Java" typeface="Javanese Text"/>
+        <a:font script="Lisu" typeface="Segoe UI"/>
+        <a:font script="Mymr" typeface="Myanmar Text"/>
+        <a:font script="Nkoo" typeface="Ebrima"/>
+        <a:font script="Olck" typeface="Nirmala UI"/>
+        <a:font script="Osma" typeface="Ebrima"/>
+        <a:font script="Phag" typeface="Phagspa"/>
+        <a:font script="Syrn" typeface="Estrangelo Edessa"/>
+        <a:font script="Syrj" typeface="Estrangelo Edessa"/>
+        <a:font script="Syre" typeface="Estrangelo Edessa"/>
+        <a:font script="Sora" typeface="Nirmala UI"/>
+        <a:font script="Tale" typeface="Microsoft Tai Le"/>
+        <a:font script="Talu" typeface="Microsoft New Tai Lue"/>
+        <a:font script="Tfng" typeface="Ebrima"/>
+      </a:majorFont>
+      <a:minorFont>
+        <a:latin typeface="Aptos" panose="02110004020202020204"/>
+        <a:ea typeface=""/>
+        <a:cs typeface=""/>
+        <a:font script="Jpan" typeface="游ゴシック"/>
+        <a:font script="Hang" typeface="맑은 고딕"/>
+        <a:font script="Hans" typeface="等线"/>
+        <a:font script="Hant" typeface="新細明體"/>
+        <a:font script="Arab" typeface="Arial"/>
+        <a:font script="Hebr" typeface="Arial"/>
+        <a:font script="Thai" typeface="Cordia New"/>
+        <a:font script="Ethi" typeface="Nyala"/>
+        <a:font script="Beng" typeface="Vrinda"/>
+        <a:font script="Gujr" typeface="Shruti"/>
+        <a:font script="Khmr" typeface="DaunPenh"/>
+        <a:font script="Knda" typeface="Tunga"/>
+        <a:font script="Guru" typeface="Raavi"/>
+        <a:font script="Cans" typeface="Euphemia"/>
+        <a:font script="Cher" typeface="Plantagenet Cherokee"/>
+        <a:font script="Yiii" typeface="Microsoft Yi Baiti"/>
+        <a:font script="Tibt" typeface="Microsoft Himalaya"/>
+        <a:font script="Thaa" typeface="MV Boli"/>
+        <a:font script="Deva" typeface="Mangal"/>
+        <a:font script="Telu" typeface="Gautami"/>
+        <a:font script="Taml" typeface="Latha"/>
+        <a:font script="Syrc" typeface="Estrangelo Edessa"/>
+        <a:font script="Orya" typeface="Kalinga"/>
+        <a:font script="Mlym" typeface="Kartika"/>
+        <a:font script="Laoo" typeface="DokChampa"/>
+        <a:font script="Sinh" typeface="Iskoola Pota"/>
+        <a:font script="Mong" typeface="Mongolian Baiti"/>
+        <a:font script="Viet" typeface="Arial"/>
+        <a:font script="Uigh" typeface="Microsoft Uighur"/>
+        <a:font script="Geor" typeface="Sylfaen"/>
+        <a:font script="Armn" typeface="Arial"/>
+        <a:font script="Bugi" typeface="Leelawadee UI"/>
+        <a:font script="Bopo" typeface="Microsoft JhengHei"/>
+        <a:font script="Java" typeface="Javanese Text"/>
+        <a:font script="Lisu" typeface="Segoe UI"/>
+        <a:font script="Mymr" typeface="Myanmar Text"/>
+        <a:font script="Nkoo" typeface="Ebrima"/>
+        <a:font script="Olck" typeface="Nirmala UI"/>
+        <a:font script="Osma" typeface="Ebrima"/>
+        <a:font script="Phag" typeface="Phagspa"/>
+        <a:font script="Syrn" typeface="Estrangelo Edessa"/>
+        <a:font script="Syrj" typeface="Estrangelo Edessa"/>
+        <a:font script="Syre" typeface="Estrangelo Edessa"/>
+        <a:font script="Sora" typeface="Nirmala UI"/>
+        <a:font script="Tale" typeface="Microsoft Tai Le"/>
+        <a:font script="Talu" typeface="Microsoft New Tai Lue"/>
+        <a:font script="Tfng" typeface="Ebrima"/>
+      </a:minorFont>
+    </a:fontScheme>
+    <a:fmtScheme name="Office">
+      <a:fillStyleLst>
+        <a:solidFill>
+          <a:schemeClr val="phClr"/>
+        </a:solidFill>
+        <a:gradFill rotWithShape="1">
+          <a:gsLst>
+            <a:gs pos="0">
+              <a:schemeClr val="phClr">
+                <a:lumMod val="110000"/>
+                <a:satMod val="105000"/>
+                <a:tint val="67000"/>
+              </a:schemeClr>
+            </a:gs>
+            <a:gs pos="50000">
+              <a:schemeClr val="phClr">
+                <a:lumMod val="105000"/>
+                <a:satMod val="103000"/>
+                <a:tint val="73000"/>
+              </a:schemeClr>
+            </a:gs>
+            <a:gs pos="100000">
+              <a:schemeClr val="phClr">
+                <a:lumMod val="105000"/>
+                <a:satMod val="109000"/>
+                <a:tint val="81000"/>
+              </a:schemeClr>
+            </a:gs>
+          </a:gsLst>
+          <a:lin ang="5400000" scaled="0"/>
+        </a:gradFill>
+        <a:gradFill rotWithShape="1">
+          <a:gsLst>
+            <a:gs pos="0">
+              <a:schemeClr val="phClr">
+                <a:satMod val="103000"/>
+                <a:lumMod val="102000"/>
+                <a:tint val="94000"/>
+              </a:schemeClr>
+            </a:gs>
+            <a:gs pos="50000">
+              <a:schemeClr val="phClr">
+                <a:satMod val="110000"/>
+                <a:lumMod val="100000"/>
+                <a:shade val="100000"/>
+              </a:schemeClr>
+            </a:gs>
+            <a:gs pos="100000">
+              <a:schemeClr val="phClr">
+                <a:lumMod val="99000"/>
+                <a:satMod val="120000"/>
+                <a:shade val="78000"/>
+              </a:schemeClr>
+            </a:gs>
+          </a:gsLst>
+          <a:lin ang="5400000" scaled="0"/>
+        </a:gradFill>
+      </a:fillStyleLst>
+      <a:lnStyleLst>
+        <a:ln w="12700" cap="flat" cmpd="sng" algn="ctr">
+          <a:solidFill>
+            <a:schemeClr val="phClr"/>
+          </a:solidFill>
+          <a:prstDash val="solid"/>
+          <a:miter lim="800000"/>
+        </a:ln>
+        <a:ln w="19050" cap="flat" cmpd="sng" algn="ctr">
+          <a:solidFill>
+            <a:schemeClr val="phClr"/>
+          </a:solidFill>
+          <a:prstDash val="solid"/>
+          <a:miter lim="800000"/>
+        </a:ln>
+        <a:ln w="25400" cap="flat" cmpd="sng" algn="ctr">
+          <a:solidFill>
+            <a:schemeClr val="phClr"/>
+          </a:solidFill>
+          <a:prstDash val="solid"/>
+          <a:miter lim="800000"/>
+        </a:ln>
+      </a:lnStyleLst>
+      <a:effectStyleLst>
+        <a:effectStyle>
+          <a:effectLst/>
+        </a:effectStyle>
+        <a:effectStyle>
+          <a:effectLst/>
+        </a:effectStyle>
+        <a:effectStyle>
+          <a:effectLst>
+            <a:outerShdw blurRad="57150" dist="19050" dir="5400000" algn="ctr" rotWithShape="0">
+              <a:srgbClr val="000000">
+                <a:alpha val="63000"/>
+              </a:srgbClr>
+            </a:outerShdw>
+          </a:effectLst>
+        </a:effectStyle>
+      </a:effectStyleLst>
+      <a:bgFillStyleLst>
+        <a:solidFill>
+          <a:schemeClr val="phClr"/>
+        </a:solidFill>
+        <a:solidFill>
+          <a:schemeClr val="phClr">
+            <a:tint val="95000"/>
+            <a:satMod val="170000"/>
+          </a:schemeClr>
+        </a:solidFill>
+        <a:gradFill rotWithShape="1">
+          <a:gsLst>
+            <a:gs pos="0">
+              <a:schemeClr val="phClr">
+                <a:tint val="93000"/>
+                <a:satMod val="150000"/>
+                <a:shade val="98000"/>
+                <a:lumMod val="102000"/>
+              </a:schemeClr>
+            </a:gs>
+            <a:gs pos="50000">
+              <a:schemeClr val="phClr">
+                <a:tint val="98000"/>
+                <a:satMod val="130000"/>
+                <a:shade val="90000"/>
+                <a:lumMod val="103000"/>
+              </a:schemeClr>
+            </a:gs>
+            <a:gs pos="100000">
+              <a:schemeClr val="phClr">
+                <a:shade val="63000"/>
+                <a:satMod val="120000"/>
+              </a:schemeClr>
+            </a:gs>
+          </a:gsLst>
+          <a:lin ang="5400000" scaled="0"/>
+        </a:gradFill>
+      </a:bgFillStyleLst>
+    </a:fmtScheme>
+  </a:themeElements>
+  <a:objectDefaults>
+    <a:lnDef>
+      <a:spPr/>
+      <a:bodyPr/>
+      <a:lstStyle/>
+      <a:style>
+        <a:lnRef idx="2">
+          <a:schemeClr val="accent1"/>
+        </a:lnRef>
+        <a:fillRef idx="0">
+          <a:schemeClr val="accent1"/>
+        </a:fillRef>
+        <a:effectRef idx="1">
+          <a:schemeClr val="accent1"/>
+        </a:effectRef>
+        <a:fontRef idx="minor">
+          <a:schemeClr val="tx1"/>
+        </a:fontRef>
+      </a:style>
+    </a:lnDef>
+  </a:objectDefaults>
+  <a:extraClrSchemeLst/>
+  <a:extLst>
+    <a:ext uri="{05A4C25C-085E-4340-85A3-A5531E510DB2}">
+      <thm15:themeFamily xmlns:thm15="http://schemas.microsoft.com/office/thememl/2012/main" name="Office Theme" id="{2E142A2C-CD16-42D6-873A-C26D2A0506FA}" vid="{1BDDFF52-6CD6-40A5-AB3C-68EB2F1E4D0A}"/>
+    </a:ext>
+  </a:extLst>
+</a:theme>
 </file>